--- a/Gut-Brain-Axis-Deck-Depth.pptx
+++ b/Gut-Brain-Axis-Deck-Depth.pptx
@@ -5822,17 +5822,19 @@
       </p:sp>
       <p:sp>
         <p:nvSpPr>
-          <p:cNvPr id="40" name="Panel A"/>
+          <p:cNvPr id="4" name="Shape 2"/>
           <p:cNvSpPr/>
           <p:nvPr/>
         </p:nvSpPr>
         <p:spPr>
           <a:xfrm>
             <a:off x="548640" y="1783080"/>
-            <a:ext cx="3520440" cy="4114800"/>
+            <a:ext cx="3383280" cy="4114800"/>
           </a:xfrm>
           <a:prstGeom prst="roundRect">
-            <a:avLst/>
+            <a:avLst>
+              <a:gd name="adj" fmla="val 2432"/>
+            </a:avLst>
           </a:prstGeom>
           <a:solidFill>
             <a:srgbClr val="FCF4E3"/>
@@ -5843,24 +5845,284 @@
             </a:solidFill>
             <a:prstDash val="solid"/>
           </a:ln>
-        </p:spPr>
-      </p:sp>
-      <p:sp>
-        <p:nvSpPr>
-          <p:cNvPr id="41" name="Panel B"/>
-          <p:cNvSpPr/>
-          <p:nvPr/>
-        </p:nvSpPr>
-        <p:spPr>
-          <a:xfrm>
-            <a:off x="4297680" y="1783080"/>
-            <a:ext cx="3566160" cy="4114800"/>
+          <a:effectLst>
+            <a:outerShdw sx="100000" sy="100000" kx="0" ky="0" algn="bl" rotWithShape="0" blurRad="114300" dist="38100" dir="8100000">
+              <a:srgbClr val="000000">
+                <a:alpha val="16000"/>
+              </a:srgbClr>
+            </a:outerShdw>
+          </a:effectLst>
+        </p:spPr>
+      </p:sp>
+      <p:sp>
+        <p:nvSpPr>
+          <p:cNvPr id="5" name="Text 3"/>
+          <p:cNvSpPr/>
+          <p:nvPr/>
+        </p:nvSpPr>
+        <p:spPr>
+          <a:xfrm>
+            <a:off x="731520" y="1920240"/>
+            <a:ext cx="2971800" cy="457200"/>
+          </a:xfrm>
+          <a:prstGeom prst="rect">
+            <a:avLst/>
+          </a:prstGeom>
+          <a:noFill/>
+          <a:ln/>
+        </p:spPr>
+        <p:txBody>
+          <a:bodyPr wrap="square" lIns="0" tIns="0" rIns="0" bIns="0" rtlCol="0" anchor="ctr"/>
+          <a:lstStyle/>
+          <a:p>
+            <a:pPr algn="ctr" indent="0" marL="0">
+              <a:buNone/>
+            </a:pPr>
+            <a:r>
+              <a:rPr lang="en-US" sz="1400" b="1" dirty="0">
+                <a:solidFill>
+                  <a:srgbClr val="B88A1F"/>
+                </a:solidFill>
+                <a:latin typeface="Calibri" pitchFamily="34" charset="0"/>
+                <a:ea typeface="Calibri" pitchFamily="34" charset="-122"/>
+                <a:cs typeface="Calibri" pitchFamily="34" charset="-120"/>
+              </a:rPr>
+              <a:t>What shapes your microbiome</a:t>
+            </a:r>
+            <a:endParaRPr lang="en-US" sz="1400" dirty="0"/>
+          </a:p>
+        </p:txBody>
+      </p:sp>
+      <p:sp>
+        <p:nvSpPr>
+          <p:cNvPr id="6" name="Text 4"/>
+          <p:cNvSpPr/>
+          <p:nvPr/>
+        </p:nvSpPr>
+        <p:spPr>
+          <a:xfrm>
+            <a:off x="932688" y="2423160"/>
+            <a:ext cx="2697480" cy="1828800"/>
+          </a:xfrm>
+          <a:prstGeom prst="rect">
+            <a:avLst/>
+          </a:prstGeom>
+          <a:noFill/>
+          <a:ln/>
+        </p:spPr>
+        <p:txBody>
+          <a:bodyPr wrap="square" lIns="0" tIns="0" rIns="0" bIns="0" rtlCol="0" anchor="ctr"/>
+          <a:lstStyle/>
+          <a:p>
+            <a:pPr marL="342900" indent="-342900">
+              <a:spcAft>
+                <a:spcPts val="600"/>
+              </a:spcAft>
+              <a:buSzPct val="100000"/>
+              <a:buChar char="•"/>
+            </a:pPr>
+            <a:r>
+              <a:rPr lang="en-US" sz="1320" dirty="0">
+                <a:solidFill>
+                  <a:srgbClr val="6B625A"/>
+                </a:solidFill>
+                <a:latin typeface="Calibri" pitchFamily="34" charset="0"/>
+                <a:ea typeface="Calibri" pitchFamily="34" charset="-122"/>
+                <a:cs typeface="Calibri" pitchFamily="34" charset="-120"/>
+              </a:rPr>
+              <a:t>Diet &amp; fiber</a:t>
+            </a:r>
+            <a:endParaRPr lang="en-US" sz="1320" dirty="0"/>
+          </a:p>
+          <a:p>
+            <a:pPr marL="342900" indent="-342900">
+              <a:spcAft>
+                <a:spcPts val="600"/>
+              </a:spcAft>
+              <a:buSzPct val="100000"/>
+              <a:buChar char="•"/>
+            </a:pPr>
+            <a:r>
+              <a:rPr lang="en-US" sz="1320" dirty="0">
+                <a:solidFill>
+                  <a:srgbClr val="6B625A"/>
+                </a:solidFill>
+                <a:latin typeface="Calibri" pitchFamily="34" charset="0"/>
+                <a:ea typeface="Calibri" pitchFamily="34" charset="-122"/>
+                <a:cs typeface="Calibri" pitchFamily="34" charset="-120"/>
+              </a:rPr>
+              <a:t>Genes &amp; age</a:t>
+            </a:r>
+            <a:endParaRPr lang="en-US" sz="1320" dirty="0"/>
+          </a:p>
+          <a:p>
+            <a:pPr marL="342900" indent="-342900">
+              <a:spcAft>
+                <a:spcPts val="600"/>
+              </a:spcAft>
+              <a:buSzPct val="100000"/>
+              <a:buChar char="•"/>
+            </a:pPr>
+            <a:r>
+              <a:rPr lang="en-US" sz="1320" dirty="0">
+                <a:solidFill>
+                  <a:srgbClr val="6B625A"/>
+                </a:solidFill>
+                <a:latin typeface="Calibri" pitchFamily="34" charset="0"/>
+                <a:ea typeface="Calibri" pitchFamily="34" charset="-122"/>
+                <a:cs typeface="Calibri" pitchFamily="34" charset="-120"/>
+              </a:rPr>
+              <a:t>Antibiotics</a:t>
+            </a:r>
+            <a:endParaRPr lang="en-US" sz="1320" dirty="0"/>
+          </a:p>
+          <a:p>
+            <a:pPr marL="342900" indent="-342900">
+              <a:spcAft>
+                <a:spcPts val="600"/>
+              </a:spcAft>
+              <a:buSzPct val="100000"/>
+              <a:buChar char="•"/>
+            </a:pPr>
+            <a:r>
+              <a:rPr lang="en-US" sz="1320" dirty="0">
+                <a:solidFill>
+                  <a:srgbClr val="6B625A"/>
+                </a:solidFill>
+                <a:latin typeface="Calibri" pitchFamily="34" charset="0"/>
+                <a:ea typeface="Calibri" pitchFamily="34" charset="-122"/>
+                <a:cs typeface="Calibri" pitchFamily="34" charset="-120"/>
+              </a:rPr>
+              <a:t>Stress</a:t>
+            </a:r>
+            <a:endParaRPr lang="en-US" sz="1320" dirty="0"/>
+          </a:p>
+          <a:p>
+            <a:pPr marL="342900" indent="-342900">
+              <a:spcAft>
+                <a:spcPts val="600"/>
+              </a:spcAft>
+              <a:buSzPct val="100000"/>
+              <a:buChar char="•"/>
+            </a:pPr>
+            <a:r>
+              <a:rPr lang="en-US" sz="1320" dirty="0">
+                <a:solidFill>
+                  <a:srgbClr val="6B625A"/>
+                </a:solidFill>
+                <a:latin typeface="Calibri" pitchFamily="34" charset="0"/>
+                <a:ea typeface="Calibri" pitchFamily="34" charset="-122"/>
+                <a:cs typeface="Calibri" pitchFamily="34" charset="-120"/>
+              </a:rPr>
+              <a:t>Birth mode</a:t>
+            </a:r>
+            <a:endParaRPr lang="en-US" sz="1320" dirty="0"/>
+          </a:p>
+          <a:p>
+            <a:pPr marL="342900" indent="-342900">
+              <a:spcAft>
+                <a:spcPts val="600"/>
+              </a:spcAft>
+              <a:buSzPct val="100000"/>
+              <a:buChar char="•"/>
+            </a:pPr>
+            <a:r>
+              <a:rPr lang="en-US" sz="1320" dirty="0">
+                <a:solidFill>
+                  <a:srgbClr val="6B625A"/>
+                </a:solidFill>
+                <a:latin typeface="Calibri" pitchFamily="34" charset="0"/>
+                <a:ea typeface="Calibri" pitchFamily="34" charset="-122"/>
+                <a:cs typeface="Calibri" pitchFamily="34" charset="-120"/>
+              </a:rPr>
+              <a:t>Lifestyle · place</a:t>
+            </a:r>
+            <a:endParaRPr lang="en-US" sz="1320" dirty="0"/>
+          </a:p>
+        </p:txBody>
+      </p:sp>
+      <p:sp>
+        <p:nvSpPr>
+          <p:cNvPr id="7" name="Shape 5"/>
+          <p:cNvSpPr/>
+          <p:nvPr/>
+        </p:nvSpPr>
+        <p:spPr>
+          <a:xfrm>
+            <a:off x="1353312" y="4407408"/>
+            <a:ext cx="1783080" cy="1078992"/>
+          </a:xfrm>
+          <a:prstGeom prst="ellipse">
+            <a:avLst/>
+          </a:prstGeom>
+          <a:solidFill>
+            <a:srgbClr val="E9D9C4"/>
+          </a:solidFill>
+          <a:ln w="19050">
+            <a:solidFill>
+              <a:srgbClr val="B88A1F"/>
+            </a:solidFill>
+            <a:prstDash val="solid"/>
+          </a:ln>
+        </p:spPr>
+      </p:sp>
+      <p:sp>
+        <p:nvSpPr>
+          <p:cNvPr id="8" name="Text 6"/>
+          <p:cNvSpPr/>
+          <p:nvPr/>
+        </p:nvSpPr>
+        <p:spPr>
+          <a:xfrm>
+            <a:off x="1298448" y="4773168"/>
+            <a:ext cx="1901952" cy="365760"/>
+          </a:xfrm>
+          <a:prstGeom prst="rect">
+            <a:avLst/>
+          </a:prstGeom>
+          <a:noFill/>
+          <a:ln/>
+        </p:spPr>
+        <p:txBody>
+          <a:bodyPr wrap="square" lIns="0" tIns="0" rIns="0" bIns="0" rtlCol="0" anchor="ctr"/>
+          <a:lstStyle/>
+          <a:p>
+            <a:pPr algn="ctr" indent="0" marL="0">
+              <a:buNone/>
+            </a:pPr>
+            <a:r>
+              <a:rPr lang="en-US" sz="1200" b="1" dirty="0">
+                <a:solidFill>
+                  <a:srgbClr val="A8431F"/>
+                </a:solidFill>
+                <a:latin typeface="Calibri" pitchFamily="34" charset="0"/>
+                <a:ea typeface="Calibri" pitchFamily="34" charset="-122"/>
+                <a:cs typeface="Calibri" pitchFamily="34" charset="-120"/>
+              </a:rPr>
+              <a:t>~38T microbes</a:t>
+            </a:r>
+            <a:endParaRPr lang="en-US" sz="1200" dirty="0"/>
+          </a:p>
+        </p:txBody>
+      </p:sp>
+      <p:sp>
+        <p:nvSpPr>
+          <p:cNvPr id="9" name="Shape 7"/>
+          <p:cNvSpPr/>
+          <p:nvPr/>
+        </p:nvSpPr>
+        <p:spPr>
+          <a:xfrm>
+            <a:off x="4160520" y="1783080"/>
+            <a:ext cx="3611880" cy="4114800"/>
           </a:xfrm>
           <a:prstGeom prst="roundRect">
-            <a:avLst/>
+            <a:avLst>
+              <a:gd name="adj" fmla="val 2278"/>
+            </a:avLst>
           </a:prstGeom>
           <a:solidFill>
-            <a:srgbClr val="E3EFEE"/>
+            <a:srgbClr val="E9F0EF"/>
           </a:solidFill>
           <a:ln w="12700">
             <a:solidFill>
@@ -5868,21 +6130,481 @@
             </a:solidFill>
             <a:prstDash val="solid"/>
           </a:ln>
-        </p:spPr>
-      </p:sp>
-      <p:sp>
-        <p:nvSpPr>
-          <p:cNvPr id="42" name="Panel C"/>
-          <p:cNvSpPr/>
-          <p:nvPr/>
-        </p:nvSpPr>
-        <p:spPr>
-          <a:xfrm>
-            <a:off x="8092440" y="1783080"/>
-            <a:ext cx="3520440" cy="4114800"/>
+          <a:effectLst>
+            <a:outerShdw sx="100000" sy="100000" kx="0" ky="0" algn="bl" rotWithShape="0" blurRad="114300" dist="38100" dir="8100000">
+              <a:srgbClr val="000000">
+                <a:alpha val="16000"/>
+              </a:srgbClr>
+            </a:outerShdw>
+          </a:effectLst>
+        </p:spPr>
+      </p:sp>
+      <p:sp>
+        <p:nvSpPr>
+          <p:cNvPr id="10" name="Text 8"/>
+          <p:cNvSpPr/>
+          <p:nvPr/>
+        </p:nvSpPr>
+        <p:spPr>
+          <a:xfrm>
+            <a:off x="4370832" y="1920240"/>
+            <a:ext cx="3200400" cy="457200"/>
+          </a:xfrm>
+          <a:prstGeom prst="rect">
+            <a:avLst/>
+          </a:prstGeom>
+          <a:noFill/>
+          <a:ln/>
+        </p:spPr>
+        <p:txBody>
+          <a:bodyPr wrap="square" lIns="0" tIns="0" rIns="0" bIns="0" rtlCol="0" anchor="ctr"/>
+          <a:lstStyle/>
+          <a:p>
+            <a:pPr algn="ctr" indent="0" marL="0">
+              <a:buNone/>
+            </a:pPr>
+            <a:r>
+              <a:rPr lang="en-US" sz="1400" b="1" dirty="0">
+                <a:solidFill>
+                  <a:srgbClr val="1F5651"/>
+                </a:solidFill>
+                <a:latin typeface="Calibri" pitchFamily="34" charset="0"/>
+                <a:ea typeface="Calibri" pitchFamily="34" charset="-122"/>
+                <a:cs typeface="Calibri" pitchFamily="34" charset="-120"/>
+              </a:rPr>
+              <a:t>How they reach the brain</a:t>
+            </a:r>
+            <a:endParaRPr lang="en-US" sz="1400" dirty="0"/>
+          </a:p>
+        </p:txBody>
+      </p:sp>
+      <p:sp>
+        <p:nvSpPr>
+          <p:cNvPr id="11" name="Shape 9"/>
+          <p:cNvSpPr/>
+          <p:nvPr/>
+        </p:nvSpPr>
+        <p:spPr>
+          <a:xfrm>
+            <a:off x="5376672" y="2331720"/>
+            <a:ext cx="1298448" cy="932688"/>
+          </a:xfrm>
+          <a:prstGeom prst="ellipse">
+            <a:avLst/>
+          </a:prstGeom>
+          <a:solidFill>
+            <a:srgbClr val="F7E3DA"/>
+          </a:solidFill>
+          <a:ln w="25400">
+            <a:solidFill>
+              <a:srgbClr val="A8431F"/>
+            </a:solidFill>
+            <a:prstDash val="solid"/>
+          </a:ln>
+        </p:spPr>
+      </p:sp>
+      <p:sp>
+        <p:nvSpPr>
+          <p:cNvPr id="12" name="Text 10"/>
+          <p:cNvSpPr/>
+          <p:nvPr/>
+        </p:nvSpPr>
+        <p:spPr>
+          <a:xfrm>
+            <a:off x="5376672" y="2633472"/>
+            <a:ext cx="1298448" cy="256032"/>
+          </a:xfrm>
+          <a:prstGeom prst="rect">
+            <a:avLst/>
+          </a:prstGeom>
+          <a:noFill/>
+          <a:ln/>
+        </p:spPr>
+        <p:txBody>
+          <a:bodyPr wrap="square" lIns="0" tIns="0" rIns="0" bIns="0" rtlCol="0" anchor="ctr"/>
+          <a:lstStyle/>
+          <a:p>
+            <a:pPr algn="ctr" indent="0" marL="0">
+              <a:buNone/>
+            </a:pPr>
+            <a:r>
+              <a:rPr lang="en-US" sz="1100" b="1" dirty="0">
+                <a:solidFill>
+                  <a:srgbClr val="A8431F"/>
+                </a:solidFill>
+                <a:latin typeface="Calibri" pitchFamily="34" charset="0"/>
+                <a:ea typeface="Calibri" pitchFamily="34" charset="-122"/>
+                <a:cs typeface="Calibri" pitchFamily="34" charset="-120"/>
+              </a:rPr>
+              <a:t>BRAIN</a:t>
+            </a:r>
+            <a:endParaRPr lang="en-US" sz="1100" dirty="0"/>
+          </a:p>
+        </p:txBody>
+      </p:sp>
+      <p:sp>
+        <p:nvSpPr>
+          <p:cNvPr id="13" name="Shape 11"/>
+          <p:cNvSpPr/>
+          <p:nvPr/>
+        </p:nvSpPr>
+        <p:spPr>
+          <a:xfrm>
+            <a:off x="5998464" y="3200400"/>
+            <a:ext cx="0" cy="-384048"/>
+          </a:xfrm>
+          <a:prstGeom prst="line">
+            <a:avLst/>
+          </a:prstGeom>
+          <a:noFill/>
+          <a:ln w="15240">
+            <a:solidFill>
+              <a:srgbClr val="7A4B6B">
+                <a:alpha val="55000"/>
+              </a:srgbClr>
+            </a:solidFill>
+            <a:prstDash val="solid"/>
+            <a:tailEnd type="triangle"/>
+          </a:ln>
+        </p:spPr>
+      </p:sp>
+      <p:sp>
+        <p:nvSpPr>
+          <p:cNvPr id="14" name="Shape 12"/>
+          <p:cNvSpPr/>
+          <p:nvPr/>
+        </p:nvSpPr>
+        <p:spPr>
+          <a:xfrm>
+            <a:off x="4480560" y="3364992"/>
+            <a:ext cx="2971800" cy="438912"/>
           </a:xfrm>
           <a:prstGeom prst="roundRect">
-            <a:avLst/>
+            <a:avLst>
+              <a:gd name="adj" fmla="val 37500"/>
+            </a:avLst>
+          </a:prstGeom>
+          <a:solidFill>
+            <a:srgbClr val="7A4B6B"/>
+          </a:solidFill>
+          <a:ln/>
+        </p:spPr>
+      </p:sp>
+      <p:sp>
+        <p:nvSpPr>
+          <p:cNvPr id="15" name="Text 13"/>
+          <p:cNvSpPr/>
+          <p:nvPr/>
+        </p:nvSpPr>
+        <p:spPr>
+          <a:xfrm>
+            <a:off x="4480560" y="3364992"/>
+            <a:ext cx="2971800" cy="438912"/>
+          </a:xfrm>
+          <a:prstGeom prst="rect">
+            <a:avLst/>
+          </a:prstGeom>
+          <a:noFill/>
+          <a:ln/>
+        </p:spPr>
+        <p:txBody>
+          <a:bodyPr wrap="square" lIns="0" tIns="0" rIns="0" bIns="0" rtlCol="0" anchor="ctr"/>
+          <a:lstStyle/>
+          <a:p>
+            <a:pPr algn="ctr" indent="0" marL="0">
+              <a:buNone/>
+            </a:pPr>
+            <a:r>
+              <a:rPr lang="en-US" sz="1270" b="1" dirty="0">
+                <a:solidFill>
+                  <a:srgbClr val="FFFFFF"/>
+                </a:solidFill>
+                <a:latin typeface="Calibri" pitchFamily="34" charset="0"/>
+                <a:ea typeface="Calibri" pitchFamily="34" charset="-122"/>
+                <a:cs typeface="Calibri" pitchFamily="34" charset="-120"/>
+              </a:rPr>
+              <a:t>HPA · stress</a:t>
+            </a:r>
+            <a:endParaRPr lang="en-US" sz="1270" dirty="0"/>
+          </a:p>
+        </p:txBody>
+      </p:sp>
+      <p:sp>
+        <p:nvSpPr>
+          <p:cNvPr id="16" name="Shape 14"/>
+          <p:cNvSpPr/>
+          <p:nvPr/>
+        </p:nvSpPr>
+        <p:spPr>
+          <a:xfrm>
+            <a:off x="5998464" y="3785616"/>
+            <a:ext cx="0" cy="-384048"/>
+          </a:xfrm>
+          <a:prstGeom prst="line">
+            <a:avLst/>
+          </a:prstGeom>
+          <a:noFill/>
+          <a:ln w="15240">
+            <a:solidFill>
+              <a:srgbClr val="2F7D77">
+                <a:alpha val="55000"/>
+              </a:srgbClr>
+            </a:solidFill>
+            <a:prstDash val="solid"/>
+            <a:tailEnd type="triangle"/>
+          </a:ln>
+        </p:spPr>
+      </p:sp>
+      <p:sp>
+        <p:nvSpPr>
+          <p:cNvPr id="17" name="Shape 15"/>
+          <p:cNvSpPr/>
+          <p:nvPr/>
+        </p:nvSpPr>
+        <p:spPr>
+          <a:xfrm>
+            <a:off x="4480560" y="3950208"/>
+            <a:ext cx="2971800" cy="438912"/>
+          </a:xfrm>
+          <a:prstGeom prst="roundRect">
+            <a:avLst>
+              <a:gd name="adj" fmla="val 37500"/>
+            </a:avLst>
+          </a:prstGeom>
+          <a:solidFill>
+            <a:srgbClr val="2F7D77"/>
+          </a:solidFill>
+          <a:ln/>
+        </p:spPr>
+      </p:sp>
+      <p:sp>
+        <p:nvSpPr>
+          <p:cNvPr id="18" name="Text 16"/>
+          <p:cNvSpPr/>
+          <p:nvPr/>
+        </p:nvSpPr>
+        <p:spPr>
+          <a:xfrm>
+            <a:off x="4480560" y="3950208"/>
+            <a:ext cx="2971800" cy="438912"/>
+          </a:xfrm>
+          <a:prstGeom prst="rect">
+            <a:avLst/>
+          </a:prstGeom>
+          <a:noFill/>
+          <a:ln/>
+        </p:spPr>
+        <p:txBody>
+          <a:bodyPr wrap="square" lIns="0" tIns="0" rIns="0" bIns="0" rtlCol="0" anchor="ctr"/>
+          <a:lstStyle/>
+          <a:p>
+            <a:pPr algn="ctr" indent="0" marL="0">
+              <a:buNone/>
+            </a:pPr>
+            <a:r>
+              <a:rPr lang="en-US" sz="1270" b="1" dirty="0">
+                <a:solidFill>
+                  <a:srgbClr val="FFFFFF"/>
+                </a:solidFill>
+                <a:latin typeface="Calibri" pitchFamily="34" charset="0"/>
+                <a:ea typeface="Calibri" pitchFamily="34" charset="-122"/>
+                <a:cs typeface="Calibri" pitchFamily="34" charset="-120"/>
+              </a:rPr>
+              <a:t>vagus nerve</a:t>
+            </a:r>
+            <a:endParaRPr lang="en-US" sz="1270" dirty="0"/>
+          </a:p>
+        </p:txBody>
+      </p:sp>
+      <p:sp>
+        <p:nvSpPr>
+          <p:cNvPr id="19" name="Shape 17"/>
+          <p:cNvSpPr/>
+          <p:nvPr/>
+        </p:nvSpPr>
+        <p:spPr>
+          <a:xfrm>
+            <a:off x="5998464" y="4370832"/>
+            <a:ext cx="0" cy="-384048"/>
+          </a:xfrm>
+          <a:prstGeom prst="line">
+            <a:avLst/>
+          </a:prstGeom>
+          <a:noFill/>
+          <a:ln w="15240">
+            <a:solidFill>
+              <a:srgbClr val="5B8A4F">
+                <a:alpha val="55000"/>
+              </a:srgbClr>
+            </a:solidFill>
+            <a:prstDash val="solid"/>
+            <a:tailEnd type="triangle"/>
+          </a:ln>
+        </p:spPr>
+      </p:sp>
+      <p:sp>
+        <p:nvSpPr>
+          <p:cNvPr id="20" name="Shape 18"/>
+          <p:cNvSpPr/>
+          <p:nvPr/>
+        </p:nvSpPr>
+        <p:spPr>
+          <a:xfrm>
+            <a:off x="4480560" y="4535424"/>
+            <a:ext cx="2971800" cy="438912"/>
+          </a:xfrm>
+          <a:prstGeom prst="roundRect">
+            <a:avLst>
+              <a:gd name="adj" fmla="val 37500"/>
+            </a:avLst>
+          </a:prstGeom>
+          <a:solidFill>
+            <a:srgbClr val="5B8A4F"/>
+          </a:solidFill>
+          <a:ln/>
+        </p:spPr>
+      </p:sp>
+      <p:sp>
+        <p:nvSpPr>
+          <p:cNvPr id="21" name="Text 19"/>
+          <p:cNvSpPr/>
+          <p:nvPr/>
+        </p:nvSpPr>
+        <p:spPr>
+          <a:xfrm>
+            <a:off x="4480560" y="4535424"/>
+            <a:ext cx="2971800" cy="438912"/>
+          </a:xfrm>
+          <a:prstGeom prst="rect">
+            <a:avLst/>
+          </a:prstGeom>
+          <a:noFill/>
+          <a:ln/>
+        </p:spPr>
+        <p:txBody>
+          <a:bodyPr wrap="square" lIns="0" tIns="0" rIns="0" bIns="0" rtlCol="0" anchor="ctr"/>
+          <a:lstStyle/>
+          <a:p>
+            <a:pPr algn="ctr" indent="0" marL="0">
+              <a:buNone/>
+            </a:pPr>
+            <a:r>
+              <a:rPr lang="en-US" sz="1270" b="1" dirty="0">
+                <a:solidFill>
+                  <a:srgbClr val="FFFFFF"/>
+                </a:solidFill>
+                <a:latin typeface="Calibri" pitchFamily="34" charset="0"/>
+                <a:ea typeface="Calibri" pitchFamily="34" charset="-122"/>
+                <a:cs typeface="Calibri" pitchFamily="34" charset="-120"/>
+              </a:rPr>
+              <a:t>immune cells</a:t>
+            </a:r>
+            <a:endParaRPr lang="en-US" sz="1270" dirty="0"/>
+          </a:p>
+        </p:txBody>
+      </p:sp>
+      <p:sp>
+        <p:nvSpPr>
+          <p:cNvPr id="22" name="Shape 20"/>
+          <p:cNvSpPr/>
+          <p:nvPr/>
+        </p:nvSpPr>
+        <p:spPr>
+          <a:xfrm>
+            <a:off x="5998464" y="4956048"/>
+            <a:ext cx="0" cy="-384048"/>
+          </a:xfrm>
+          <a:prstGeom prst="line">
+            <a:avLst/>
+          </a:prstGeom>
+          <a:noFill/>
+          <a:ln w="15240">
+            <a:solidFill>
+              <a:srgbClr val="D2603A">
+                <a:alpha val="55000"/>
+              </a:srgbClr>
+            </a:solidFill>
+            <a:prstDash val="solid"/>
+            <a:tailEnd type="triangle"/>
+          </a:ln>
+        </p:spPr>
+      </p:sp>
+      <p:sp>
+        <p:nvSpPr>
+          <p:cNvPr id="23" name="Shape 21"/>
+          <p:cNvSpPr/>
+          <p:nvPr/>
+        </p:nvSpPr>
+        <p:spPr>
+          <a:xfrm>
+            <a:off x="4480560" y="5120640"/>
+            <a:ext cx="2971800" cy="438912"/>
+          </a:xfrm>
+          <a:prstGeom prst="roundRect">
+            <a:avLst>
+              <a:gd name="adj" fmla="val 37500"/>
+            </a:avLst>
+          </a:prstGeom>
+          <a:solidFill>
+            <a:srgbClr val="D2603A"/>
+          </a:solidFill>
+          <a:ln/>
+        </p:spPr>
+      </p:sp>
+      <p:sp>
+        <p:nvSpPr>
+          <p:cNvPr id="24" name="Text 22"/>
+          <p:cNvSpPr/>
+          <p:nvPr/>
+        </p:nvSpPr>
+        <p:spPr>
+          <a:xfrm>
+            <a:off x="4480560" y="5120640"/>
+            <a:ext cx="2971800" cy="438912"/>
+          </a:xfrm>
+          <a:prstGeom prst="rect">
+            <a:avLst/>
+          </a:prstGeom>
+          <a:noFill/>
+          <a:ln/>
+        </p:spPr>
+        <p:txBody>
+          <a:bodyPr wrap="square" lIns="0" tIns="0" rIns="0" bIns="0" rtlCol="0" anchor="ctr"/>
+          <a:lstStyle/>
+          <a:p>
+            <a:pPr algn="ctr" indent="0" marL="0">
+              <a:buNone/>
+            </a:pPr>
+            <a:r>
+              <a:rPr lang="en-US" sz="1270" b="1" dirty="0">
+                <a:solidFill>
+                  <a:srgbClr val="FFFFFF"/>
+                </a:solidFill>
+                <a:latin typeface="Calibri" pitchFamily="34" charset="0"/>
+                <a:ea typeface="Calibri" pitchFamily="34" charset="-122"/>
+                <a:cs typeface="Calibri" pitchFamily="34" charset="-120"/>
+              </a:rPr>
+              <a:t>gut hormones</a:t>
+            </a:r>
+            <a:endParaRPr lang="en-US" sz="1270" dirty="0"/>
+          </a:p>
+        </p:txBody>
+      </p:sp>
+      <p:sp>
+        <p:nvSpPr>
+          <p:cNvPr id="25" name="Shape 23"/>
+          <p:cNvSpPr/>
+          <p:nvPr/>
+        </p:nvSpPr>
+        <p:spPr>
+          <a:xfrm>
+            <a:off x="8001000" y="1783080"/>
+            <a:ext cx="3611880" cy="4114800"/>
+          </a:xfrm>
+          <a:prstGeom prst="roundRect">
+            <a:avLst>
+              <a:gd name="adj" fmla="val 2278"/>
+            </a:avLst>
           </a:prstGeom>
           <a:solidFill>
             <a:srgbClr val="F7E3DA"/>
@@ -5893,18 +6615,25 @@
             </a:solidFill>
             <a:prstDash val="solid"/>
           </a:ln>
-        </p:spPr>
-      </p:sp>
-      <p:sp>
-        <p:nvSpPr>
-          <p:cNvPr id="43" name="Panel A title"/>
-          <p:cNvSpPr/>
-          <p:nvPr/>
-        </p:nvSpPr>
-        <p:spPr>
-          <a:xfrm>
-            <a:off x="731520" y="1930000"/>
-            <a:ext cx="3154680" cy="320000"/>
+          <a:effectLst>
+            <a:outerShdw sx="100000" sy="100000" kx="0" ky="0" algn="bl" rotWithShape="0" blurRad="114300" dist="38100" dir="8100000">
+              <a:srgbClr val="000000">
+                <a:alpha val="16000"/>
+              </a:srgbClr>
+            </a:outerShdw>
+          </a:effectLst>
+        </p:spPr>
+      </p:sp>
+      <p:sp>
+        <p:nvSpPr>
+          <p:cNvPr id="26" name="Text 24"/>
+          <p:cNvSpPr/>
+          <p:nvPr/>
+        </p:nvSpPr>
+        <p:spPr>
+          <a:xfrm>
+            <a:off x="8193024" y="1920240"/>
+            <a:ext cx="3200400" cy="457200"/>
           </a:xfrm>
           <a:prstGeom prst="rect">
             <a:avLst/>
@@ -5920,7 +6649,7 @@
               <a:buNone/>
             </a:pPr>
             <a:r>
-              <a:rPr lang="en-US" sz="1250" b="1" dirty="0">
+              <a:rPr lang="en-US" sz="1400" b="1" dirty="0">
                 <a:solidFill>
                   <a:srgbClr val="A8431F"/>
                 </a:solidFill>
@@ -5928,1158 +6657,30 @@
                 <a:ea typeface="Calibri" pitchFamily="34" charset="-122"/>
                 <a:cs typeface="Calibri" pitchFamily="34" charset="-120"/>
               </a:rPr>
-              <a:t>What shapes your microbiome</a:t>
-            </a:r>
-            <a:endParaRPr lang="en-US" sz="1250" dirty="0"/>
-          </a:p>
-        </p:txBody>
-      </p:sp>
-      <p:sp>
-        <p:nvSpPr>
-          <p:cNvPr id="44" name="Input 1"/>
-          <p:cNvSpPr/>
-          <p:nvPr/>
-        </p:nvSpPr>
-        <p:spPr>
-          <a:xfrm>
-            <a:off x="860000" y="2470000"/>
-            <a:ext cx="1220000" cy="300000"/>
+              <a:t>The molecular keys</a:t>
+            </a:r>
+            <a:endParaRPr lang="en-US" sz="1400" dirty="0"/>
+          </a:p>
+        </p:txBody>
+      </p:sp>
+      <p:sp>
+        <p:nvSpPr>
+          <p:cNvPr id="27" name="Shape 25"/>
+          <p:cNvSpPr/>
+          <p:nvPr/>
+        </p:nvSpPr>
+        <p:spPr>
+          <a:xfrm>
+            <a:off x="8183880" y="2468880"/>
+            <a:ext cx="3273552" cy="914400"/>
           </a:xfrm>
           <a:prstGeom prst="roundRect">
-            <a:avLst/>
+            <a:avLst>
+              <a:gd name="adj" fmla="val 8000"/>
+            </a:avLst>
           </a:prstGeom>
           <a:solidFill>
-            <a:srgbClr val="FFFDFA"/>
-          </a:solidFill>
-          <a:ln w="9525">
-            <a:solidFill>
-              <a:srgbClr val="D9A441"/>
-            </a:solidFill>
-            <a:prstDash val="solid"/>
-          </a:ln>
-        </p:spPr>
-      </p:sp>
-      <p:sp>
-        <p:nvSpPr>
-          <p:cNvPr id="45" name="Input label 1"/>
-          <p:cNvSpPr/>
-          <p:nvPr/>
-        </p:nvSpPr>
-        <p:spPr>
-          <a:xfrm>
-            <a:off x="925000" y="2521000"/>
-            <a:ext cx="1090000" cy="150000"/>
-          </a:xfrm>
-          <a:prstGeom prst="rect">
-            <a:avLst/>
-          </a:prstGeom>
-          <a:noFill/>
-          <a:ln/>
-        </p:spPr>
-        <p:txBody>
-          <a:bodyPr wrap="square" lIns="0" tIns="0" rIns="0" bIns="0" rtlCol="0" anchor="ctr"/>
-          <a:lstStyle/>
-          <a:p>
-            <a:pPr algn="ctr" indent="0" marL="0">
-              <a:buNone/>
-            </a:pPr>
-            <a:r>
-              <a:rPr lang="en-US" sz="900" b="1" dirty="0">
-                <a:solidFill>
-                  <a:srgbClr val="6B625A"/>
-                </a:solidFill>
-                <a:latin typeface="Calibri" pitchFamily="34" charset="0"/>
-                <a:ea typeface="Calibri" pitchFamily="34" charset="-122"/>
-                <a:cs typeface="Calibri" pitchFamily="34" charset="-120"/>
-              </a:rPr>
-              <a:t>Diet &amp; fiber</a:t>
-            </a:r>
-            <a:endParaRPr lang="en-US" sz="900" dirty="0"/>
-          </a:p>
-        </p:txBody>
-      </p:sp>
-      <p:sp>
-        <p:nvSpPr>
-          <p:cNvPr id="46" name="Input 2"/>
-          <p:cNvSpPr/>
-          <p:nvPr/>
-        </p:nvSpPr>
-        <p:spPr>
-          <a:xfrm>
-            <a:off x="2360000" y="2470000"/>
-            <a:ext cx="1220000" cy="300000"/>
-          </a:xfrm>
-          <a:prstGeom prst="roundRect">
-            <a:avLst/>
-          </a:prstGeom>
-          <a:solidFill>
-            <a:srgbClr val="FFFDFA"/>
-          </a:solidFill>
-          <a:ln w="9525">
-            <a:solidFill>
-              <a:srgbClr val="D9A441"/>
-            </a:solidFill>
-            <a:prstDash val="solid"/>
-          </a:ln>
-        </p:spPr>
-      </p:sp>
-      <p:sp>
-        <p:nvSpPr>
-          <p:cNvPr id="47" name="Input label 2"/>
-          <p:cNvSpPr/>
-          <p:nvPr/>
-        </p:nvSpPr>
-        <p:spPr>
-          <a:xfrm>
-            <a:off x="2425000" y="2521000"/>
-            <a:ext cx="1090000" cy="150000"/>
-          </a:xfrm>
-          <a:prstGeom prst="rect">
-            <a:avLst/>
-          </a:prstGeom>
-          <a:noFill/>
-          <a:ln/>
-        </p:spPr>
-        <p:txBody>
-          <a:bodyPr wrap="square" lIns="0" tIns="0" rIns="0" bIns="0" rtlCol="0" anchor="ctr"/>
-          <a:lstStyle/>
-          <a:p>
-            <a:pPr algn="ctr" indent="0" marL="0">
-              <a:buNone/>
-            </a:pPr>
-            <a:r>
-              <a:rPr lang="en-US" sz="900" b="1" dirty="0">
-                <a:solidFill>
-                  <a:srgbClr val="6B625A"/>
-                </a:solidFill>
-                <a:latin typeface="Calibri" pitchFamily="34" charset="0"/>
-                <a:ea typeface="Calibri" pitchFamily="34" charset="-122"/>
-                <a:cs typeface="Calibri" pitchFamily="34" charset="-120"/>
-              </a:rPr>
-              <a:t>Genes &amp; age</a:t>
-            </a:r>
-            <a:endParaRPr lang="en-US" sz="900" dirty="0"/>
-          </a:p>
-        </p:txBody>
-      </p:sp>
-      <p:sp>
-        <p:nvSpPr>
-          <p:cNvPr id="48" name="Input 3"/>
-          <p:cNvSpPr/>
-          <p:nvPr/>
-        </p:nvSpPr>
-        <p:spPr>
-          <a:xfrm>
-            <a:off x="860000" y="2890000"/>
-            <a:ext cx="1220000" cy="300000"/>
-          </a:xfrm>
-          <a:prstGeom prst="roundRect">
-            <a:avLst/>
-          </a:prstGeom>
-          <a:solidFill>
-            <a:srgbClr val="FFFDFA"/>
-          </a:solidFill>
-          <a:ln w="9525">
-            <a:solidFill>
-              <a:srgbClr val="D9A441"/>
-            </a:solidFill>
-            <a:prstDash val="solid"/>
-          </a:ln>
-        </p:spPr>
-      </p:sp>
-      <p:sp>
-        <p:nvSpPr>
-          <p:cNvPr id="49" name="Input label 3"/>
-          <p:cNvSpPr/>
-          <p:nvPr/>
-        </p:nvSpPr>
-        <p:spPr>
-          <a:xfrm>
-            <a:off x="925000" y="2941000"/>
-            <a:ext cx="1090000" cy="150000"/>
-          </a:xfrm>
-          <a:prstGeom prst="rect">
-            <a:avLst/>
-          </a:prstGeom>
-          <a:noFill/>
-          <a:ln/>
-        </p:spPr>
-        <p:txBody>
-          <a:bodyPr wrap="square" lIns="0" tIns="0" rIns="0" bIns="0" rtlCol="0" anchor="ctr"/>
-          <a:lstStyle/>
-          <a:p>
-            <a:pPr algn="ctr" indent="0" marL="0">
-              <a:buNone/>
-            </a:pPr>
-            <a:r>
-              <a:rPr lang="en-US" sz="900" b="1" dirty="0">
-                <a:solidFill>
-                  <a:srgbClr val="6B625A"/>
-                </a:solidFill>
-                <a:latin typeface="Calibri" pitchFamily="34" charset="0"/>
-                <a:ea typeface="Calibri" pitchFamily="34" charset="-122"/>
-                <a:cs typeface="Calibri" pitchFamily="34" charset="-120"/>
-              </a:rPr>
-              <a:t>Antibiotics</a:t>
-            </a:r>
-            <a:endParaRPr lang="en-US" sz="900" dirty="0"/>
-          </a:p>
-        </p:txBody>
-      </p:sp>
-      <p:sp>
-        <p:nvSpPr>
-          <p:cNvPr id="50" name="Input 4"/>
-          <p:cNvSpPr/>
-          <p:nvPr/>
-        </p:nvSpPr>
-        <p:spPr>
-          <a:xfrm>
-            <a:off x="2360000" y="2890000"/>
-            <a:ext cx="1220000" cy="300000"/>
-          </a:xfrm>
-          <a:prstGeom prst="roundRect">
-            <a:avLst/>
-          </a:prstGeom>
-          <a:solidFill>
-            <a:srgbClr val="FFFDFA"/>
-          </a:solidFill>
-          <a:ln w="9525">
-            <a:solidFill>
-              <a:srgbClr val="D9A441"/>
-            </a:solidFill>
-            <a:prstDash val="solid"/>
-          </a:ln>
-        </p:spPr>
-      </p:sp>
-      <p:sp>
-        <p:nvSpPr>
-          <p:cNvPr id="51" name="Input label 4"/>
-          <p:cNvSpPr/>
-          <p:nvPr/>
-        </p:nvSpPr>
-        <p:spPr>
-          <a:xfrm>
-            <a:off x="2425000" y="2941000"/>
-            <a:ext cx="1090000" cy="150000"/>
-          </a:xfrm>
-          <a:prstGeom prst="rect">
-            <a:avLst/>
-          </a:prstGeom>
-          <a:noFill/>
-          <a:ln/>
-        </p:spPr>
-        <p:txBody>
-          <a:bodyPr wrap="square" lIns="0" tIns="0" rIns="0" bIns="0" rtlCol="0" anchor="ctr"/>
-          <a:lstStyle/>
-          <a:p>
-            <a:pPr algn="ctr" indent="0" marL="0">
-              <a:buNone/>
-            </a:pPr>
-            <a:r>
-              <a:rPr lang="en-US" sz="900" b="1" dirty="0">
-                <a:solidFill>
-                  <a:srgbClr val="6B625A"/>
-                </a:solidFill>
-                <a:latin typeface="Calibri" pitchFamily="34" charset="0"/>
-                <a:ea typeface="Calibri" pitchFamily="34" charset="-122"/>
-                <a:cs typeface="Calibri" pitchFamily="34" charset="-120"/>
-              </a:rPr>
-              <a:t>Stress</a:t>
-            </a:r>
-            <a:endParaRPr lang="en-US" sz="900" dirty="0"/>
-          </a:p>
-        </p:txBody>
-      </p:sp>
-      <p:sp>
-        <p:nvSpPr>
-          <p:cNvPr id="52" name="Input 5"/>
-          <p:cNvSpPr/>
-          <p:nvPr/>
-        </p:nvSpPr>
-        <p:spPr>
-          <a:xfrm>
-            <a:off x="860000" y="3310000"/>
-            <a:ext cx="1220000" cy="300000"/>
-          </a:xfrm>
-          <a:prstGeom prst="roundRect">
-            <a:avLst/>
-          </a:prstGeom>
-          <a:solidFill>
-            <a:srgbClr val="FFFDFA"/>
-          </a:solidFill>
-          <a:ln w="9525">
-            <a:solidFill>
-              <a:srgbClr val="D9A441"/>
-            </a:solidFill>
-            <a:prstDash val="solid"/>
-          </a:ln>
-        </p:spPr>
-      </p:sp>
-      <p:sp>
-        <p:nvSpPr>
-          <p:cNvPr id="53" name="Input label 5"/>
-          <p:cNvSpPr/>
-          <p:nvPr/>
-        </p:nvSpPr>
-        <p:spPr>
-          <a:xfrm>
-            <a:off x="925000" y="3361000"/>
-            <a:ext cx="1090000" cy="150000"/>
-          </a:xfrm>
-          <a:prstGeom prst="rect">
-            <a:avLst/>
-          </a:prstGeom>
-          <a:noFill/>
-          <a:ln/>
-        </p:spPr>
-        <p:txBody>
-          <a:bodyPr wrap="square" lIns="0" tIns="0" rIns="0" bIns="0" rtlCol="0" anchor="ctr"/>
-          <a:lstStyle/>
-          <a:p>
-            <a:pPr algn="ctr" indent="0" marL="0">
-              <a:buNone/>
-            </a:pPr>
-            <a:r>
-              <a:rPr lang="en-US" sz="900" b="1" dirty="0">
-                <a:solidFill>
-                  <a:srgbClr val="6B625A"/>
-                </a:solidFill>
-                <a:latin typeface="Calibri" pitchFamily="34" charset="0"/>
-                <a:ea typeface="Calibri" pitchFamily="34" charset="-122"/>
-                <a:cs typeface="Calibri" pitchFamily="34" charset="-120"/>
-              </a:rPr>
-              <a:t>Birth mode</a:t>
-            </a:r>
-            <a:endParaRPr lang="en-US" sz="900" dirty="0"/>
-          </a:p>
-        </p:txBody>
-      </p:sp>
-      <p:sp>
-        <p:nvSpPr>
-          <p:cNvPr id="54" name="Input 6"/>
-          <p:cNvSpPr/>
-          <p:nvPr/>
-        </p:nvSpPr>
-        <p:spPr>
-          <a:xfrm>
-            <a:off x="2360000" y="3310000"/>
-            <a:ext cx="1220000" cy="300000"/>
-          </a:xfrm>
-          <a:prstGeom prst="roundRect">
-            <a:avLst/>
-          </a:prstGeom>
-          <a:solidFill>
-            <a:srgbClr val="FFFDFA"/>
-          </a:solidFill>
-          <a:ln w="9525">
-            <a:solidFill>
-              <a:srgbClr val="D9A441"/>
-            </a:solidFill>
-            <a:prstDash val="solid"/>
-          </a:ln>
-        </p:spPr>
-      </p:sp>
-      <p:sp>
-        <p:nvSpPr>
-          <p:cNvPr id="55" name="Input label 6"/>
-          <p:cNvSpPr/>
-          <p:nvPr/>
-        </p:nvSpPr>
-        <p:spPr>
-          <a:xfrm>
-            <a:off x="2425000" y="3361000"/>
-            <a:ext cx="1090000" cy="150000"/>
-          </a:xfrm>
-          <a:prstGeom prst="rect">
-            <a:avLst/>
-          </a:prstGeom>
-          <a:noFill/>
-          <a:ln/>
-        </p:spPr>
-        <p:txBody>
-          <a:bodyPr wrap="square" lIns="0" tIns="0" rIns="0" bIns="0" rtlCol="0" anchor="ctr"/>
-          <a:lstStyle/>
-          <a:p>
-            <a:pPr algn="ctr" indent="0" marL="0">
-              <a:buNone/>
-            </a:pPr>
-            <a:r>
-              <a:rPr lang="en-US" sz="900" b="1" dirty="0">
-                <a:solidFill>
-                  <a:srgbClr val="6B625A"/>
-                </a:solidFill>
-                <a:latin typeface="Calibri" pitchFamily="34" charset="0"/>
-                <a:ea typeface="Calibri" pitchFamily="34" charset="-122"/>
-                <a:cs typeface="Calibri" pitchFamily="34" charset="-120"/>
-              </a:rPr>
-              <a:t>Lifestyle · place</a:t>
-            </a:r>
-            <a:endParaRPr lang="en-US" sz="900" dirty="0"/>
-          </a:p>
-        </p:txBody>
-      </p:sp>
-      <p:sp>
-        <p:nvSpPr>
-          <p:cNvPr id="56" name="Microbe dish"/>
-          <p:cNvSpPr/>
-          <p:nvPr/>
-        </p:nvSpPr>
-        <p:spPr>
-          <a:xfrm>
-            <a:off x="1417320" y="4310000"/>
-            <a:ext cx="1783080" cy="1120000"/>
-          </a:xfrm>
-          <a:prstGeom prst="ellipse">
-            <a:avLst/>
-          </a:prstGeom>
-          <a:solidFill>
-            <a:srgbClr val="FFFDFA"/>
-          </a:solidFill>
-          <a:ln w="19050">
-            <a:solidFill>
-              <a:srgbClr val="D9A441"/>
-            </a:solidFill>
-            <a:prstDash val="solid"/>
-          </a:ln>
-        </p:spPr>
-      </p:sp>
-      <p:sp>
-        <p:nvSpPr>
-          <p:cNvPr id="57" name="Microbe dot 1"/>
-          <p:cNvSpPr/>
-          <p:nvPr/>
-        </p:nvSpPr>
-        <p:spPr>
-          <a:xfrm>
-            <a:off x="1660000" y="4550000"/>
-            <a:ext cx="120000" cy="120000"/>
-          </a:xfrm>
-          <a:prstGeom prst="ellipse">
-            <a:avLst/>
-          </a:prstGeom>
-          <a:solidFill>
-            <a:srgbClr val="2F7D77"/>
-          </a:solidFill>
-          <a:ln/>
-        </p:spPr>
-      </p:sp>
-      <p:sp>
-        <p:nvSpPr>
-          <p:cNvPr id="58" name="Microbe dot 2"/>
-          <p:cNvSpPr/>
-          <p:nvPr/>
-        </p:nvSpPr>
-        <p:spPr>
-          <a:xfrm>
-            <a:off x="2020000" y="4550000"/>
-            <a:ext cx="120000" cy="120000"/>
-          </a:xfrm>
-          <a:prstGeom prst="ellipse">
-            <a:avLst/>
-          </a:prstGeom>
-          <a:solidFill>
-            <a:srgbClr val="D2603A"/>
-          </a:solidFill>
-          <a:ln/>
-        </p:spPr>
-      </p:sp>
-      <p:sp>
-        <p:nvSpPr>
-          <p:cNvPr id="59" name="Microbe dot 3"/>
-          <p:cNvSpPr/>
-          <p:nvPr/>
-        </p:nvSpPr>
-        <p:spPr>
-          <a:xfrm>
-            <a:off x="2380000" y="4550000"/>
-            <a:ext cx="120000" cy="120000"/>
-          </a:xfrm>
-          <a:prstGeom prst="ellipse">
-            <a:avLst/>
-          </a:prstGeom>
-          <a:solidFill>
-            <a:srgbClr val="5B8A4F"/>
-          </a:solidFill>
-          <a:ln/>
-        </p:spPr>
-      </p:sp>
-      <p:sp>
-        <p:nvSpPr>
-          <p:cNvPr id="60" name="Microbe dot 4"/>
-          <p:cNvSpPr/>
-          <p:nvPr/>
-        </p:nvSpPr>
-        <p:spPr>
-          <a:xfrm>
-            <a:off x="1660000" y="4780000"/>
-            <a:ext cx="120000" cy="120000"/>
-          </a:xfrm>
-          <a:prstGeom prst="ellipse">
-            <a:avLst/>
-          </a:prstGeom>
-          <a:solidFill>
-            <a:srgbClr val="D9A441"/>
-          </a:solidFill>
-          <a:ln/>
-        </p:spPr>
-      </p:sp>
-      <p:sp>
-        <p:nvSpPr>
-          <p:cNvPr id="61" name="Microbe dot 5"/>
-          <p:cNvSpPr/>
-          <p:nvPr/>
-        </p:nvSpPr>
-        <p:spPr>
-          <a:xfrm>
-            <a:off x="2020000" y="4780000"/>
-            <a:ext cx="120000" cy="120000"/>
-          </a:xfrm>
-          <a:prstGeom prst="ellipse">
-            <a:avLst/>
-          </a:prstGeom>
-          <a:solidFill>
-            <a:srgbClr val="2F7D77"/>
-          </a:solidFill>
-          <a:ln/>
-        </p:spPr>
-      </p:sp>
-      <p:sp>
-        <p:nvSpPr>
-          <p:cNvPr id="62" name="Microbe dot 6"/>
-          <p:cNvSpPr/>
-          <p:nvPr/>
-        </p:nvSpPr>
-        <p:spPr>
-          <a:xfrm>
-            <a:off x="2380000" y="4780000"/>
-            <a:ext cx="120000" cy="120000"/>
-          </a:xfrm>
-          <a:prstGeom prst="ellipse">
-            <a:avLst/>
-          </a:prstGeom>
-          <a:solidFill>
-            <a:srgbClr val="D2603A"/>
-          </a:solidFill>
-          <a:ln/>
-        </p:spPr>
-      </p:sp>
-      <p:sp>
-        <p:nvSpPr>
-          <p:cNvPr id="63" name="Microbe dot 7"/>
-          <p:cNvSpPr/>
-          <p:nvPr/>
-        </p:nvSpPr>
-        <p:spPr>
-          <a:xfrm>
-            <a:off x="1660000" y="5010000"/>
-            <a:ext cx="120000" cy="120000"/>
-          </a:xfrm>
-          <a:prstGeom prst="ellipse">
-            <a:avLst/>
-          </a:prstGeom>
-          <a:solidFill>
-            <a:srgbClr val="5B8A4F"/>
-          </a:solidFill>
-          <a:ln/>
-        </p:spPr>
-      </p:sp>
-      <p:sp>
-        <p:nvSpPr>
-          <p:cNvPr id="64" name="Microbe dot 8"/>
-          <p:cNvSpPr/>
-          <p:nvPr/>
-        </p:nvSpPr>
-        <p:spPr>
-          <a:xfrm>
-            <a:off x="2020000" y="5010000"/>
-            <a:ext cx="120000" cy="120000"/>
-          </a:xfrm>
-          <a:prstGeom prst="ellipse">
-            <a:avLst/>
-          </a:prstGeom>
-          <a:solidFill>
-            <a:srgbClr val="D9A441"/>
-          </a:solidFill>
-          <a:ln/>
-        </p:spPr>
-      </p:sp>
-      <p:sp>
-        <p:nvSpPr>
-          <p:cNvPr id="65" name="Microbe dot 9"/>
-          <p:cNvSpPr/>
-          <p:nvPr/>
-        </p:nvSpPr>
-        <p:spPr>
-          <a:xfrm>
-            <a:off x="2380000" y="5010000"/>
-            <a:ext cx="120000" cy="120000"/>
-          </a:xfrm>
-          <a:prstGeom prst="ellipse">
-            <a:avLst/>
-          </a:prstGeom>
-          <a:solidFill>
-            <a:srgbClr val="2F7D77"/>
-          </a:solidFill>
-          <a:ln/>
-        </p:spPr>
-      </p:sp>
-      <p:sp>
-        <p:nvSpPr>
-          <p:cNvPr id="66" name="Microbe label"/>
-          <p:cNvSpPr/>
-          <p:nvPr/>
-        </p:nvSpPr>
-        <p:spPr>
-          <a:xfrm>
-            <a:off x="1325880" y="5340000"/>
-            <a:ext cx="1965960" cy="260000"/>
-          </a:xfrm>
-          <a:prstGeom prst="rect">
-            <a:avLst/>
-          </a:prstGeom>
-          <a:noFill/>
-          <a:ln/>
-        </p:spPr>
-        <p:txBody>
-          <a:bodyPr wrap="square" lIns="0" tIns="0" rIns="0" bIns="0" rtlCol="0" anchor="ctr"/>
-          <a:lstStyle/>
-          <a:p>
-            <a:pPr algn="ctr" indent="0" marL="0">
-              <a:buNone/>
-            </a:pPr>
-            <a:r>
-              <a:rPr lang="en-US" sz="1050" b="1" dirty="0">
-                <a:solidFill>
-                  <a:srgbClr val="A8431F"/>
-                </a:solidFill>
-                <a:latin typeface="Calibri" pitchFamily="34" charset="0"/>
-                <a:ea typeface="Calibri" pitchFamily="34" charset="-122"/>
-                <a:cs typeface="Calibri" pitchFamily="34" charset="-120"/>
-              </a:rPr>
-              <a:t>~38T microbes</a:t>
-            </a:r>
-            <a:endParaRPr lang="en-US" sz="1050" dirty="0"/>
-          </a:p>
-        </p:txBody>
-      </p:sp>
-      <p:sp>
-        <p:nvSpPr>
-          <p:cNvPr id="67" name="Panel B title"/>
-          <p:cNvSpPr/>
-          <p:nvPr/>
-        </p:nvSpPr>
-        <p:spPr>
-          <a:xfrm>
-            <a:off x="4480560" y="1930000"/>
-            <a:ext cx="3200400" cy="320000"/>
-          </a:xfrm>
-          <a:prstGeom prst="rect">
-            <a:avLst/>
-          </a:prstGeom>
-          <a:noFill/>
-          <a:ln/>
-        </p:spPr>
-        <p:txBody>
-          <a:bodyPr wrap="square" lIns="0" tIns="0" rIns="0" bIns="0" rtlCol="0" anchor="ctr"/>
-          <a:lstStyle/>
-          <a:p>
-            <a:pPr algn="ctr" indent="0" marL="0">
-              <a:buNone/>
-            </a:pPr>
-            <a:r>
-              <a:rPr lang="en-US" sz="1250" b="1" dirty="0">
-                <a:solidFill>
-                  <a:srgbClr val="1F5651"/>
-                </a:solidFill>
-                <a:latin typeface="Calibri" pitchFamily="34" charset="0"/>
-                <a:ea typeface="Calibri" pitchFamily="34" charset="-122"/>
-                <a:cs typeface="Calibri" pitchFamily="34" charset="-120"/>
-              </a:rPr>
-              <a:t>How they reach the brain</a:t>
-            </a:r>
-            <a:endParaRPr lang="en-US" sz="1250" dirty="0"/>
-          </a:p>
-        </p:txBody>
-      </p:sp>
-      <p:sp>
-        <p:nvSpPr>
-          <p:cNvPr id="68" name="Brain"/>
-          <p:cNvSpPr/>
-          <p:nvPr/>
-        </p:nvSpPr>
-        <p:spPr>
-          <a:xfrm>
-            <a:off x="5486400" y="2310000"/>
-            <a:ext cx="1188720" cy="914400"/>
-          </a:xfrm>
-          <a:prstGeom prst="cloud">
-            <a:avLst/>
-          </a:prstGeom>
-          <a:solidFill>
-            <a:srgbClr val="F7E3DA"/>
-          </a:solidFill>
-          <a:ln w="19050">
-            <a:solidFill>
-              <a:srgbClr val="A8431F"/>
-            </a:solidFill>
-            <a:prstDash val="solid"/>
-          </a:ln>
-        </p:spPr>
-      </p:sp>
-      <p:sp>
-        <p:nvSpPr>
-          <p:cNvPr id="69" name="Brain text"/>
-          <p:cNvSpPr/>
-          <p:nvPr/>
-        </p:nvSpPr>
-        <p:spPr>
-          <a:xfrm>
-            <a:off x="5486400" y="2600000"/>
-            <a:ext cx="1188720" cy="230000"/>
-          </a:xfrm>
-          <a:prstGeom prst="rect">
-            <a:avLst/>
-          </a:prstGeom>
-          <a:noFill/>
-          <a:ln/>
-        </p:spPr>
-        <p:txBody>
-          <a:bodyPr wrap="square" lIns="0" tIns="0" rIns="0" bIns="0" rtlCol="0" anchor="ctr"/>
-          <a:lstStyle/>
-          <a:p>
-            <a:pPr algn="ctr" indent="0" marL="0">
-              <a:buNone/>
-            </a:pPr>
-            <a:r>
-              <a:rPr lang="en-US" sz="1050" b="1" dirty="0">
-                <a:solidFill>
-                  <a:srgbClr val="A8431F"/>
-                </a:solidFill>
-                <a:latin typeface="Calibri" pitchFamily="34" charset="0"/>
-                <a:ea typeface="Calibri" pitchFamily="34" charset="-122"/>
-                <a:cs typeface="Calibri" pitchFamily="34" charset="-120"/>
-              </a:rPr>
-              <a:t>BRAIN</a:t>
-            </a:r>
-            <a:endParaRPr lang="en-US" sz="1050" dirty="0"/>
-          </a:p>
-        </p:txBody>
-      </p:sp>
-      <p:sp>
-        <p:nvSpPr>
-          <p:cNvPr id="70" name="Lane HPA · stress"/>
-          <p:cNvSpPr/>
-          <p:nvPr/>
-        </p:nvSpPr>
-        <p:spPr>
-          <a:xfrm>
-            <a:off x="4526280" y="3480000"/>
-            <a:ext cx="3108960" cy="330000"/>
-          </a:xfrm>
-          <a:prstGeom prst="roundRect">
-            <a:avLst/>
-          </a:prstGeom>
-          <a:solidFill>
-            <a:srgbClr val="7A4B6B"/>
-          </a:solidFill>
-          <a:ln w="9525">
-            <a:solidFill>
-              <a:srgbClr val="7A4B6B"/>
-            </a:solidFill>
-            <a:prstDash val="solid"/>
-          </a:ln>
-        </p:spPr>
-      </p:sp>
-      <p:sp>
-        <p:nvSpPr>
-          <p:cNvPr id="71" name="Lane text HPA · stress"/>
-          <p:cNvSpPr/>
-          <p:nvPr/>
-        </p:nvSpPr>
-        <p:spPr>
-          <a:xfrm>
-            <a:off x="4526280" y="3529000"/>
-            <a:ext cx="3108960" cy="150000"/>
-          </a:xfrm>
-          <a:prstGeom prst="rect">
-            <a:avLst/>
-          </a:prstGeom>
-          <a:noFill/>
-          <a:ln/>
-        </p:spPr>
-        <p:txBody>
-          <a:bodyPr wrap="square" lIns="0" tIns="0" rIns="0" bIns="0" rtlCol="0" anchor="ctr"/>
-          <a:lstStyle/>
-          <a:p>
-            <a:pPr algn="ctr" indent="0" marL="0">
-              <a:buNone/>
-            </a:pPr>
-            <a:r>
-              <a:rPr lang="en-US" sz="1000" b="1" dirty="0">
-                <a:solidFill>
-                  <a:srgbClr val="FFFDFA"/>
-                </a:solidFill>
-                <a:latin typeface="Calibri" pitchFamily="34" charset="0"/>
-                <a:ea typeface="Calibri" pitchFamily="34" charset="-122"/>
-                <a:cs typeface="Calibri" pitchFamily="34" charset="-120"/>
-              </a:rPr>
-              <a:t>HPA · stress</a:t>
-            </a:r>
-            <a:endParaRPr lang="en-US" sz="1000" dirty="0"/>
-          </a:p>
-        </p:txBody>
-      </p:sp>
-      <p:sp>
-        <p:nvSpPr>
-          <p:cNvPr id="72" name="Lane arrow HPA · stress"/>
-          <p:cNvSpPr/>
-          <p:nvPr/>
-        </p:nvSpPr>
-        <p:spPr>
-          <a:xfrm>
-            <a:off x="6100000" y="3480000"/>
-            <a:ext cx="-360000" cy="-800000"/>
-          </a:xfrm>
-          <a:prstGeom prst="line">
-            <a:avLst/>
-          </a:prstGeom>
-          <a:noFill/>
-          <a:ln w="15240">
-            <a:solidFill>
-              <a:srgbClr val="1F5651">
-                <a:alpha val="56000"/>
-              </a:srgbClr>
-            </a:solidFill>
-            <a:prstDash val="solid"/>
-            <a:headEnd type="triangle"/>
-          </a:ln>
-        </p:spPr>
-      </p:sp>
-      <p:sp>
-        <p:nvSpPr>
-          <p:cNvPr id="73" name="Lane vagus nerve"/>
-          <p:cNvSpPr/>
-          <p:nvPr/>
-        </p:nvSpPr>
-        <p:spPr>
-          <a:xfrm>
-            <a:off x="4526280" y="3930000"/>
-            <a:ext cx="3108960" cy="330000"/>
-          </a:xfrm>
-          <a:prstGeom prst="roundRect">
-            <a:avLst/>
-          </a:prstGeom>
-          <a:solidFill>
-            <a:srgbClr val="2F7D77"/>
-          </a:solidFill>
-          <a:ln w="9525">
-            <a:solidFill>
-              <a:srgbClr val="2F7D77"/>
-            </a:solidFill>
-            <a:prstDash val="solid"/>
-          </a:ln>
-        </p:spPr>
-      </p:sp>
-      <p:sp>
-        <p:nvSpPr>
-          <p:cNvPr id="74" name="Lane text vagus nerve"/>
-          <p:cNvSpPr/>
-          <p:nvPr/>
-        </p:nvSpPr>
-        <p:spPr>
-          <a:xfrm>
-            <a:off x="4526280" y="3979000"/>
-            <a:ext cx="3108960" cy="150000"/>
-          </a:xfrm>
-          <a:prstGeom prst="rect">
-            <a:avLst/>
-          </a:prstGeom>
-          <a:noFill/>
-          <a:ln/>
-        </p:spPr>
-        <p:txBody>
-          <a:bodyPr wrap="square" lIns="0" tIns="0" rIns="0" bIns="0" rtlCol="0" anchor="ctr"/>
-          <a:lstStyle/>
-          <a:p>
-            <a:pPr algn="ctr" indent="0" marL="0">
-              <a:buNone/>
-            </a:pPr>
-            <a:r>
-              <a:rPr lang="en-US" sz="1000" b="1" dirty="0">
-                <a:solidFill>
-                  <a:srgbClr val="FFFDFA"/>
-                </a:solidFill>
-                <a:latin typeface="Calibri" pitchFamily="34" charset="0"/>
-                <a:ea typeface="Calibri" pitchFamily="34" charset="-122"/>
-                <a:cs typeface="Calibri" pitchFamily="34" charset="-120"/>
-              </a:rPr>
-              <a:t>vagus nerve</a:t>
-            </a:r>
-            <a:endParaRPr lang="en-US" sz="1000" dirty="0"/>
-          </a:p>
-        </p:txBody>
-      </p:sp>
-      <p:sp>
-        <p:nvSpPr>
-          <p:cNvPr id="75" name="Lane arrow vagus nerve"/>
-          <p:cNvSpPr/>
-          <p:nvPr/>
-        </p:nvSpPr>
-        <p:spPr>
-          <a:xfrm>
-            <a:off x="6100000" y="3930000"/>
-            <a:ext cx="-360000" cy="-1010000"/>
-          </a:xfrm>
-          <a:prstGeom prst="line">
-            <a:avLst/>
-          </a:prstGeom>
-          <a:noFill/>
-          <a:ln w="15240">
-            <a:solidFill>
-              <a:srgbClr val="1F5651">
-                <a:alpha val="56000"/>
-              </a:srgbClr>
-            </a:solidFill>
-            <a:prstDash val="solid"/>
-            <a:headEnd type="triangle"/>
-          </a:ln>
-        </p:spPr>
-      </p:sp>
-      <p:sp>
-        <p:nvSpPr>
-          <p:cNvPr id="76" name="Lane immune cells"/>
-          <p:cNvSpPr/>
-          <p:nvPr/>
-        </p:nvSpPr>
-        <p:spPr>
-          <a:xfrm>
-            <a:off x="4526280" y="4380000"/>
-            <a:ext cx="3108960" cy="330000"/>
-          </a:xfrm>
-          <a:prstGeom prst="roundRect">
-            <a:avLst/>
-          </a:prstGeom>
-          <a:solidFill>
-            <a:srgbClr val="5B8A4F"/>
-          </a:solidFill>
-          <a:ln w="9525">
-            <a:solidFill>
-              <a:srgbClr val="5B8A4F"/>
-            </a:solidFill>
-            <a:prstDash val="solid"/>
-          </a:ln>
-        </p:spPr>
-      </p:sp>
-      <p:sp>
-        <p:nvSpPr>
-          <p:cNvPr id="77" name="Lane text immune cells"/>
-          <p:cNvSpPr/>
-          <p:nvPr/>
-        </p:nvSpPr>
-        <p:spPr>
-          <a:xfrm>
-            <a:off x="4526280" y="4429000"/>
-            <a:ext cx="3108960" cy="150000"/>
-          </a:xfrm>
-          <a:prstGeom prst="rect">
-            <a:avLst/>
-          </a:prstGeom>
-          <a:noFill/>
-          <a:ln/>
-        </p:spPr>
-        <p:txBody>
-          <a:bodyPr wrap="square" lIns="0" tIns="0" rIns="0" bIns="0" rtlCol="0" anchor="ctr"/>
-          <a:lstStyle/>
-          <a:p>
-            <a:pPr algn="ctr" indent="0" marL="0">
-              <a:buNone/>
-            </a:pPr>
-            <a:r>
-              <a:rPr lang="en-US" sz="1000" b="1" dirty="0">
-                <a:solidFill>
-                  <a:srgbClr val="FFFDFA"/>
-                </a:solidFill>
-                <a:latin typeface="Calibri" pitchFamily="34" charset="0"/>
-                <a:ea typeface="Calibri" pitchFamily="34" charset="-122"/>
-                <a:cs typeface="Calibri" pitchFamily="34" charset="-120"/>
-              </a:rPr>
-              <a:t>immune cells</a:t>
-            </a:r>
-            <a:endParaRPr lang="en-US" sz="1000" dirty="0"/>
-          </a:p>
-        </p:txBody>
-      </p:sp>
-      <p:sp>
-        <p:nvSpPr>
-          <p:cNvPr id="78" name="Lane arrow immune cells"/>
-          <p:cNvSpPr/>
-          <p:nvPr/>
-        </p:nvSpPr>
-        <p:spPr>
-          <a:xfrm>
-            <a:off x="6100000" y="4380000"/>
-            <a:ext cx="-360000" cy="-1220000"/>
-          </a:xfrm>
-          <a:prstGeom prst="line">
-            <a:avLst/>
-          </a:prstGeom>
-          <a:noFill/>
-          <a:ln w="15240">
-            <a:solidFill>
-              <a:srgbClr val="1F5651">
-                <a:alpha val="56000"/>
-              </a:srgbClr>
-            </a:solidFill>
-            <a:prstDash val="solid"/>
-            <a:headEnd type="triangle"/>
-          </a:ln>
-        </p:spPr>
-      </p:sp>
-      <p:sp>
-        <p:nvSpPr>
-          <p:cNvPr id="79" name="Lane gut hormones"/>
-          <p:cNvSpPr/>
-          <p:nvPr/>
-        </p:nvSpPr>
-        <p:spPr>
-          <a:xfrm>
-            <a:off x="4526280" y="4830000"/>
-            <a:ext cx="3108960" cy="330000"/>
-          </a:xfrm>
-          <a:prstGeom prst="roundRect">
-            <a:avLst/>
-          </a:prstGeom>
-          <a:solidFill>
-            <a:srgbClr val="D2603A"/>
-          </a:solidFill>
-          <a:ln w="9525">
-            <a:solidFill>
-              <a:srgbClr val="D2603A"/>
-            </a:solidFill>
-            <a:prstDash val="solid"/>
-          </a:ln>
-        </p:spPr>
-      </p:sp>
-      <p:sp>
-        <p:nvSpPr>
-          <p:cNvPr id="80" name="Lane text gut hormones"/>
-          <p:cNvSpPr/>
-          <p:nvPr/>
-        </p:nvSpPr>
-        <p:spPr>
-          <a:xfrm>
-            <a:off x="4526280" y="4879000"/>
-            <a:ext cx="3108960" cy="150000"/>
-          </a:xfrm>
-          <a:prstGeom prst="rect">
-            <a:avLst/>
-          </a:prstGeom>
-          <a:noFill/>
-          <a:ln/>
-        </p:spPr>
-        <p:txBody>
-          <a:bodyPr wrap="square" lIns="0" tIns="0" rIns="0" bIns="0" rtlCol="0" anchor="ctr"/>
-          <a:lstStyle/>
-          <a:p>
-            <a:pPr algn="ctr" indent="0" marL="0">
-              <a:buNone/>
-            </a:pPr>
-            <a:r>
-              <a:rPr lang="en-US" sz="1000" b="1" dirty="0">
-                <a:solidFill>
-                  <a:srgbClr val="FFFDFA"/>
-                </a:solidFill>
-                <a:latin typeface="Calibri" pitchFamily="34" charset="0"/>
-                <a:ea typeface="Calibri" pitchFamily="34" charset="-122"/>
-                <a:cs typeface="Calibri" pitchFamily="34" charset="-120"/>
-              </a:rPr>
-              <a:t>gut hormones</a:t>
-            </a:r>
-            <a:endParaRPr lang="en-US" sz="1000" dirty="0"/>
-          </a:p>
-        </p:txBody>
-      </p:sp>
-      <p:sp>
-        <p:nvSpPr>
-          <p:cNvPr id="81" name="Lane arrow gut hormones"/>
-          <p:cNvSpPr/>
-          <p:nvPr/>
-        </p:nvSpPr>
-        <p:spPr>
-          <a:xfrm>
-            <a:off x="6100000" y="4830000"/>
-            <a:ext cx="-360000" cy="-1430000"/>
-          </a:xfrm>
-          <a:prstGeom prst="line">
-            <a:avLst/>
-          </a:prstGeom>
-          <a:noFill/>
-          <a:ln w="15240">
-            <a:solidFill>
-              <a:srgbClr val="1F5651">
-                <a:alpha val="56000"/>
-              </a:srgbClr>
-            </a:solidFill>
-            <a:prstDash val="solid"/>
-            <a:headEnd type="triangle"/>
-          </a:ln>
-        </p:spPr>
-      </p:sp>
-      <p:sp>
-        <p:nvSpPr>
-          <p:cNvPr id="82" name="Panel C title"/>
-          <p:cNvSpPr/>
-          <p:nvPr/>
-        </p:nvSpPr>
-        <p:spPr>
-          <a:xfrm>
-            <a:off x="8275320" y="1930000"/>
-            <a:ext cx="3154680" cy="320000"/>
-          </a:xfrm>
-          <a:prstGeom prst="rect">
-            <a:avLst/>
-          </a:prstGeom>
-          <a:noFill/>
-          <a:ln/>
-        </p:spPr>
-        <p:txBody>
-          <a:bodyPr wrap="square" lIns="0" tIns="0" rIns="0" bIns="0" rtlCol="0" anchor="ctr"/>
-          <a:lstStyle/>
-          <a:p>
-            <a:pPr algn="ctr" indent="0" marL="0">
-              <a:buNone/>
-            </a:pPr>
-            <a:r>
-              <a:rPr lang="en-US" sz="1250" b="1" dirty="0">
-                <a:solidFill>
-                  <a:srgbClr val="A8431F"/>
-                </a:solidFill>
-                <a:latin typeface="Calibri" pitchFamily="34" charset="0"/>
-                <a:ea typeface="Calibri" pitchFamily="34" charset="-122"/>
-                <a:cs typeface="Calibri" pitchFamily="34" charset="-120"/>
-              </a:rPr>
-              <a:t>The molecular keys</a:t>
-            </a:r>
-            <a:endParaRPr lang="en-US" sz="1250" dirty="0"/>
-          </a:p>
-        </p:txBody>
-      </p:sp>
-      <p:sp>
-        <p:nvSpPr>
-          <p:cNvPr id="83" name="Key card 1"/>
-          <p:cNvSpPr/>
-          <p:nvPr/>
-        </p:nvSpPr>
-        <p:spPr>
-          <a:xfrm>
-            <a:off x="8240000" y="2420000"/>
-            <a:ext cx="3220000" cy="840000"/>
-          </a:xfrm>
-          <a:prstGeom prst="roundRect">
-            <a:avLst/>
-          </a:prstGeom>
-          <a:solidFill>
-            <a:srgbClr val="FFFDFA"/>
+            <a:srgbClr val="FFFFFF"/>
           </a:solidFill>
           <a:ln w="12700">
             <a:solidFill>
@@ -7091,22 +6692,24 @@
       </p:sp>
       <p:sp>
         <p:nvSpPr>
-          <p:cNvPr id="84" name="SCFA squiggle 1"/>
-          <p:cNvSpPr/>
-          <p:nvPr/>
-        </p:nvSpPr>
-        <p:spPr>
-          <a:xfrm>
-            <a:off x="8420000" y="2940000"/>
-            <a:ext cx="260000" cy="-160000"/>
-          </a:xfrm>
-          <a:prstGeom prst="line">
-            <a:avLst/>
-          </a:prstGeom>
-          <a:noFill/>
-          <a:ln w="25400">
+          <p:cNvPr id="28" name="Shape 26"/>
+          <p:cNvSpPr/>
+          <p:nvPr/>
+        </p:nvSpPr>
+        <p:spPr>
+          <a:xfrm>
+            <a:off x="8321040" y="2688336"/>
+            <a:ext cx="182880" cy="182880"/>
+          </a:xfrm>
+          <a:prstGeom prst="ellipse">
+            <a:avLst/>
+          </a:prstGeom>
+          <a:solidFill>
+            <a:srgbClr val="2F7D77"/>
+          </a:solidFill>
+          <a:ln w="12700">
             <a:solidFill>
-              <a:srgbClr val="D9A441"/>
+              <a:srgbClr val="2F7D77"/>
             </a:solidFill>
             <a:prstDash val="solid"/>
           </a:ln>
@@ -7114,22 +6717,22 @@
       </p:sp>
       <p:sp>
         <p:nvSpPr>
-          <p:cNvPr id="85" name="SCFA squiggle 2"/>
-          <p:cNvSpPr/>
-          <p:nvPr/>
-        </p:nvSpPr>
-        <p:spPr>
-          <a:xfrm>
-            <a:off x="8680000" y="2780000"/>
-            <a:ext cx="260000" cy="160000"/>
+          <p:cNvPr id="29" name="Shape 27"/>
+          <p:cNvSpPr/>
+          <p:nvPr/>
+        </p:nvSpPr>
+        <p:spPr>
+          <a:xfrm>
+            <a:off x="8430768" y="2779776"/>
+            <a:ext cx="201168" cy="91440"/>
           </a:xfrm>
           <a:prstGeom prst="line">
             <a:avLst/>
           </a:prstGeom>
           <a:noFill/>
-          <a:ln w="25400">
+          <a:ln w="17780">
             <a:solidFill>
-              <a:srgbClr val="D9A441"/>
+              <a:srgbClr val="2F7D77"/>
             </a:solidFill>
             <a:prstDash val="solid"/>
           </a:ln>
@@ -7137,34 +6740,39 @@
       </p:sp>
       <p:sp>
         <p:nvSpPr>
-          <p:cNvPr id="86" name="SCFA end"/>
-          <p:cNvSpPr/>
-          <p:nvPr/>
-        </p:nvSpPr>
-        <p:spPr>
-          <a:xfrm>
-            <a:off x="8950000" y="2900000"/>
-            <a:ext cx="80000" cy="80000"/>
+          <p:cNvPr id="30" name="Shape 28"/>
+          <p:cNvSpPr/>
+          <p:nvPr/>
+        </p:nvSpPr>
+        <p:spPr>
+          <a:xfrm>
+            <a:off x="8668512" y="2825496"/>
+            <a:ext cx="118872" cy="118872"/>
           </a:xfrm>
           <a:prstGeom prst="ellipse">
             <a:avLst/>
           </a:prstGeom>
           <a:solidFill>
-            <a:srgbClr val="D9A441"/>
+            <a:srgbClr val="2F7D77"/>
           </a:solidFill>
-          <a:ln/>
-        </p:spPr>
-      </p:sp>
-      <p:sp>
-        <p:nvSpPr>
-          <p:cNvPr id="87" name="Key title 1"/>
-          <p:cNvSpPr/>
-          <p:nvPr/>
-        </p:nvSpPr>
-        <p:spPr>
-          <a:xfrm>
-            <a:off x="9140000" y="2580000"/>
-            <a:ext cx="2100000" cy="240000"/>
+          <a:ln w="12700">
+            <a:solidFill>
+              <a:srgbClr val="2F7D77"/>
+            </a:solidFill>
+            <a:prstDash val="solid"/>
+          </a:ln>
+        </p:spPr>
+      </p:sp>
+      <p:sp>
+        <p:nvSpPr>
+          <p:cNvPr id="31" name="Text 29"/>
+          <p:cNvSpPr/>
+          <p:nvPr/>
+        </p:nvSpPr>
+        <p:spPr>
+          <a:xfrm>
+            <a:off x="8851392" y="2560320"/>
+            <a:ext cx="2423160" cy="320040"/>
           </a:xfrm>
           <a:prstGeom prst="rect">
             <a:avLst/>
@@ -7176,11 +6784,11 @@
           <a:bodyPr wrap="square" lIns="0" tIns="0" rIns="0" bIns="0" rtlCol="0" anchor="ctr"/>
           <a:lstStyle/>
           <a:p>
-            <a:pPr algn="l" indent="0" marL="0">
-              <a:buNone/>
-            </a:pPr>
-            <a:r>
-              <a:rPr lang="en-US" sz="1000" b="1" dirty="0">
+            <a:pPr indent="0" marL="0">
+              <a:buNone/>
+            </a:pPr>
+            <a:r>
+              <a:rPr lang="en-US" sz="1280" b="1" dirty="0">
                 <a:solidFill>
                   <a:srgbClr val="A8431F"/>
                 </a:solidFill>
@@ -7190,20 +6798,20 @@
               </a:rPr>
               <a:t>Short-chain fatty acids</a:t>
             </a:r>
-            <a:endParaRPr lang="en-US" sz="1000" dirty="0"/>
-          </a:p>
-        </p:txBody>
-      </p:sp>
-      <p:sp>
-        <p:nvSpPr>
-          <p:cNvPr id="88" name="Key sub 1"/>
-          <p:cNvSpPr/>
-          <p:nvPr/>
-        </p:nvSpPr>
-        <p:spPr>
-          <a:xfrm>
-            <a:off x="9140000" y="2870000"/>
-            <a:ext cx="2100000" cy="250000"/>
+            <a:endParaRPr lang="en-US" sz="1280" dirty="0"/>
+          </a:p>
+        </p:txBody>
+      </p:sp>
+      <p:sp>
+        <p:nvSpPr>
+          <p:cNvPr id="32" name="Text 30"/>
+          <p:cNvSpPr/>
+          <p:nvPr/>
+        </p:nvSpPr>
+        <p:spPr>
+          <a:xfrm>
+            <a:off x="8851392" y="2889504"/>
+            <a:ext cx="2423160" cy="457200"/>
           </a:xfrm>
           <a:prstGeom prst="rect">
             <a:avLst/>
@@ -7215,11 +6823,11 @@
           <a:bodyPr wrap="square" lIns="0" tIns="0" rIns="0" bIns="0" rtlCol="0" anchor="ctr"/>
           <a:lstStyle/>
           <a:p>
-            <a:pPr algn="l" indent="0" marL="0">
-              <a:buNone/>
-            </a:pPr>
-            <a:r>
-              <a:rPr lang="en-US" sz="850" dirty="0">
+            <a:pPr indent="0" marL="0">
+              <a:buNone/>
+            </a:pPr>
+            <a:r>
+              <a:rPr lang="en-US" sz="1110" dirty="0">
                 <a:solidFill>
                   <a:srgbClr val="6B625A"/>
                 </a:solidFill>
@@ -7229,26 +6837,28 @@
               </a:rPr>
               <a:t>fiber → anti-inflammatory brain fuel</a:t>
             </a:r>
-            <a:endParaRPr lang="en-US" sz="850" dirty="0"/>
-          </a:p>
-        </p:txBody>
-      </p:sp>
-      <p:sp>
-        <p:nvSpPr>
-          <p:cNvPr id="89" name="Key card 2"/>
-          <p:cNvSpPr/>
-          <p:nvPr/>
-        </p:nvSpPr>
-        <p:spPr>
-          <a:xfrm>
-            <a:off x="8240000" y="3470000"/>
-            <a:ext cx="3220000" cy="840000"/>
+            <a:endParaRPr lang="en-US" sz="1110" dirty="0"/>
+          </a:p>
+        </p:txBody>
+      </p:sp>
+      <p:sp>
+        <p:nvSpPr>
+          <p:cNvPr id="33" name="Shape 31"/>
+          <p:cNvSpPr/>
+          <p:nvPr/>
+        </p:nvSpPr>
+        <p:spPr>
+          <a:xfrm>
+            <a:off x="8183880" y="3520440"/>
+            <a:ext cx="3273552" cy="914400"/>
           </a:xfrm>
           <a:prstGeom prst="roundRect">
-            <a:avLst/>
+            <a:avLst>
+              <a:gd name="adj" fmla="val 8000"/>
+            </a:avLst>
           </a:prstGeom>
           <a:solidFill>
-            <a:srgbClr val="FFFDFA"/>
+            <a:srgbClr val="FFFFFF"/>
           </a:solidFill>
           <a:ln w="12700">
             <a:solidFill>
@@ -7260,20 +6870,22 @@
       </p:sp>
       <p:sp>
         <p:nvSpPr>
-          <p:cNvPr id="90" name="Indole ring 1"/>
-          <p:cNvSpPr/>
-          <p:nvPr/>
-        </p:nvSpPr>
-        <p:spPr>
-          <a:xfrm>
-            <a:off x="8460000" y="3830000"/>
-            <a:ext cx="260000" cy="260000"/>
-          </a:xfrm>
-          <a:prstGeom prst="hexagon">
-            <a:avLst/>
-          </a:prstGeom>
-          <a:noFill/>
-          <a:ln w="19050">
+          <p:cNvPr id="34" name="Shape 32"/>
+          <p:cNvSpPr/>
+          <p:nvPr/>
+        </p:nvSpPr>
+        <p:spPr>
+          <a:xfrm>
+            <a:off x="8321040" y="3739896"/>
+            <a:ext cx="182880" cy="182880"/>
+          </a:xfrm>
+          <a:prstGeom prst="ellipse">
+            <a:avLst/>
+          </a:prstGeom>
+          <a:solidFill>
+            <a:srgbClr val="7A4B6B"/>
+          </a:solidFill>
+          <a:ln w="12700">
             <a:solidFill>
               <a:srgbClr val="7A4B6B"/>
             </a:solidFill>
@@ -7283,20 +6895,20 @@
       </p:sp>
       <p:sp>
         <p:nvSpPr>
-          <p:cNvPr id="91" name="Indole ring 2"/>
-          <p:cNvSpPr/>
-          <p:nvPr/>
-        </p:nvSpPr>
-        <p:spPr>
-          <a:xfrm>
-            <a:off x="8700000" y="3840000"/>
-            <a:ext cx="230000" cy="230000"/>
-          </a:xfrm>
-          <a:prstGeom prst="pentagon">
-            <a:avLst/>
-          </a:prstGeom>
-          <a:noFill/>
-          <a:ln w="19050">
+          <p:cNvPr id="35" name="Shape 33"/>
+          <p:cNvSpPr/>
+          <p:nvPr/>
+        </p:nvSpPr>
+        <p:spPr>
+          <a:xfrm>
+            <a:off x="8430768" y="3831336"/>
+            <a:ext cx="201168" cy="91440"/>
+          </a:xfrm>
+          <a:prstGeom prst="line">
+            <a:avLst/>
+          </a:prstGeom>
+          <a:noFill/>
+          <a:ln w="17780">
             <a:solidFill>
               <a:srgbClr val="7A4B6B"/>
             </a:solidFill>
@@ -7306,14 +6918,39 @@
       </p:sp>
       <p:sp>
         <p:nvSpPr>
-          <p:cNvPr id="92" name="Key title 2"/>
-          <p:cNvSpPr/>
-          <p:nvPr/>
-        </p:nvSpPr>
-        <p:spPr>
-          <a:xfrm>
-            <a:off x="9140000" y="3630000"/>
-            <a:ext cx="2100000" cy="240000"/>
+          <p:cNvPr id="36" name="Shape 34"/>
+          <p:cNvSpPr/>
+          <p:nvPr/>
+        </p:nvSpPr>
+        <p:spPr>
+          <a:xfrm>
+            <a:off x="8668512" y="3877056"/>
+            <a:ext cx="118872" cy="118872"/>
+          </a:xfrm>
+          <a:prstGeom prst="ellipse">
+            <a:avLst/>
+          </a:prstGeom>
+          <a:solidFill>
+            <a:srgbClr val="7A4B6B"/>
+          </a:solidFill>
+          <a:ln w="12700">
+            <a:solidFill>
+              <a:srgbClr val="7A4B6B"/>
+            </a:solidFill>
+            <a:prstDash val="solid"/>
+          </a:ln>
+        </p:spPr>
+      </p:sp>
+      <p:sp>
+        <p:nvSpPr>
+          <p:cNvPr id="37" name="Text 35"/>
+          <p:cNvSpPr/>
+          <p:nvPr/>
+        </p:nvSpPr>
+        <p:spPr>
+          <a:xfrm>
+            <a:off x="8851392" y="3611880"/>
+            <a:ext cx="2423160" cy="320040"/>
           </a:xfrm>
           <a:prstGeom prst="rect">
             <a:avLst/>
@@ -7325,11 +6962,11 @@
           <a:bodyPr wrap="square" lIns="0" tIns="0" rIns="0" bIns="0" rtlCol="0" anchor="ctr"/>
           <a:lstStyle/>
           <a:p>
-            <a:pPr algn="l" indent="0" marL="0">
-              <a:buNone/>
-            </a:pPr>
-            <a:r>
-              <a:rPr lang="en-US" sz="1000" b="1" dirty="0">
+            <a:pPr indent="0" marL="0">
+              <a:buNone/>
+            </a:pPr>
+            <a:r>
+              <a:rPr lang="en-US" sz="1280" b="1" dirty="0">
                 <a:solidFill>
                   <a:srgbClr val="A8431F"/>
                 </a:solidFill>
@@ -7339,20 +6976,20 @@
               </a:rPr>
               <a:t>Tryptophan &amp; indoles</a:t>
             </a:r>
-            <a:endParaRPr lang="en-US" sz="1000" dirty="0"/>
-          </a:p>
-        </p:txBody>
-      </p:sp>
-      <p:sp>
-        <p:nvSpPr>
-          <p:cNvPr id="93" name="Key sub 2"/>
-          <p:cNvSpPr/>
-          <p:nvPr/>
-        </p:nvSpPr>
-        <p:spPr>
-          <a:xfrm>
-            <a:off x="9140000" y="3920000"/>
-            <a:ext cx="2100000" cy="250000"/>
+            <a:endParaRPr lang="en-US" sz="1280" dirty="0"/>
+          </a:p>
+        </p:txBody>
+      </p:sp>
+      <p:sp>
+        <p:nvSpPr>
+          <p:cNvPr id="38" name="Text 36"/>
+          <p:cNvSpPr/>
+          <p:nvPr/>
+        </p:nvSpPr>
+        <p:spPr>
+          <a:xfrm>
+            <a:off x="8851392" y="3941064"/>
+            <a:ext cx="2423160" cy="457200"/>
           </a:xfrm>
           <a:prstGeom prst="rect">
             <a:avLst/>
@@ -7364,11 +7001,11 @@
           <a:bodyPr wrap="square" lIns="0" tIns="0" rIns="0" bIns="0" rtlCol="0" anchor="ctr"/>
           <a:lstStyle/>
           <a:p>
-            <a:pPr algn="l" indent="0" marL="0">
-              <a:buNone/>
-            </a:pPr>
-            <a:r>
-              <a:rPr lang="en-US" sz="850" dirty="0">
+            <a:pPr indent="0" marL="0">
+              <a:buNone/>
+            </a:pPr>
+            <a:r>
+              <a:rPr lang="en-US" sz="1110" dirty="0">
                 <a:solidFill>
                   <a:srgbClr val="6B625A"/>
                 </a:solidFill>
@@ -7378,26 +7015,28 @@
               </a:rPr>
               <a:t>serotonin's raw material; calm vs irritate</a:t>
             </a:r>
-            <a:endParaRPr lang="en-US" sz="850" dirty="0"/>
-          </a:p>
-        </p:txBody>
-      </p:sp>
-      <p:sp>
-        <p:nvSpPr>
-          <p:cNvPr id="94" name="Key card 3"/>
-          <p:cNvSpPr/>
-          <p:nvPr/>
-        </p:nvSpPr>
-        <p:spPr>
-          <a:xfrm>
-            <a:off x="8240000" y="4520000"/>
-            <a:ext cx="3220000" cy="840000"/>
+            <a:endParaRPr lang="en-US" sz="1110" dirty="0"/>
+          </a:p>
+        </p:txBody>
+      </p:sp>
+      <p:sp>
+        <p:nvSpPr>
+          <p:cNvPr id="39" name="Shape 37"/>
+          <p:cNvSpPr/>
+          <p:nvPr/>
+        </p:nvSpPr>
+        <p:spPr>
+          <a:xfrm>
+            <a:off x="8183880" y="4572000"/>
+            <a:ext cx="3273552" cy="914400"/>
           </a:xfrm>
           <a:prstGeom prst="roundRect">
-            <a:avLst/>
+            <a:avLst>
+              <a:gd name="adj" fmla="val 8000"/>
+            </a:avLst>
           </a:prstGeom>
           <a:solidFill>
-            <a:srgbClr val="FFFDFA"/>
+            <a:srgbClr val="FFFFFF"/>
           </a:solidFill>
           <a:ln w="12700">
             <a:solidFill>
@@ -7409,22 +7048,24 @@
       </p:sp>
       <p:sp>
         <p:nvSpPr>
-          <p:cNvPr id="95" name="Bile ring 1"/>
-          <p:cNvSpPr/>
-          <p:nvPr/>
-        </p:nvSpPr>
-        <p:spPr>
-          <a:xfrm>
-            <a:off x="8440000" y="4860000"/>
-            <a:ext cx="245000" cy="245000"/>
-          </a:xfrm>
-          <a:prstGeom prst="hexagon">
-            <a:avLst/>
-          </a:prstGeom>
-          <a:noFill/>
-          <a:ln w="19050">
+          <p:cNvPr id="40" name="Shape 38"/>
+          <p:cNvSpPr/>
+          <p:nvPr/>
+        </p:nvSpPr>
+        <p:spPr>
+          <a:xfrm>
+            <a:off x="8321040" y="4791456"/>
+            <a:ext cx="182880" cy="182880"/>
+          </a:xfrm>
+          <a:prstGeom prst="ellipse">
+            <a:avLst/>
+          </a:prstGeom>
+          <a:solidFill>
+            <a:srgbClr val="D9A441"/>
+          </a:solidFill>
+          <a:ln w="12700">
             <a:solidFill>
-              <a:srgbClr val="5B8A4F"/>
+              <a:srgbClr val="D9A441"/>
             </a:solidFill>
             <a:prstDash val="solid"/>
           </a:ln>
@@ -7432,22 +7073,22 @@
       </p:sp>
       <p:sp>
         <p:nvSpPr>
-          <p:cNvPr id="96" name="Bile ring 2"/>
-          <p:cNvSpPr/>
-          <p:nvPr/>
-        </p:nvSpPr>
-        <p:spPr>
-          <a:xfrm>
-            <a:off x="8660000" y="4860000"/>
-            <a:ext cx="245000" cy="245000"/>
-          </a:xfrm>
-          <a:prstGeom prst="hexagon">
-            <a:avLst/>
-          </a:prstGeom>
-          <a:noFill/>
-          <a:ln w="19050">
+          <p:cNvPr id="41" name="Shape 39"/>
+          <p:cNvSpPr/>
+          <p:nvPr/>
+        </p:nvSpPr>
+        <p:spPr>
+          <a:xfrm>
+            <a:off x="8430768" y="4882896"/>
+            <a:ext cx="201168" cy="91440"/>
+          </a:xfrm>
+          <a:prstGeom prst="line">
+            <a:avLst/>
+          </a:prstGeom>
+          <a:noFill/>
+          <a:ln w="17780">
             <a:solidFill>
-              <a:srgbClr val="5B8A4F"/>
+              <a:srgbClr val="D9A441"/>
             </a:solidFill>
             <a:prstDash val="solid"/>
           </a:ln>
@@ -7455,22 +7096,24 @@
       </p:sp>
       <p:sp>
         <p:nvSpPr>
-          <p:cNvPr id="97" name="Bile ring 3"/>
-          <p:cNvSpPr/>
-          <p:nvPr/>
-        </p:nvSpPr>
-        <p:spPr>
-          <a:xfrm>
-            <a:off x="8880000" y="4940000"/>
-            <a:ext cx="210000" cy="210000"/>
-          </a:xfrm>
-          <a:prstGeom prst="pentagon">
-            <a:avLst/>
-          </a:prstGeom>
-          <a:noFill/>
-          <a:ln w="19050">
+          <p:cNvPr id="42" name="Shape 40"/>
+          <p:cNvSpPr/>
+          <p:nvPr/>
+        </p:nvSpPr>
+        <p:spPr>
+          <a:xfrm>
+            <a:off x="8668512" y="4928616"/>
+            <a:ext cx="118872" cy="118872"/>
+          </a:xfrm>
+          <a:prstGeom prst="ellipse">
+            <a:avLst/>
+          </a:prstGeom>
+          <a:solidFill>
+            <a:srgbClr val="D9A441"/>
+          </a:solidFill>
+          <a:ln w="12700">
             <a:solidFill>
-              <a:srgbClr val="5B8A4F"/>
+              <a:srgbClr val="D9A441"/>
             </a:solidFill>
             <a:prstDash val="solid"/>
           </a:ln>
@@ -7478,14 +7121,14 @@
       </p:sp>
       <p:sp>
         <p:nvSpPr>
-          <p:cNvPr id="98" name="Key title 3"/>
-          <p:cNvSpPr/>
-          <p:nvPr/>
-        </p:nvSpPr>
-        <p:spPr>
-          <a:xfrm>
-            <a:off x="9140000" y="4680000"/>
-            <a:ext cx="2100000" cy="240000"/>
+          <p:cNvPr id="43" name="Text 41"/>
+          <p:cNvSpPr/>
+          <p:nvPr/>
+        </p:nvSpPr>
+        <p:spPr>
+          <a:xfrm>
+            <a:off x="8851392" y="4663440"/>
+            <a:ext cx="2423160" cy="320040"/>
           </a:xfrm>
           <a:prstGeom prst="rect">
             <a:avLst/>
@@ -7497,11 +7140,11 @@
           <a:bodyPr wrap="square" lIns="0" tIns="0" rIns="0" bIns="0" rtlCol="0" anchor="ctr"/>
           <a:lstStyle/>
           <a:p>
-            <a:pPr algn="l" indent="0" marL="0">
-              <a:buNone/>
-            </a:pPr>
-            <a:r>
-              <a:rPr lang="en-US" sz="1000" b="1" dirty="0">
+            <a:pPr indent="0" marL="0">
+              <a:buNone/>
+            </a:pPr>
+            <a:r>
+              <a:rPr lang="en-US" sz="1280" b="1" dirty="0">
                 <a:solidFill>
                   <a:srgbClr val="A8431F"/>
                 </a:solidFill>
@@ -7511,20 +7154,20 @@
               </a:rPr>
               <a:t>Bile acids</a:t>
             </a:r>
-            <a:endParaRPr lang="en-US" sz="1000" dirty="0"/>
-          </a:p>
-        </p:txBody>
-      </p:sp>
-      <p:sp>
-        <p:nvSpPr>
-          <p:cNvPr id="99" name="Key sub 3"/>
-          <p:cNvSpPr/>
-          <p:nvPr/>
-        </p:nvSpPr>
-        <p:spPr>
-          <a:xfrm>
-            <a:off x="9140000" y="4970000"/>
-            <a:ext cx="2100000" cy="250000"/>
+            <a:endParaRPr lang="en-US" sz="1280" dirty="0"/>
+          </a:p>
+        </p:txBody>
+      </p:sp>
+      <p:sp>
+        <p:nvSpPr>
+          <p:cNvPr id="44" name="Text 42"/>
+          <p:cNvSpPr/>
+          <p:nvPr/>
+        </p:nvSpPr>
+        <p:spPr>
+          <a:xfrm>
+            <a:off x="8851392" y="4992624"/>
+            <a:ext cx="2423160" cy="457200"/>
           </a:xfrm>
           <a:prstGeom prst="rect">
             <a:avLst/>
@@ -7536,11 +7179,11 @@
           <a:bodyPr wrap="square" lIns="0" tIns="0" rIns="0" bIns="0" rtlCol="0" anchor="ctr"/>
           <a:lstStyle/>
           <a:p>
-            <a:pPr algn="l" indent="0" marL="0">
-              <a:buNone/>
-            </a:pPr>
-            <a:r>
-              <a:rPr lang="en-US" sz="850" dirty="0">
+            <a:pPr indent="0" marL="0">
+              <a:buNone/>
+            </a:pPr>
+            <a:r>
+              <a:rPr lang="en-US" sz="1110" dirty="0">
                 <a:solidFill>
                   <a:srgbClr val="6B625A"/>
                 </a:solidFill>
@@ -7550,13 +7193,13 @@
               </a:rPr>
               <a:t>microbe-modified; trigger GLP-1</a:t>
             </a:r>
-            <a:endParaRPr lang="en-US" sz="850" dirty="0"/>
-          </a:p>
-        </p:txBody>
-      </p:sp>
-      <p:sp>
-        <p:nvSpPr>
-          <p:cNvPr id="100" name="Source note"/>
+            <a:endParaRPr lang="en-US" sz="1110" dirty="0"/>
+          </a:p>
+        </p:txBody>
+      </p:sp>
+      <p:sp>
+        <p:nvSpPr>
+          <p:cNvPr id="45" name="Text 43"/>
           <p:cNvSpPr/>
           <p:nvPr/>
         </p:nvSpPr>
@@ -7575,11 +7218,11 @@
           <a:bodyPr wrap="square" lIns="0" tIns="0" rIns="0" bIns="0" rtlCol="0" anchor="ctr"/>
           <a:lstStyle/>
           <a:p>
-            <a:pPr algn="ctr" indent="0" marL="0">
-              <a:buNone/>
-            </a:pPr>
-            <a:r>
-              <a:rPr lang="en-US" sz="900" dirty="0">
+            <a:pPr indent="0" marL="0">
+              <a:buNone/>
+            </a:pPr>
+            <a:r>
+              <a:rPr lang="en-US" sz="950" i="1" dirty="0">
                 <a:solidFill>
                   <a:srgbClr val="6B625A"/>
                 </a:solidFill>
@@ -7589,7 +7232,7 @@
               </a:rPr>
               <a:t>Original recreation of the microbiome–gut–brain axis figure (Microbial Biotechnology, 2024).</a:t>
             </a:r>
-            <a:endParaRPr lang="en-US" sz="900" dirty="0"/>
+            <a:endParaRPr lang="en-US" sz="950" dirty="0"/>
           </a:p>
         </p:txBody>
       </p:sp>
@@ -9961,35 +9604,6 @@
           </a:p>
         </p:txBody>
       </p:sp>
-      <p:pic>
-        <p:nvPicPr>
-          <p:cNvPr id="80" name="Generated reward circuit art"/>
-          <p:cNvPicPr>
-            <a:picLocks noChangeAspect="1"/>
-          </p:cNvPicPr>
-          <p:nvPr/>
-        </p:nvPicPr>
-        <p:blipFill>
-          <a:blip r:embed="rIdImageReward"/>
-          <a:stretch>
-            <a:fillRect/>
-          </a:stretch>
-        </p:blipFill>
-        <p:spPr>
-          <a:xfrm>
-            <a:off x="6460000" y="1640000"/>
-            <a:ext cx="5070000" cy="3200000"/>
-          </a:xfrm>
-          <a:prstGeom prst="roundRect">
-            <a:avLst/>
-          </a:prstGeom>
-          <a:ln w="12700">
-            <a:solidFill>
-              <a:srgbClr val="E7DDD1"/>
-            </a:solidFill>
-          </a:ln>
-        </p:spPr>
-      </p:pic>
     </p:spTree>
   </p:cSld>
   <p:clrMapOvr>
@@ -11840,35 +11454,232 @@
           </a:p>
         </p:txBody>
       </p:sp>
-      <p:pic>
-        <p:nvPicPr>
-          <p:cNvPr id="80" name="Generated vagus highway art"/>
-          <p:cNvPicPr>
-            <a:picLocks noChangeAspect="1"/>
-          </p:cNvPicPr>
-          <p:nvPr/>
-        </p:nvPicPr>
-        <p:blipFill>
-          <a:blip r:embed="rIdImageVagus"/>
-          <a:stretch>
-            <a:fillRect/>
-          </a:stretch>
-        </p:blipFill>
+      <p:sp>
+        <p:nvSpPr>
+          <p:cNvPr id="6" name="Shape 4"/>
+          <p:cNvSpPr/>
+          <p:nvPr/>
+        </p:nvSpPr>
         <p:spPr>
           <a:xfrm>
             <a:off x="6400800" y="1737360"/>
             <a:ext cx="5212080" cy="3566160"/>
           </a:xfrm>
           <a:prstGeom prst="roundRect">
-            <a:avLst/>
-          </a:prstGeom>
+            <a:avLst>
+              <a:gd name="adj" fmla="val 2308"/>
+            </a:avLst>
+          </a:prstGeom>
+          <a:solidFill>
+            <a:srgbClr val="FBF7F2"/>
+          </a:solidFill>
           <a:ln w="12700">
             <a:solidFill>
               <a:srgbClr val="E7DDD1"/>
             </a:solidFill>
+            <a:prstDash val="solid"/>
           </a:ln>
-        </p:spPr>
-      </p:pic>
+          <a:effectLst>
+            <a:outerShdw sx="100000" sy="100000" kx="0" ky="0" algn="bl" rotWithShape="0" blurRad="114300" dist="38100" dir="8100000">
+              <a:srgbClr val="000000">
+                <a:alpha val="16000"/>
+              </a:srgbClr>
+            </a:outerShdw>
+          </a:effectLst>
+        </p:spPr>
+      </p:sp>
+      <p:sp>
+        <p:nvSpPr>
+          <p:cNvPr id="7" name="Shape 5"/>
+          <p:cNvSpPr/>
+          <p:nvPr/>
+        </p:nvSpPr>
+        <p:spPr>
+          <a:xfrm>
+            <a:off x="6858000" y="2286000"/>
+            <a:ext cx="1737360" cy="1737360"/>
+          </a:xfrm>
+          <a:prstGeom prst="ellipse">
+            <a:avLst/>
+          </a:prstGeom>
+          <a:solidFill>
+            <a:srgbClr val="F7E3DA"/>
+          </a:solidFill>
+          <a:ln w="25400">
+            <a:solidFill>
+              <a:srgbClr val="A8431F"/>
+            </a:solidFill>
+            <a:prstDash val="solid"/>
+          </a:ln>
+        </p:spPr>
+      </p:sp>
+      <p:sp>
+        <p:nvSpPr>
+          <p:cNvPr id="8" name="Text 6"/>
+          <p:cNvSpPr/>
+          <p:nvPr/>
+        </p:nvSpPr>
+        <p:spPr>
+          <a:xfrm>
+            <a:off x="6858000" y="2286000"/>
+            <a:ext cx="1737360" cy="1737360"/>
+          </a:xfrm>
+          <a:prstGeom prst="rect">
+            <a:avLst/>
+          </a:prstGeom>
+          <a:noFill/>
+          <a:ln/>
+        </p:spPr>
+        <p:txBody>
+          <a:bodyPr wrap="square" lIns="0" tIns="0" rIns="0" bIns="0" rtlCol="0" anchor="ctr"/>
+          <a:lstStyle/>
+          <a:p>
+            <a:pPr algn="ctr" indent="0" marL="0">
+              <a:buNone/>
+            </a:pPr>
+            <a:r>
+              <a:rPr lang="en-US" sz="1400" b="1" dirty="0">
+                <a:solidFill>
+                  <a:srgbClr val="A8431F"/>
+                </a:solidFill>
+                <a:latin typeface="Calibri" pitchFamily="34" charset="0"/>
+                <a:ea typeface="Calibri" pitchFamily="34" charset="-122"/>
+                <a:cs typeface="Calibri" pitchFamily="34" charset="-120"/>
+              </a:rPr>
+              <a:t>BRAIN</a:t>
+            </a:r>
+            <a:endParaRPr lang="en-US" sz="1400" dirty="0"/>
+          </a:p>
+        </p:txBody>
+      </p:sp>
+      <p:sp>
+        <p:nvSpPr>
+          <p:cNvPr id="9" name="Shape 7"/>
+          <p:cNvSpPr/>
+          <p:nvPr/>
+        </p:nvSpPr>
+        <p:spPr>
+          <a:xfrm>
+            <a:off x="9418320" y="3291840"/>
+            <a:ext cx="1737360" cy="1737360"/>
+          </a:xfrm>
+          <a:prstGeom prst="ellipse">
+            <a:avLst/>
+          </a:prstGeom>
+          <a:solidFill>
+            <a:srgbClr val="E3EFEE"/>
+          </a:solidFill>
+          <a:ln w="25400">
+            <a:solidFill>
+              <a:srgbClr val="1F5651"/>
+            </a:solidFill>
+            <a:prstDash val="solid"/>
+          </a:ln>
+        </p:spPr>
+      </p:sp>
+      <p:sp>
+        <p:nvSpPr>
+          <p:cNvPr id="10" name="Text 8"/>
+          <p:cNvSpPr/>
+          <p:nvPr/>
+        </p:nvSpPr>
+        <p:spPr>
+          <a:xfrm>
+            <a:off x="9418320" y="3291840"/>
+            <a:ext cx="1737360" cy="1737360"/>
+          </a:xfrm>
+          <a:prstGeom prst="rect">
+            <a:avLst/>
+          </a:prstGeom>
+          <a:noFill/>
+          <a:ln/>
+        </p:spPr>
+        <p:txBody>
+          <a:bodyPr wrap="square" lIns="0" tIns="0" rIns="0" bIns="0" rtlCol="0" anchor="ctr"/>
+          <a:lstStyle/>
+          <a:p>
+            <a:pPr algn="ctr" indent="0" marL="0">
+              <a:buNone/>
+            </a:pPr>
+            <a:r>
+              <a:rPr lang="en-US" sz="1400" b="1" dirty="0">
+                <a:solidFill>
+                  <a:srgbClr val="1F5651"/>
+                </a:solidFill>
+                <a:latin typeface="Calibri" pitchFamily="34" charset="0"/>
+                <a:ea typeface="Calibri" pitchFamily="34" charset="-122"/>
+                <a:cs typeface="Calibri" pitchFamily="34" charset="-120"/>
+              </a:rPr>
+              <a:t>GUT</a:t>
+            </a:r>
+            <a:endParaRPr lang="en-US" sz="1400" dirty="0"/>
+          </a:p>
+        </p:txBody>
+      </p:sp>
+      <p:sp>
+        <p:nvSpPr>
+          <p:cNvPr id="11" name="Shape 9"/>
+          <p:cNvSpPr/>
+          <p:nvPr/>
+        </p:nvSpPr>
+        <p:spPr>
+          <a:xfrm>
+            <a:off x="8595360" y="3154680"/>
+            <a:ext cx="822960" cy="960120"/>
+          </a:xfrm>
+          <a:prstGeom prst="line">
+            <a:avLst/>
+          </a:prstGeom>
+          <a:noFill/>
+          <a:ln w="63500">
+            <a:solidFill>
+              <a:srgbClr val="2F7D77"/>
+            </a:solidFill>
+            <a:prstDash val="solid"/>
+            <a:headEnd type="triangle"/>
+            <a:tailEnd type="triangle"/>
+          </a:ln>
+        </p:spPr>
+      </p:sp>
+      <p:sp>
+        <p:nvSpPr>
+          <p:cNvPr id="12" name="Text 10"/>
+          <p:cNvSpPr/>
+          <p:nvPr/>
+        </p:nvSpPr>
+        <p:spPr>
+          <a:xfrm>
+            <a:off x="6583680" y="4800600"/>
+            <a:ext cx="4846320" cy="365760"/>
+          </a:xfrm>
+          <a:prstGeom prst="rect">
+            <a:avLst/>
+          </a:prstGeom>
+          <a:noFill/>
+          <a:ln/>
+        </p:spPr>
+        <p:txBody>
+          <a:bodyPr wrap="square" lIns="0" tIns="0" rIns="0" bIns="0" rtlCol="0" anchor="ctr"/>
+          <a:lstStyle/>
+          <a:p>
+            <a:pPr algn="ctr" indent="0" marL="0">
+              <a:buNone/>
+            </a:pPr>
+            <a:r>
+              <a:rPr lang="en-US" sz="1300" i="1" dirty="0">
+                <a:solidFill>
+                  <a:srgbClr val="6B625A"/>
+                </a:solidFill>
+                <a:latin typeface="Calibri" pitchFamily="34" charset="0"/>
+                <a:ea typeface="Calibri" pitchFamily="34" charset="-122"/>
+                <a:cs typeface="Calibri" pitchFamily="34" charset="-120"/>
+              </a:rPr>
+              <a:t>highway · post · phone line</a:t>
+            </a:r>
+            <a:endParaRPr lang="en-US" sz="1300" dirty="0"/>
+          </a:p>
+        </p:txBody>
+      </p:sp>
     </p:spTree>
   </p:cSld>
   <p:clrMapOvr>
@@ -12074,7 +11885,7 @@
       </p:sp>
       <p:sp>
         <p:nvSpPr>
-          <p:cNvPr id="30" name="Diagram panel"/>
+          <p:cNvPr id="5" name="Shape 3"/>
           <p:cNvSpPr/>
           <p:nvPr/>
         </p:nvSpPr>
@@ -12084,7 +11895,9 @@
             <a:ext cx="5029200" cy="3931920"/>
           </a:xfrm>
           <a:prstGeom prst="roundRect">
-            <a:avLst/>
+            <a:avLst>
+              <a:gd name="adj" fmla="val 2093"/>
+            </a:avLst>
           </a:prstGeom>
           <a:solidFill>
             <a:srgbClr val="FBF7F2"/>
@@ -12095,43 +11908,25 @@
             </a:solidFill>
             <a:prstDash val="solid"/>
           </a:ln>
-        </p:spPr>
-      </p:sp>
-      <p:sp>
-        <p:nvSpPr>
-          <p:cNvPr id="31" name="Bloodstream"/>
-          <p:cNvSpPr/>
-          <p:nvPr/>
-        </p:nvSpPr>
-        <p:spPr>
-          <a:xfrm>
-            <a:off x="6900000" y="4550000"/>
-            <a:ext cx="4200000" cy="0"/>
-          </a:xfrm>
-          <a:prstGeom prst="line">
-            <a:avLst/>
-          </a:prstGeom>
-          <a:noFill/>
-          <a:ln w="114300">
-            <a:solidFill>
-              <a:srgbClr val="2F7D77">
-                <a:alpha val="30000"/>
+          <a:effectLst>
+            <a:outerShdw sx="100000" sy="100000" kx="0" ky="0" algn="bl" rotWithShape="0" blurRad="114300" dist="38100" dir="8100000">
+              <a:srgbClr val="000000">
+                <a:alpha val="16000"/>
               </a:srgbClr>
-            </a:solidFill>
-            <a:prstDash val="solid"/>
-          </a:ln>
-        </p:spPr>
-      </p:sp>
-      <p:sp>
-        <p:nvSpPr>
-          <p:cNvPr id="32" name="Bloodstream label"/>
-          <p:cNvSpPr/>
-          <p:nvPr/>
-        </p:nvSpPr>
-        <p:spPr>
-          <a:xfrm>
-            <a:off x="7500000" y="4980000"/>
-            <a:ext cx="3300000" cy="260000"/>
+            </a:outerShdw>
+          </a:effectLst>
+        </p:spPr>
+      </p:sp>
+      <p:sp>
+        <p:nvSpPr>
+          <p:cNvPr id="6" name="Text 4"/>
+          <p:cNvSpPr/>
+          <p:nvPr/>
+        </p:nvSpPr>
+        <p:spPr>
+          <a:xfrm>
+            <a:off x="6903720" y="1993392"/>
+            <a:ext cx="4389120" cy="237744"/>
           </a:xfrm>
           <a:prstGeom prst="rect">
             <a:avLst/>
@@ -12147,116 +11942,36 @@
               <a:buNone/>
             </a:pPr>
             <a:r>
-              <a:rPr lang="en-US" sz="900" b="1" dirty="0">
-                <a:solidFill>
-                  <a:srgbClr val="1F5651"/>
+              <a:rPr lang="en-US" sz="1180" b="1" dirty="0">
+                <a:solidFill>
+                  <a:srgbClr val="6B625A"/>
                 </a:solidFill>
                 <a:latin typeface="Calibri" pitchFamily="34" charset="0"/>
                 <a:ea typeface="Calibri" pitchFamily="34" charset="-122"/>
                 <a:cs typeface="Calibri" pitchFamily="34" charset="-120"/>
               </a:rPr>
-              <a:t>bloodstream carrying semaglutide</a:t>
-            </a:r>
-            <a:endParaRPr lang="en-US" sz="900" dirty="0"/>
-          </a:p>
-        </p:txBody>
-      </p:sp>
-      <p:sp>
-        <p:nvSpPr>
-          <p:cNvPr id="33" name="Drug dot"/>
-          <p:cNvSpPr/>
-          <p:nvPr/>
-        </p:nvSpPr>
-        <p:spPr>
-          <a:xfrm>
-            <a:off x="7300000" y="4450000"/>
-            <a:ext cx="140000" cy="140000"/>
-          </a:xfrm>
-          <a:prstGeom prst="ellipse">
-            <a:avLst/>
-          </a:prstGeom>
-          <a:solidFill>
-            <a:srgbClr val="D2603A"/>
-          </a:solidFill>
-          <a:ln/>
-        </p:spPr>
-      </p:sp>
-      <p:sp>
-        <p:nvSpPr>
-          <p:cNvPr id="34" name="Drug dot"/>
-          <p:cNvSpPr/>
-          <p:nvPr/>
-        </p:nvSpPr>
-        <p:spPr>
-          <a:xfrm>
-            <a:off x="7900000" y="4580000"/>
-            <a:ext cx="140000" cy="140000"/>
-          </a:xfrm>
-          <a:prstGeom prst="ellipse">
-            <a:avLst/>
-          </a:prstGeom>
-          <a:solidFill>
-            <a:srgbClr val="D2603A"/>
-          </a:solidFill>
-          <a:ln/>
-        </p:spPr>
-      </p:sp>
-      <p:sp>
-        <p:nvSpPr>
-          <p:cNvPr id="35" name="Drug dot"/>
-          <p:cNvSpPr/>
-          <p:nvPr/>
-        </p:nvSpPr>
-        <p:spPr>
-          <a:xfrm>
-            <a:off x="10100000" y="4430000"/>
-            <a:ext cx="140000" cy="140000"/>
-          </a:xfrm>
-          <a:prstGeom prst="ellipse">
-            <a:avLst/>
-          </a:prstGeom>
-          <a:solidFill>
-            <a:srgbClr val="D2603A"/>
-          </a:solidFill>
-          <a:ln/>
-        </p:spPr>
-      </p:sp>
-      <p:sp>
-        <p:nvSpPr>
-          <p:cNvPr id="36" name="Drug dot"/>
-          <p:cNvSpPr/>
-          <p:nvPr/>
-        </p:nvSpPr>
-        <p:spPr>
-          <a:xfrm>
-            <a:off x="10700000" y="4570000"/>
-            <a:ext cx="140000" cy="140000"/>
-          </a:xfrm>
-          <a:prstGeom prst="ellipse">
-            <a:avLst/>
-          </a:prstGeom>
-          <a:solidFill>
-            <a:srgbClr val="D2603A"/>
-          </a:solidFill>
-          <a:ln/>
-        </p:spPr>
-      </p:sp>
-      <p:sp>
-        <p:nvSpPr>
-          <p:cNvPr id="37" name="BBB wall"/>
-          <p:cNvSpPr/>
-          <p:nvPr/>
-        </p:nvSpPr>
-        <p:spPr>
-          <a:xfrm>
-            <a:off x="7000000" y="3300000"/>
-            <a:ext cx="4000000" cy="0"/>
+              <a:t>blood–brain barrier: mostly sealed</a:t>
+            </a:r>
+            <a:endParaRPr lang="en-US" sz="1180" dirty="0"/>
+          </a:p>
+        </p:txBody>
+      </p:sp>
+      <p:sp>
+        <p:nvSpPr>
+          <p:cNvPr id="7" name="Shape 5"/>
+          <p:cNvSpPr/>
+          <p:nvPr/>
+        </p:nvSpPr>
+        <p:spPr>
+          <a:xfrm>
+            <a:off x="6903720" y="2450592"/>
+            <a:ext cx="4370832" cy="0"/>
           </a:xfrm>
           <a:prstGeom prst="line">
             <a:avLst/>
           </a:prstGeom>
           <a:noFill/>
-          <a:ln w="88900">
+          <a:ln w="76200">
             <a:solidFill>
               <a:srgbClr val="6B625A"/>
             </a:solidFill>
@@ -12266,61 +11981,208 @@
       </p:sp>
       <p:sp>
         <p:nvSpPr>
-          <p:cNvPr id="38" name="BBB label"/>
-          <p:cNvSpPr/>
-          <p:nvPr/>
-        </p:nvSpPr>
-        <p:spPr>
-          <a:xfrm>
-            <a:off x="7350000" y="2930000"/>
-            <a:ext cx="3300000" cy="260000"/>
-          </a:xfrm>
-          <a:prstGeom prst="rect">
-            <a:avLst/>
-          </a:prstGeom>
-          <a:noFill/>
-          <a:ln/>
-        </p:spPr>
-        <p:txBody>
-          <a:bodyPr wrap="square" lIns="0" tIns="0" rIns="0" bIns="0" rtlCol="0" anchor="ctr"/>
-          <a:lstStyle/>
-          <a:p>
-            <a:pPr algn="ctr" indent="0" marL="0">
-              <a:buNone/>
-            </a:pPr>
-            <a:r>
-              <a:rPr lang="en-US" sz="1000" b="1" dirty="0">
-                <a:solidFill>
-                  <a:srgbClr val="6B625A"/>
-                </a:solidFill>
-                <a:latin typeface="Calibri" pitchFamily="34" charset="0"/>
-                <a:ea typeface="Calibri" pitchFamily="34" charset="-122"/>
-                <a:cs typeface="Calibri" pitchFamily="34" charset="-120"/>
-              </a:rPr>
-              <a:t>blood-brain barrier: mostly sealed</a:t>
-            </a:r>
-            <a:endParaRPr lang="en-US" sz="1000" dirty="0"/>
-          </a:p>
-        </p:txBody>
-      </p:sp>
-      <p:sp>
-        <p:nvSpPr>
-          <p:cNvPr id="39" name="CVO window left"/>
-          <p:cNvSpPr/>
-          <p:nvPr/>
-        </p:nvSpPr>
-        <p:spPr>
-          <a:xfrm>
-            <a:off x="8660000" y="3160000"/>
-            <a:ext cx="340000" cy="300000"/>
+          <p:cNvPr id="8" name="Shape 6"/>
+          <p:cNvSpPr/>
+          <p:nvPr/>
+        </p:nvSpPr>
+        <p:spPr>
+          <a:xfrm>
+            <a:off x="7086600" y="2322576"/>
+            <a:ext cx="0" cy="256032"/>
+          </a:xfrm>
+          <a:prstGeom prst="line">
+            <a:avLst/>
+          </a:prstGeom>
+          <a:noFill/>
+          <a:ln w="12700">
+            <a:solidFill>
+              <a:srgbClr val="FFFFFF"/>
+            </a:solidFill>
+            <a:prstDash val="solid"/>
+          </a:ln>
+        </p:spPr>
+      </p:sp>
+      <p:sp>
+        <p:nvSpPr>
+          <p:cNvPr id="9" name="Shape 7"/>
+          <p:cNvSpPr/>
+          <p:nvPr/>
+        </p:nvSpPr>
+        <p:spPr>
+          <a:xfrm>
+            <a:off x="7479792" y="2322576"/>
+            <a:ext cx="0" cy="256032"/>
+          </a:xfrm>
+          <a:prstGeom prst="line">
+            <a:avLst/>
+          </a:prstGeom>
+          <a:noFill/>
+          <a:ln w="12700">
+            <a:solidFill>
+              <a:srgbClr val="FFFFFF"/>
+            </a:solidFill>
+            <a:prstDash val="solid"/>
+          </a:ln>
+        </p:spPr>
+      </p:sp>
+      <p:sp>
+        <p:nvSpPr>
+          <p:cNvPr id="10" name="Shape 8"/>
+          <p:cNvSpPr/>
+          <p:nvPr/>
+        </p:nvSpPr>
+        <p:spPr>
+          <a:xfrm>
+            <a:off x="7872984" y="2322576"/>
+            <a:ext cx="0" cy="256032"/>
+          </a:xfrm>
+          <a:prstGeom prst="line">
+            <a:avLst/>
+          </a:prstGeom>
+          <a:noFill/>
+          <a:ln w="12700">
+            <a:solidFill>
+              <a:srgbClr val="FFFFFF"/>
+            </a:solidFill>
+            <a:prstDash val="solid"/>
+          </a:ln>
+        </p:spPr>
+      </p:sp>
+      <p:sp>
+        <p:nvSpPr>
+          <p:cNvPr id="11" name="Shape 9"/>
+          <p:cNvSpPr/>
+          <p:nvPr/>
+        </p:nvSpPr>
+        <p:spPr>
+          <a:xfrm>
+            <a:off x="8266176" y="2322576"/>
+            <a:ext cx="0" cy="256032"/>
+          </a:xfrm>
+          <a:prstGeom prst="line">
+            <a:avLst/>
+          </a:prstGeom>
+          <a:noFill/>
+          <a:ln w="12700">
+            <a:solidFill>
+              <a:srgbClr val="FFFFFF"/>
+            </a:solidFill>
+            <a:prstDash val="solid"/>
+          </a:ln>
+        </p:spPr>
+      </p:sp>
+      <p:sp>
+        <p:nvSpPr>
+          <p:cNvPr id="12" name="Shape 10"/>
+          <p:cNvSpPr/>
+          <p:nvPr/>
+        </p:nvSpPr>
+        <p:spPr>
+          <a:xfrm>
+            <a:off x="8659368" y="2322576"/>
+            <a:ext cx="0" cy="256032"/>
+          </a:xfrm>
+          <a:prstGeom prst="line">
+            <a:avLst/>
+          </a:prstGeom>
+          <a:noFill/>
+          <a:ln w="12700">
+            <a:solidFill>
+              <a:srgbClr val="FFFFFF"/>
+            </a:solidFill>
+            <a:prstDash val="solid"/>
+          </a:ln>
+        </p:spPr>
+      </p:sp>
+      <p:sp>
+        <p:nvSpPr>
+          <p:cNvPr id="13" name="Shape 11"/>
+          <p:cNvSpPr/>
+          <p:nvPr/>
+        </p:nvSpPr>
+        <p:spPr>
+          <a:xfrm>
+            <a:off x="9966960" y="2322576"/>
+            <a:ext cx="0" cy="256032"/>
+          </a:xfrm>
+          <a:prstGeom prst="line">
+            <a:avLst/>
+          </a:prstGeom>
+          <a:noFill/>
+          <a:ln w="12700">
+            <a:solidFill>
+              <a:srgbClr val="FFFFFF"/>
+            </a:solidFill>
+            <a:prstDash val="solid"/>
+          </a:ln>
+        </p:spPr>
+      </p:sp>
+      <p:sp>
+        <p:nvSpPr>
+          <p:cNvPr id="14" name="Shape 12"/>
+          <p:cNvSpPr/>
+          <p:nvPr/>
+        </p:nvSpPr>
+        <p:spPr>
+          <a:xfrm>
+            <a:off x="10360152" y="2322576"/>
+            <a:ext cx="0" cy="256032"/>
+          </a:xfrm>
+          <a:prstGeom prst="line">
+            <a:avLst/>
+          </a:prstGeom>
+          <a:noFill/>
+          <a:ln w="12700">
+            <a:solidFill>
+              <a:srgbClr val="FFFFFF"/>
+            </a:solidFill>
+            <a:prstDash val="solid"/>
+          </a:ln>
+        </p:spPr>
+      </p:sp>
+      <p:sp>
+        <p:nvSpPr>
+          <p:cNvPr id="15" name="Shape 13"/>
+          <p:cNvSpPr/>
+          <p:nvPr/>
+        </p:nvSpPr>
+        <p:spPr>
+          <a:xfrm>
+            <a:off x="10753344" y="2322576"/>
+            <a:ext cx="0" cy="256032"/>
+          </a:xfrm>
+          <a:prstGeom prst="line">
+            <a:avLst/>
+          </a:prstGeom>
+          <a:noFill/>
+          <a:ln w="12700">
+            <a:solidFill>
+              <a:srgbClr val="FFFFFF"/>
+            </a:solidFill>
+            <a:prstDash val="solid"/>
+          </a:ln>
+        </p:spPr>
+      </p:sp>
+      <p:sp>
+        <p:nvSpPr>
+          <p:cNvPr id="16" name="Shape 14"/>
+          <p:cNvSpPr/>
+          <p:nvPr/>
+        </p:nvSpPr>
+        <p:spPr>
+          <a:xfrm>
+            <a:off x="8942832" y="2286000"/>
+            <a:ext cx="256032" cy="347472"/>
           </a:xfrm>
           <a:prstGeom prst="roundRect">
-            <a:avLst/>
+            <a:avLst>
+              <a:gd name="adj" fmla="val 14286"/>
+            </a:avLst>
           </a:prstGeom>
           <a:solidFill>
             <a:srgbClr val="D9A441"/>
           </a:solidFill>
-          <a:ln w="19050">
+          <a:ln w="12700">
             <a:solidFill>
               <a:srgbClr val="A8431F"/>
             </a:solidFill>
@@ -12330,22 +12192,24 @@
       </p:sp>
       <p:sp>
         <p:nvSpPr>
-          <p:cNvPr id="40" name="CVO window right"/>
-          <p:cNvSpPr/>
-          <p:nvPr/>
-        </p:nvSpPr>
-        <p:spPr>
-          <a:xfrm>
-            <a:off x="9240000" y="3160000"/>
-            <a:ext cx="340000" cy="300000"/>
+          <p:cNvPr id="17" name="Shape 15"/>
+          <p:cNvSpPr/>
+          <p:nvPr/>
+        </p:nvSpPr>
+        <p:spPr>
+          <a:xfrm>
+            <a:off x="9308592" y="2286000"/>
+            <a:ext cx="256032" cy="347472"/>
           </a:xfrm>
           <a:prstGeom prst="roundRect">
-            <a:avLst/>
+            <a:avLst>
+              <a:gd name="adj" fmla="val 14286"/>
+            </a:avLst>
           </a:prstGeom>
           <a:solidFill>
             <a:srgbClr val="D9A441"/>
           </a:solidFill>
-          <a:ln w="19050">
+          <a:ln w="12700">
             <a:solidFill>
               <a:srgbClr val="A8431F"/>
             </a:solidFill>
@@ -12355,14 +12219,14 @@
       </p:sp>
       <p:sp>
         <p:nvSpPr>
-          <p:cNvPr id="41" name="CVO label"/>
-          <p:cNvSpPr/>
-          <p:nvPr/>
-        </p:nvSpPr>
-        <p:spPr>
-          <a:xfrm>
-            <a:off x="8270000" y="3620000"/>
-            <a:ext cx="1700000" cy="260000"/>
+          <p:cNvPr id="18" name="Text 16"/>
+          <p:cNvSpPr/>
+          <p:nvPr/>
+        </p:nvSpPr>
+        <p:spPr>
+          <a:xfrm>
+            <a:off x="8458200" y="2770632"/>
+            <a:ext cx="1554480" cy="219456"/>
           </a:xfrm>
           <a:prstGeom prst="rect">
             <a:avLst/>
@@ -12378,7 +12242,7 @@
               <a:buNone/>
             </a:pPr>
             <a:r>
-              <a:rPr lang="en-US" sz="1000" b="1" dirty="0">
+              <a:rPr lang="en-US" sz="1080" b="1" dirty="0">
                 <a:solidFill>
                   <a:srgbClr val="A8431F"/>
                 </a:solidFill>
@@ -12388,76 +12252,178 @@
               </a:rPr>
               <a:t>leaky CVO windows</a:t>
             </a:r>
-            <a:endParaRPr lang="en-US" sz="1000" dirty="0"/>
-          </a:p>
-        </p:txBody>
-      </p:sp>
-      <p:sp>
-        <p:nvSpPr>
-          <p:cNvPr id="42" name="Drug to left window"/>
-          <p:cNvSpPr/>
-          <p:nvPr/>
-        </p:nvSpPr>
-        <p:spPr>
-          <a:xfrm>
-            <a:off x="7850000" y="4510000"/>
-            <a:ext cx="960000" cy="-980000"/>
+            <a:endParaRPr lang="en-US" sz="1080" dirty="0"/>
+          </a:p>
+        </p:txBody>
+      </p:sp>
+      <p:sp>
+        <p:nvSpPr>
+          <p:cNvPr id="19" name="Shape 17"/>
+          <p:cNvSpPr/>
+          <p:nvPr/>
+        </p:nvSpPr>
+        <p:spPr>
+          <a:xfrm>
+            <a:off x="7635240" y="4343400"/>
+            <a:ext cx="1417320" cy="-1645920"/>
           </a:xfrm>
           <a:prstGeom prst="line">
             <a:avLst/>
           </a:prstGeom>
           <a:noFill/>
-          <a:ln w="25400">
+          <a:ln w="31750">
             <a:solidFill>
               <a:srgbClr val="D2603A"/>
             </a:solidFill>
             <a:prstDash val="solid"/>
-            <a:headEnd type="triangle"/>
+            <a:tailEnd type="triangle"/>
           </a:ln>
         </p:spPr>
       </p:sp>
       <p:sp>
         <p:nvSpPr>
-          <p:cNvPr id="43" name="Drug to right window"/>
-          <p:cNvSpPr/>
-          <p:nvPr/>
-        </p:nvSpPr>
-        <p:spPr>
-          <a:xfrm>
-            <a:off x="10200000" y="4460000"/>
-            <a:ext cx="-760000" cy="-890000"/>
+          <p:cNvPr id="20" name="Shape 18"/>
+          <p:cNvSpPr/>
+          <p:nvPr/>
+        </p:nvSpPr>
+        <p:spPr>
+          <a:xfrm>
+            <a:off x="10287000" y="4343400"/>
+            <a:ext cx="-914400" cy="-1645920"/>
           </a:xfrm>
           <a:prstGeom prst="line">
             <a:avLst/>
           </a:prstGeom>
           <a:noFill/>
-          <a:ln w="25400">
+          <a:ln w="31750">
             <a:solidFill>
               <a:srgbClr val="D2603A"/>
             </a:solidFill>
             <a:prstDash val="solid"/>
-            <a:headEnd type="triangle"/>
+            <a:tailEnd type="triangle"/>
           </a:ln>
         </p:spPr>
       </p:sp>
       <p:sp>
         <p:nvSpPr>
-          <p:cNvPr id="44" name="Brain"/>
-          <p:cNvSpPr/>
-          <p:nvPr/>
-        </p:nvSpPr>
-        <p:spPr>
-          <a:xfrm>
-            <a:off x="8280000" y="2050000"/>
-            <a:ext cx="1150000" cy="820000"/>
-          </a:xfrm>
-          <a:prstGeom prst="cloud">
+          <p:cNvPr id="21" name="Shape 19"/>
+          <p:cNvSpPr/>
+          <p:nvPr/>
+        </p:nvSpPr>
+        <p:spPr>
+          <a:xfrm>
+            <a:off x="7479792" y="4370832"/>
+            <a:ext cx="146304" cy="146304"/>
+          </a:xfrm>
+          <a:prstGeom prst="ellipse">
             <a:avLst/>
           </a:prstGeom>
           <a:solidFill>
-            <a:srgbClr val="F7E3DA"/>
+            <a:srgbClr val="D2603A"/>
           </a:solidFill>
-          <a:ln w="19050">
+          <a:ln w="12700">
+            <a:solidFill>
+              <a:srgbClr val="D2603A"/>
+            </a:solidFill>
+            <a:prstDash val="solid"/>
+          </a:ln>
+        </p:spPr>
+      </p:sp>
+      <p:sp>
+        <p:nvSpPr>
+          <p:cNvPr id="22" name="Shape 20"/>
+          <p:cNvSpPr/>
+          <p:nvPr/>
+        </p:nvSpPr>
+        <p:spPr>
+          <a:xfrm>
+            <a:off x="7818120" y="4526280"/>
+            <a:ext cx="146304" cy="146304"/>
+          </a:xfrm>
+          <a:prstGeom prst="ellipse">
+            <a:avLst/>
+          </a:prstGeom>
+          <a:solidFill>
+            <a:srgbClr val="D2603A"/>
+          </a:solidFill>
+          <a:ln w="12700">
+            <a:solidFill>
+              <a:srgbClr val="D2603A"/>
+            </a:solidFill>
+            <a:prstDash val="solid"/>
+          </a:ln>
+        </p:spPr>
+      </p:sp>
+      <p:sp>
+        <p:nvSpPr>
+          <p:cNvPr id="23" name="Shape 21"/>
+          <p:cNvSpPr/>
+          <p:nvPr/>
+        </p:nvSpPr>
+        <p:spPr>
+          <a:xfrm>
+            <a:off x="10012680" y="4498848"/>
+            <a:ext cx="146304" cy="146304"/>
+          </a:xfrm>
+          <a:prstGeom prst="ellipse">
+            <a:avLst/>
+          </a:prstGeom>
+          <a:solidFill>
+            <a:srgbClr val="D2603A"/>
+          </a:solidFill>
+          <a:ln w="12700">
+            <a:solidFill>
+              <a:srgbClr val="D2603A"/>
+            </a:solidFill>
+            <a:prstDash val="solid"/>
+          </a:ln>
+        </p:spPr>
+      </p:sp>
+      <p:sp>
+        <p:nvSpPr>
+          <p:cNvPr id="24" name="Shape 22"/>
+          <p:cNvSpPr/>
+          <p:nvPr/>
+        </p:nvSpPr>
+        <p:spPr>
+          <a:xfrm>
+            <a:off x="10387584" y="4343400"/>
+            <a:ext cx="146304" cy="146304"/>
+          </a:xfrm>
+          <a:prstGeom prst="ellipse">
+            <a:avLst/>
+          </a:prstGeom>
+          <a:solidFill>
+            <a:srgbClr val="D2603A"/>
+          </a:solidFill>
+          <a:ln w="12700">
+            <a:solidFill>
+              <a:srgbClr val="D2603A"/>
+            </a:solidFill>
+            <a:prstDash val="solid"/>
+          </a:ln>
+        </p:spPr>
+      </p:sp>
+      <p:sp>
+        <p:nvSpPr>
+          <p:cNvPr id="25" name="Shape 23"/>
+          <p:cNvSpPr/>
+          <p:nvPr/>
+        </p:nvSpPr>
+        <p:spPr>
+          <a:xfrm>
+            <a:off x="8302752" y="3182112"/>
+            <a:ext cx="731520" cy="621792"/>
+          </a:xfrm>
+          <a:prstGeom prst="ellipse">
+            <a:avLst/>
+          </a:prstGeom>
+          <a:solidFill>
+            <a:srgbClr val="F7E3DA">
+              <a:alpha val="96000"/>
+            </a:srgbClr>
+          </a:solidFill>
+          <a:ln w="15240">
             <a:solidFill>
               <a:srgbClr val="A8431F"/>
             </a:solidFill>
@@ -12467,14 +12433,122 @@
       </p:sp>
       <p:sp>
         <p:nvSpPr>
-          <p:cNvPr id="45" name="Brain label"/>
-          <p:cNvSpPr/>
-          <p:nvPr/>
-        </p:nvSpPr>
-        <p:spPr>
-          <a:xfrm>
-            <a:off x="8280000" y="2320000"/>
-            <a:ext cx="1150000" cy="230000"/>
+          <p:cNvPr id="26" name="Shape 24"/>
+          <p:cNvSpPr/>
+          <p:nvPr/>
+        </p:nvSpPr>
+        <p:spPr>
+          <a:xfrm>
+            <a:off x="8686800" y="3035808"/>
+            <a:ext cx="822960" cy="713232"/>
+          </a:xfrm>
+          <a:prstGeom prst="ellipse">
+            <a:avLst/>
+          </a:prstGeom>
+          <a:solidFill>
+            <a:srgbClr val="F7E3DA">
+              <a:alpha val="96000"/>
+            </a:srgbClr>
+          </a:solidFill>
+          <a:ln w="15240">
+            <a:solidFill>
+              <a:srgbClr val="A8431F"/>
+            </a:solidFill>
+            <a:prstDash val="solid"/>
+          </a:ln>
+        </p:spPr>
+      </p:sp>
+      <p:sp>
+        <p:nvSpPr>
+          <p:cNvPr id="27" name="Shape 25"/>
+          <p:cNvSpPr/>
+          <p:nvPr/>
+        </p:nvSpPr>
+        <p:spPr>
+          <a:xfrm>
+            <a:off x="9162288" y="3236976"/>
+            <a:ext cx="749808" cy="621792"/>
+          </a:xfrm>
+          <a:prstGeom prst="ellipse">
+            <a:avLst/>
+          </a:prstGeom>
+          <a:solidFill>
+            <a:srgbClr val="F7E3DA">
+              <a:alpha val="96000"/>
+            </a:srgbClr>
+          </a:solidFill>
+          <a:ln w="15240">
+            <a:solidFill>
+              <a:srgbClr val="A8431F"/>
+            </a:solidFill>
+            <a:prstDash val="solid"/>
+          </a:ln>
+        </p:spPr>
+      </p:sp>
+      <p:sp>
+        <p:nvSpPr>
+          <p:cNvPr id="28" name="Shape 26"/>
+          <p:cNvSpPr/>
+          <p:nvPr/>
+        </p:nvSpPr>
+        <p:spPr>
+          <a:xfrm>
+            <a:off x="8503920" y="3611880"/>
+            <a:ext cx="822960" cy="658368"/>
+          </a:xfrm>
+          <a:prstGeom prst="ellipse">
+            <a:avLst/>
+          </a:prstGeom>
+          <a:solidFill>
+            <a:srgbClr val="F7E3DA">
+              <a:alpha val="96000"/>
+            </a:srgbClr>
+          </a:solidFill>
+          <a:ln w="15240">
+            <a:solidFill>
+              <a:srgbClr val="A8431F"/>
+            </a:solidFill>
+            <a:prstDash val="solid"/>
+          </a:ln>
+        </p:spPr>
+      </p:sp>
+      <p:sp>
+        <p:nvSpPr>
+          <p:cNvPr id="29" name="Shape 27"/>
+          <p:cNvSpPr/>
+          <p:nvPr/>
+        </p:nvSpPr>
+        <p:spPr>
+          <a:xfrm>
+            <a:off x="8979408" y="3593592"/>
+            <a:ext cx="841248" cy="658368"/>
+          </a:xfrm>
+          <a:prstGeom prst="ellipse">
+            <a:avLst/>
+          </a:prstGeom>
+          <a:solidFill>
+            <a:srgbClr val="F7E3DA">
+              <a:alpha val="96000"/>
+            </a:srgbClr>
+          </a:solidFill>
+          <a:ln w="15240">
+            <a:solidFill>
+              <a:srgbClr val="A8431F"/>
+            </a:solidFill>
+            <a:prstDash val="solid"/>
+          </a:ln>
+        </p:spPr>
+      </p:sp>
+      <p:sp>
+        <p:nvSpPr>
+          <p:cNvPr id="30" name="Text 28"/>
+          <p:cNvSpPr/>
+          <p:nvPr/>
+        </p:nvSpPr>
+        <p:spPr>
+          <a:xfrm>
+            <a:off x="8668512" y="3520440"/>
+            <a:ext cx="877824" cy="274320"/>
           </a:xfrm>
           <a:prstGeom prst="rect">
             <a:avLst/>
@@ -12490,7 +12564,7 @@
               <a:buNone/>
             </a:pPr>
             <a:r>
-              <a:rPr lang="en-US" sz="1050" b="1" dirty="0">
+              <a:rPr lang="en-US" sz="1200" b="1" dirty="0">
                 <a:solidFill>
                   <a:srgbClr val="A8431F"/>
                 </a:solidFill>
@@ -12500,20 +12574,47 @@
               </a:rPr>
               <a:t>BRAIN</a:t>
             </a:r>
-            <a:endParaRPr lang="en-US" sz="1050" dirty="0"/>
-          </a:p>
-        </p:txBody>
-      </p:sp>
-      <p:sp>
-        <p:nvSpPr>
-          <p:cNvPr id="46" name="Targets"/>
-          <p:cNvSpPr/>
-          <p:nvPr/>
-        </p:nvSpPr>
-        <p:spPr>
-          <a:xfrm>
-            <a:off x="9800000" y="2150000"/>
-            <a:ext cx="1200000" cy="580000"/>
+            <a:endParaRPr lang="en-US" sz="1200" dirty="0"/>
+          </a:p>
+        </p:txBody>
+      </p:sp>
+      <p:sp>
+        <p:nvSpPr>
+          <p:cNvPr id="31" name="Shape 29"/>
+          <p:cNvSpPr/>
+          <p:nvPr/>
+        </p:nvSpPr>
+        <p:spPr>
+          <a:xfrm>
+            <a:off x="9985248" y="2971800"/>
+            <a:ext cx="1143000" cy="914400"/>
+          </a:xfrm>
+          <a:prstGeom prst="roundRect">
+            <a:avLst>
+              <a:gd name="adj" fmla="val 8000"/>
+            </a:avLst>
+          </a:prstGeom>
+          <a:solidFill>
+            <a:srgbClr val="FFFFFF"/>
+          </a:solidFill>
+          <a:ln w="12700">
+            <a:solidFill>
+              <a:srgbClr val="E7DDD1"/>
+            </a:solidFill>
+            <a:prstDash val="solid"/>
+          </a:ln>
+        </p:spPr>
+      </p:sp>
+      <p:sp>
+        <p:nvSpPr>
+          <p:cNvPr id="32" name="Text 30"/>
+          <p:cNvSpPr/>
+          <p:nvPr/>
+        </p:nvSpPr>
+        <p:spPr>
+          <a:xfrm>
+            <a:off x="10104120" y="3099816"/>
+            <a:ext cx="914400" cy="658368"/>
           </a:xfrm>
           <a:prstGeom prst="rect">
             <a:avLst/>
@@ -12525,11 +12626,11 @@
           <a:bodyPr wrap="square" lIns="0" tIns="0" rIns="0" bIns="0" rtlCol="0" anchor="ctr"/>
           <a:lstStyle/>
           <a:p>
-            <a:pPr algn="l" indent="0" marL="0">
-              <a:buNone/>
-            </a:pPr>
-            <a:r>
-              <a:rPr lang="en-US" sz="900" b="1" dirty="0">
+            <a:pPr algn="ctr" indent="0" marL="0">
+              <a:buNone/>
+            </a:pPr>
+            <a:r>
+              <a:rPr lang="en-US" sz="1020" b="1" dirty="0">
                 <a:solidFill>
                   <a:srgbClr val="1F5651"/>
                 </a:solidFill>
@@ -12539,14 +12640,14 @@
               </a:rPr>
               <a:t>appetite</a:t>
             </a:r>
-            <a:endParaRPr lang="en-US" sz="900" dirty="0"/>
-          </a:p>
-          <a:p>
-            <a:pPr algn="l" indent="0" marL="0">
-              <a:buNone/>
-            </a:pPr>
-            <a:r>
-              <a:rPr lang="en-US" sz="900" b="1" dirty="0">
+            <a:endParaRPr lang="en-US" sz="1020" dirty="0"/>
+          </a:p>
+          <a:p>
+            <a:pPr algn="ctr" indent="0" marL="0">
+              <a:buNone/>
+            </a:pPr>
+            <a:r>
+              <a:rPr lang="en-US" sz="1020" b="1" dirty="0">
                 <a:solidFill>
                   <a:srgbClr val="1F5651"/>
                 </a:solidFill>
@@ -12556,14 +12657,14 @@
               </a:rPr>
               <a:t>reward</a:t>
             </a:r>
-            <a:endParaRPr lang="en-US" sz="900" dirty="0"/>
-          </a:p>
-          <a:p>
-            <a:pPr algn="l" indent="0" marL="0">
-              <a:buNone/>
-            </a:pPr>
-            <a:r>
-              <a:rPr lang="en-US" sz="900" b="1" dirty="0">
+            <a:endParaRPr lang="en-US" sz="1020" dirty="0"/>
+          </a:p>
+          <a:p>
+            <a:pPr algn="ctr" indent="0" marL="0">
+              <a:buNone/>
+            </a:pPr>
+            <a:r>
+              <a:rPr lang="en-US" sz="1020" b="1" dirty="0">
                 <a:solidFill>
                   <a:srgbClr val="1F5651"/>
                 </a:solidFill>
@@ -12573,7 +12674,72 @@
               </a:rPr>
               <a:t>emotion</a:t>
             </a:r>
-            <a:endParaRPr lang="en-US" sz="900" dirty="0"/>
+            <a:endParaRPr lang="en-US" sz="1020" dirty="0"/>
+          </a:p>
+        </p:txBody>
+      </p:sp>
+      <p:sp>
+        <p:nvSpPr>
+          <p:cNvPr id="33" name="Shape 31"/>
+          <p:cNvSpPr/>
+          <p:nvPr/>
+        </p:nvSpPr>
+        <p:spPr>
+          <a:xfrm>
+            <a:off x="9710928" y="3547872"/>
+            <a:ext cx="274320" cy="-45720"/>
+          </a:xfrm>
+          <a:prstGeom prst="line">
+            <a:avLst/>
+          </a:prstGeom>
+          <a:noFill/>
+          <a:ln w="15240">
+            <a:solidFill>
+              <a:srgbClr val="1F5651">
+                <a:alpha val="70000"/>
+              </a:srgbClr>
+            </a:solidFill>
+            <a:prstDash val="solid"/>
+            <a:tailEnd type="triangle"/>
+          </a:ln>
+        </p:spPr>
+      </p:sp>
+      <p:sp>
+        <p:nvSpPr>
+          <p:cNvPr id="34" name="Text 32"/>
+          <p:cNvSpPr/>
+          <p:nvPr/>
+        </p:nvSpPr>
+        <p:spPr>
+          <a:xfrm>
+            <a:off x="6858000" y="5102352"/>
+            <a:ext cx="4434840" cy="292608"/>
+          </a:xfrm>
+          <a:prstGeom prst="rect">
+            <a:avLst/>
+          </a:prstGeom>
+          <a:noFill/>
+          <a:ln/>
+        </p:spPr>
+        <p:txBody>
+          <a:bodyPr wrap="square" lIns="0" tIns="0" rIns="0" bIns="0" rtlCol="0" anchor="ctr"/>
+          <a:lstStyle/>
+          <a:p>
+            <a:pPr algn="ctr" indent="0" marL="0">
+              <a:buNone/>
+            </a:pPr>
+            <a:r>
+              <a:rPr lang="en-US" sz="1230" i="1" dirty="0">
+                <a:solidFill>
+                  <a:srgbClr val="A8431F"/>
+                </a:solidFill>
+                <a:latin typeface="Calibri" pitchFamily="34" charset="0"/>
+                <a:ea typeface="Calibri" pitchFamily="34" charset="-122"/>
+                <a:cs typeface="Calibri" pitchFamily="34" charset="-120"/>
+              </a:rPr>
+              <a:t>drug enters here</a:t>
+            </a:r>
+            <a:endParaRPr lang="en-US" sz="1230" dirty="0"/>
           </a:p>
         </p:txBody>
       </p:sp>
@@ -12731,56 +12897,19 @@
       </p:sp>
       <p:sp>
         <p:nvSpPr>
-          <p:cNvPr id="24" name="Text 22"/>
-          <p:cNvSpPr/>
-          <p:nvPr/>
-        </p:nvSpPr>
-        <p:spPr>
-          <a:xfrm>
-            <a:off x="548640" y="4937760"/>
-            <a:ext cx="10972800" cy="457200"/>
-          </a:xfrm>
-          <a:prstGeom prst="rect">
-            <a:avLst/>
-          </a:prstGeom>
-          <a:noFill/>
-          <a:ln/>
-        </p:spPr>
-        <p:txBody>
-          <a:bodyPr wrap="square" lIns="0" tIns="0" rIns="0" bIns="0" rtlCol="0" anchor="ctr"/>
-          <a:lstStyle/>
-          <a:p>
-            <a:pPr algn="ctr" indent="0" marL="0">
-              <a:buNone/>
-            </a:pPr>
-            <a:r>
-              <a:rPr lang="en-US" sz="1400" i="1" dirty="0">
-                <a:solidFill>
-                  <a:srgbClr val="6B625A"/>
-                </a:solidFill>
-                <a:latin typeface="Calibri" pitchFamily="34" charset="0"/>
-                <a:ea typeface="Calibri" pitchFamily="34" charset="-122"/>
-                <a:cs typeface="Calibri" pitchFamily="34" charset="-120"/>
-              </a:rPr>
-              <a:t>Caveat (Zhu 2025): in mice, dopamine activity &amp; appetite recovered during repeated dosing — possible tolerance.</a:t>
-            </a:r>
-            <a:endParaRPr lang="en-US" sz="1400" dirty="0"/>
-          </a:p>
-        </p:txBody>
-      </p:sp>
-      <p:sp>
-        <p:nvSpPr>
-          <p:cNvPr id="30" name="Diagram panel"/>
-          <p:cNvSpPr/>
-          <p:nvPr/>
-        </p:nvSpPr>
-        <p:spPr>
-          <a:xfrm>
-            <a:off x="548640" y="2750000"/>
-            <a:ext cx="10972800" cy="1880000"/>
+          <p:cNvPr id="5" name="Shape 3"/>
+          <p:cNvSpPr/>
+          <p:nvPr/>
+        </p:nvSpPr>
+        <p:spPr>
+          <a:xfrm>
+            <a:off x="777240" y="2743200"/>
+            <a:ext cx="10607040" cy="1691640"/>
           </a:xfrm>
           <a:prstGeom prst="roundRect">
-            <a:avLst/>
+            <a:avLst>
+              <a:gd name="adj" fmla="val 6486"/>
+            </a:avLst>
           </a:prstGeom>
           <a:solidFill>
             <a:srgbClr val="FBF7F2"/>
@@ -12795,24 +12924,24 @@
       </p:sp>
       <p:sp>
         <p:nvSpPr>
-          <p:cNvPr id="31" name="VTA hub"/>
-          <p:cNvSpPr/>
-          <p:nvPr/>
-        </p:nvSpPr>
-        <p:spPr>
-          <a:xfrm>
-            <a:off x="2970000" y="2920000"/>
-            <a:ext cx="4300000" cy="1180000"/>
+          <p:cNvPr id="6" name="Shape 4"/>
+          <p:cNvSpPr/>
+          <p:nvPr/>
+        </p:nvSpPr>
+        <p:spPr>
+          <a:xfrm>
+            <a:off x="1344168" y="2907792"/>
+            <a:ext cx="1143000" cy="1143000"/>
           </a:xfrm>
           <a:prstGeom prst="ellipse">
             <a:avLst/>
           </a:prstGeom>
           <a:solidFill>
-            <a:srgbClr val="E3EFEE"/>
+            <a:srgbClr val="D2603A"/>
           </a:solidFill>
-          <a:ln w="12700">
+          <a:ln w="15240">
             <a:solidFill>
-              <a:srgbClr val="1F5651"/>
+              <a:srgbClr val="D2603A"/>
             </a:solidFill>
             <a:prstDash val="solid"/>
           </a:ln>
@@ -12820,14 +12949,14 @@
       </p:sp>
       <p:sp>
         <p:nvSpPr>
-          <p:cNvPr id="32" name="VTA label"/>
-          <p:cNvSpPr/>
-          <p:nvPr/>
-        </p:nvSpPr>
-        <p:spPr>
-          <a:xfrm>
-            <a:off x="4410000" y="3000000"/>
-            <a:ext cx="1500000" cy="240000"/>
+          <p:cNvPr id="7" name="Text 5"/>
+          <p:cNvSpPr/>
+          <p:nvPr/>
+        </p:nvSpPr>
+        <p:spPr>
+          <a:xfrm>
+            <a:off x="1124712" y="3154680"/>
+            <a:ext cx="1600200" cy="256032"/>
           </a:xfrm>
           <a:prstGeom prst="rect">
             <a:avLst/>
@@ -12843,40 +12972,103 @@
               <a:buNone/>
             </a:pPr>
             <a:r>
-              <a:rPr lang="en-US" sz="1050" b="1" dirty="0">
-                <a:solidFill>
-                  <a:srgbClr val="1F5651"/>
+              <a:rPr lang="en-US" sz="1280" b="1" dirty="0">
+                <a:solidFill>
+                  <a:srgbClr val="FFFFFF"/>
                 </a:solidFill>
                 <a:latin typeface="Calibri" pitchFamily="34" charset="0"/>
                 <a:ea typeface="Calibri" pitchFamily="34" charset="-122"/>
                 <a:cs typeface="Calibri" pitchFamily="34" charset="-120"/>
               </a:rPr>
-              <a:t>VTA reward hub</a:t>
-            </a:r>
-            <a:endParaRPr lang="en-US" sz="1050" dirty="0"/>
-          </a:p>
-        </p:txBody>
-      </p:sp>
-      <p:sp>
-        <p:nvSpPr>
-          <p:cNvPr id="33" name="Drug"/>
-          <p:cNvSpPr/>
-          <p:nvPr/>
-        </p:nvSpPr>
-        <p:spPr>
-          <a:xfrm>
-            <a:off x="980000" y="3350000"/>
-            <a:ext cx="650000" cy="650000"/>
+              <a:t>GLP-1 drug</a:t>
+            </a:r>
+            <a:endParaRPr lang="en-US" sz="1280" dirty="0"/>
+          </a:p>
+        </p:txBody>
+      </p:sp>
+      <p:sp>
+        <p:nvSpPr>
+          <p:cNvPr id="8" name="Text 6"/>
+          <p:cNvSpPr/>
+          <p:nvPr/>
+        </p:nvSpPr>
+        <p:spPr>
+          <a:xfrm>
+            <a:off x="960120" y="4041648"/>
+            <a:ext cx="1965960" cy="256032"/>
+          </a:xfrm>
+          <a:prstGeom prst="rect">
+            <a:avLst/>
+          </a:prstGeom>
+          <a:noFill/>
+          <a:ln/>
+        </p:spPr>
+        <p:txBody>
+          <a:bodyPr wrap="square" lIns="0" tIns="0" rIns="0" bIns="0" rtlCol="0" anchor="ctr"/>
+          <a:lstStyle/>
+          <a:p>
+            <a:pPr algn="ctr" indent="0" marL="0">
+              <a:buNone/>
+            </a:pPr>
+            <a:r>
+              <a:rPr lang="en-US" sz="1140" b="1" dirty="0">
+                <a:solidFill>
+                  <a:srgbClr val="D2603A"/>
+                </a:solidFill>
+                <a:latin typeface="Calibri" pitchFamily="34" charset="0"/>
+                <a:ea typeface="Calibri" pitchFamily="34" charset="-122"/>
+                <a:cs typeface="Calibri" pitchFamily="34" charset="-120"/>
+              </a:rPr>
+              <a:t>binds VTA receptor</a:t>
+            </a:r>
+            <a:endParaRPr lang="en-US" sz="1140" dirty="0"/>
+          </a:p>
+        </p:txBody>
+      </p:sp>
+      <p:sp>
+        <p:nvSpPr>
+          <p:cNvPr id="9" name="Shape 7"/>
+          <p:cNvSpPr/>
+          <p:nvPr/>
+        </p:nvSpPr>
+        <p:spPr>
+          <a:xfrm>
+            <a:off x="2880360" y="3474720"/>
+            <a:ext cx="658368" cy="0"/>
+          </a:xfrm>
+          <a:prstGeom prst="line">
+            <a:avLst/>
+          </a:prstGeom>
+          <a:noFill/>
+          <a:ln w="27940">
+            <a:solidFill>
+              <a:srgbClr val="6B625A"/>
+            </a:solidFill>
+            <a:prstDash val="solid"/>
+            <a:tailEnd type="triangle"/>
+          </a:ln>
+        </p:spPr>
+      </p:sp>
+      <p:sp>
+        <p:nvSpPr>
+          <p:cNvPr id="10" name="Shape 8"/>
+          <p:cNvSpPr/>
+          <p:nvPr/>
+        </p:nvSpPr>
+        <p:spPr>
+          <a:xfrm>
+            <a:off x="3950208" y="2907792"/>
+            <a:ext cx="1143000" cy="1143000"/>
           </a:xfrm>
           <a:prstGeom prst="ellipse">
             <a:avLst/>
           </a:prstGeom>
           <a:solidFill>
-            <a:srgbClr val="D2603A"/>
+            <a:srgbClr val="7A4B6B"/>
           </a:solidFill>
-          <a:ln w="19050">
+          <a:ln w="15240">
             <a:solidFill>
-              <a:srgbClr val="A8431F"/>
+              <a:srgbClr val="7A4B6B"/>
             </a:solidFill>
             <a:prstDash val="solid"/>
           </a:ln>
@@ -12884,14 +13076,14 @@
       </p:sp>
       <p:sp>
         <p:nvSpPr>
-          <p:cNvPr id="34" name="Drug label"/>
-          <p:cNvSpPr/>
-          <p:nvPr/>
-        </p:nvSpPr>
-        <p:spPr>
-          <a:xfrm>
-            <a:off x="980000" y="3460000"/>
-            <a:ext cx="650000" cy="360000"/>
+          <p:cNvPr id="11" name="Text 9"/>
+          <p:cNvSpPr/>
+          <p:nvPr/>
+        </p:nvSpPr>
+        <p:spPr>
+          <a:xfrm>
+            <a:off x="3730752" y="3154680"/>
+            <a:ext cx="1600200" cy="256032"/>
           </a:xfrm>
           <a:prstGeom prst="rect">
             <a:avLst/>
@@ -12907,81 +13099,103 @@
               <a:buNone/>
             </a:pPr>
             <a:r>
-              <a:rPr lang="en-US" sz="900" b="1" dirty="0">
-                <a:solidFill>
-                  <a:srgbClr val="FFFDFA"/>
+              <a:rPr lang="en-US" sz="1280" b="1" dirty="0">
+                <a:solidFill>
+                  <a:srgbClr val="FFFFFF"/>
                 </a:solidFill>
                 <a:latin typeface="Calibri" pitchFamily="34" charset="0"/>
                 <a:ea typeface="Calibri" pitchFamily="34" charset="-122"/>
                 <a:cs typeface="Calibri" pitchFamily="34" charset="-120"/>
               </a:rPr>
-              <a:t>GLP-1</a:t>
-            </a:r>
-            <a:endParaRPr lang="en-US" sz="900" dirty="0"/>
-          </a:p>
+              <a:t>GABA brakes ON</a:t>
+            </a:r>
+            <a:endParaRPr lang="en-US" sz="1280" dirty="0"/>
+          </a:p>
+        </p:txBody>
+      </p:sp>
+      <p:sp>
+        <p:nvSpPr>
+          <p:cNvPr id="12" name="Text 10"/>
+          <p:cNvSpPr/>
+          <p:nvPr/>
+        </p:nvSpPr>
+        <p:spPr>
+          <a:xfrm>
+            <a:off x="3566160" y="4041648"/>
+            <a:ext cx="1965960" cy="256032"/>
+          </a:xfrm>
+          <a:prstGeom prst="rect">
+            <a:avLst/>
+          </a:prstGeom>
+          <a:noFill/>
+          <a:ln/>
+        </p:spPr>
+        <p:txBody>
+          <a:bodyPr wrap="square" lIns="0" tIns="0" rIns="0" bIns="0" rtlCol="0" anchor="ctr"/>
+          <a:lstStyle/>
           <a:p>
             <a:pPr algn="ctr" indent="0" marL="0">
               <a:buNone/>
             </a:pPr>
             <a:r>
-              <a:rPr lang="en-US" sz="900" b="1" dirty="0">
-                <a:solidFill>
-                  <a:srgbClr val="FFFDFA"/>
+              <a:rPr lang="en-US" sz="1140" b="1" dirty="0">
+                <a:solidFill>
+                  <a:srgbClr val="7A4B6B"/>
                 </a:solidFill>
                 <a:latin typeface="Calibri" pitchFamily="34" charset="0"/>
                 <a:ea typeface="Calibri" pitchFamily="34" charset="-122"/>
                 <a:cs typeface="Calibri" pitchFamily="34" charset="-120"/>
               </a:rPr>
-              <a:t>drug</a:t>
-            </a:r>
-            <a:endParaRPr lang="en-US" sz="900" dirty="0"/>
-          </a:p>
-        </p:txBody>
-      </p:sp>
-      <p:sp>
-        <p:nvSpPr>
-          <p:cNvPr id="35" name="Drug to GABA"/>
-          <p:cNvSpPr/>
-          <p:nvPr/>
-        </p:nvSpPr>
-        <p:spPr>
-          <a:xfrm>
-            <a:off x="1630000" y="3670000"/>
-            <a:ext cx="1220000" cy="-240000"/>
+              <a:t>↑ inhibition</a:t>
+            </a:r>
+            <a:endParaRPr lang="en-US" sz="1140" dirty="0"/>
+          </a:p>
+        </p:txBody>
+      </p:sp>
+      <p:sp>
+        <p:nvSpPr>
+          <p:cNvPr id="13" name="Shape 11"/>
+          <p:cNvSpPr/>
+          <p:nvPr/>
+        </p:nvSpPr>
+        <p:spPr>
+          <a:xfrm>
+            <a:off x="5486400" y="3474720"/>
+            <a:ext cx="658368" cy="0"/>
           </a:xfrm>
           <a:prstGeom prst="line">
             <a:avLst/>
           </a:prstGeom>
           <a:noFill/>
-          <a:ln w="25400">
+          <a:ln w="27940">
             <a:solidFill>
-              <a:srgbClr val="D2603A"/>
+              <a:srgbClr val="6B625A"/>
             </a:solidFill>
-            <a:prstDash val="dash"/>
-            <a:headEnd type="triangle"/>
+            <a:prstDash val="solid"/>
+            <a:tailEnd type="triangle"/>
           </a:ln>
         </p:spPr>
       </p:sp>
       <p:sp>
         <p:nvSpPr>
-          <p:cNvPr id="36" name="GABA neuron"/>
-          <p:cNvSpPr/>
-          <p:nvPr/>
-        </p:nvSpPr>
-        <p:spPr>
-          <a:xfrm>
-            <a:off x="2860000" y="3290000"/>
-            <a:ext cx="660000" cy="660000"/>
+          <p:cNvPr id="14" name="Shape 12"/>
+          <p:cNvSpPr/>
+          <p:nvPr/>
+        </p:nvSpPr>
+        <p:spPr>
+          <a:xfrm>
+            <a:off x="6556248" y="2907792"/>
+            <a:ext cx="1143000" cy="1143000"/>
           </a:xfrm>
           <a:prstGeom prst="ellipse">
             <a:avLst/>
           </a:prstGeom>
           <a:solidFill>
-            <a:srgbClr val="7A4B6B"/>
+            <a:srgbClr val="2F7D77"/>
           </a:solidFill>
-          <a:ln w="12700">
+          <a:ln w="15240">
             <a:solidFill>
-              <a:srgbClr val="201B17"/>
+              <a:srgbClr val="2F7D77"/>
             </a:solidFill>
             <a:prstDash val="solid"/>
           </a:ln>
@@ -12989,14 +13203,14 @@
       </p:sp>
       <p:sp>
         <p:nvSpPr>
-          <p:cNvPr id="37" name="GABA label"/>
-          <p:cNvSpPr/>
-          <p:nvPr/>
-        </p:nvSpPr>
-        <p:spPr>
-          <a:xfrm>
-            <a:off x="2860000" y="3450000"/>
-            <a:ext cx="660000" cy="210000"/>
+          <p:cNvPr id="15" name="Text 13"/>
+          <p:cNvSpPr/>
+          <p:nvPr/>
+        </p:nvSpPr>
+        <p:spPr>
+          <a:xfrm>
+            <a:off x="6336792" y="3154680"/>
+            <a:ext cx="1600200" cy="256032"/>
           </a:xfrm>
           <a:prstGeom prst="rect">
             <a:avLst/>
@@ -13012,30 +13226,30 @@
               <a:buNone/>
             </a:pPr>
             <a:r>
-              <a:rPr lang="en-US" sz="950" b="1" dirty="0">
-                <a:solidFill>
-                  <a:srgbClr val="FFFDFA"/>
+              <a:rPr lang="en-US" sz="1280" b="1" dirty="0">
+                <a:solidFill>
+                  <a:srgbClr val="FFFFFF"/>
                 </a:solidFill>
                 <a:latin typeface="Calibri" pitchFamily="34" charset="0"/>
                 <a:ea typeface="Calibri" pitchFamily="34" charset="-122"/>
                 <a:cs typeface="Calibri" pitchFamily="34" charset="-120"/>
               </a:rPr>
-              <a:t>GABA</a:t>
-            </a:r>
-            <a:endParaRPr lang="en-US" sz="950" dirty="0"/>
-          </a:p>
-        </p:txBody>
-      </p:sp>
-      <p:sp>
-        <p:nvSpPr>
-          <p:cNvPr id="38" name="Brakes label"/>
-          <p:cNvSpPr/>
-          <p:nvPr/>
-        </p:nvSpPr>
-        <p:spPr>
-          <a:xfrm>
-            <a:off x="2700000" y="4000000"/>
-            <a:ext cx="1000000" cy="230000"/>
+              <a:t>Dopamine ↓</a:t>
+            </a:r>
+            <a:endParaRPr lang="en-US" sz="1280" dirty="0"/>
+          </a:p>
+        </p:txBody>
+      </p:sp>
+      <p:sp>
+        <p:nvSpPr>
+          <p:cNvPr id="16" name="Text 14"/>
+          <p:cNvSpPr/>
+          <p:nvPr/>
+        </p:nvSpPr>
+        <p:spPr>
+          <a:xfrm>
+            <a:off x="6172200" y="4041648"/>
+            <a:ext cx="1965960" cy="256032"/>
           </a:xfrm>
           <a:prstGeom prst="rect">
             <a:avLst/>
@@ -13051,40 +13265,64 @@
               <a:buNone/>
             </a:pPr>
             <a:r>
-              <a:rPr lang="en-US" sz="950" b="1" dirty="0">
-                <a:solidFill>
-                  <a:srgbClr val="7A4B6B"/>
+              <a:rPr lang="en-US" sz="1140" b="1" dirty="0">
+                <a:solidFill>
+                  <a:srgbClr val="2F7D77"/>
                 </a:solidFill>
                 <a:latin typeface="Calibri" pitchFamily="34" charset="0"/>
                 <a:ea typeface="Calibri" pitchFamily="34" charset="-122"/>
                 <a:cs typeface="Calibri" pitchFamily="34" charset="-120"/>
               </a:rPr>
-              <a:t>brakes ON</a:t>
-            </a:r>
-            <a:endParaRPr lang="en-US" sz="950" dirty="0"/>
-          </a:p>
-        </p:txBody>
-      </p:sp>
-      <p:sp>
-        <p:nvSpPr>
-          <p:cNvPr id="39" name="Dopamine neuron"/>
-          <p:cNvSpPr/>
-          <p:nvPr/>
-        </p:nvSpPr>
-        <p:spPr>
-          <a:xfrm>
-            <a:off x="5050000" y="3520000"/>
-            <a:ext cx="760000" cy="760000"/>
+              <a:t>in nucleus accumbens</a:t>
+            </a:r>
+            <a:endParaRPr lang="en-US" sz="1140" dirty="0"/>
+          </a:p>
+        </p:txBody>
+      </p:sp>
+      <p:sp>
+        <p:nvSpPr>
+          <p:cNvPr id="17" name="Shape 15"/>
+          <p:cNvSpPr/>
+          <p:nvPr/>
+        </p:nvSpPr>
+        <p:spPr>
+          <a:xfrm>
+            <a:off x="8092440" y="3474720"/>
+            <a:ext cx="658368" cy="0"/>
+          </a:xfrm>
+          <a:prstGeom prst="line">
+            <a:avLst/>
+          </a:prstGeom>
+          <a:noFill/>
+          <a:ln w="27940">
+            <a:solidFill>
+              <a:srgbClr val="6B625A"/>
+            </a:solidFill>
+            <a:prstDash val="solid"/>
+            <a:tailEnd type="triangle"/>
+          </a:ln>
+        </p:spPr>
+      </p:sp>
+      <p:sp>
+        <p:nvSpPr>
+          <p:cNvPr id="18" name="Shape 16"/>
+          <p:cNvSpPr/>
+          <p:nvPr/>
+        </p:nvSpPr>
+        <p:spPr>
+          <a:xfrm>
+            <a:off x="9162288" y="2907792"/>
+            <a:ext cx="1143000" cy="1143000"/>
           </a:xfrm>
           <a:prstGeom prst="ellipse">
             <a:avLst/>
           </a:prstGeom>
           <a:solidFill>
-            <a:srgbClr val="2F7D77"/>
+            <a:srgbClr val="5B8A4F"/>
           </a:solidFill>
-          <a:ln w="19050">
+          <a:ln w="15240">
             <a:solidFill>
-              <a:srgbClr val="1F5651"/>
+              <a:srgbClr val="5B8A4F"/>
             </a:solidFill>
             <a:prstDash val="solid"/>
           </a:ln>
@@ -13092,14 +13330,14 @@
       </p:sp>
       <p:sp>
         <p:nvSpPr>
-          <p:cNvPr id="40" name="Dopamine neuron label"/>
-          <p:cNvSpPr/>
-          <p:nvPr/>
-        </p:nvSpPr>
-        <p:spPr>
-          <a:xfrm>
-            <a:off x="5050000" y="3640000"/>
-            <a:ext cx="760000" cy="360000"/>
+          <p:cNvPr id="19" name="Text 17"/>
+          <p:cNvSpPr/>
+          <p:nvPr/>
+        </p:nvSpPr>
+        <p:spPr>
+          <a:xfrm>
+            <a:off x="8942832" y="3154680"/>
+            <a:ext cx="1600200" cy="256032"/>
           </a:xfrm>
           <a:prstGeom prst="rect">
             <a:avLst/>
@@ -13115,47 +13353,69 @@
               <a:buNone/>
             </a:pPr>
             <a:r>
-              <a:rPr lang="en-US" sz="850" b="1" dirty="0">
-                <a:solidFill>
-                  <a:srgbClr val="FFFDFA"/>
+              <a:rPr lang="en-US" sz="1280" b="1" dirty="0">
+                <a:solidFill>
+                  <a:srgbClr val="FFFFFF"/>
                 </a:solidFill>
                 <a:latin typeface="Calibri" pitchFamily="34" charset="0"/>
                 <a:ea typeface="Calibri" pitchFamily="34" charset="-122"/>
                 <a:cs typeface="Calibri" pitchFamily="34" charset="-120"/>
               </a:rPr>
-              <a:t>dopamine</a:t>
-            </a:r>
-            <a:endParaRPr lang="en-US" sz="850" dirty="0"/>
-          </a:p>
+              <a:t>Craving ↓</a:t>
+            </a:r>
+            <a:endParaRPr lang="en-US" sz="1280" dirty="0"/>
+          </a:p>
+        </p:txBody>
+      </p:sp>
+      <p:sp>
+        <p:nvSpPr>
+          <p:cNvPr id="20" name="Text 18"/>
+          <p:cNvSpPr/>
+          <p:nvPr/>
+        </p:nvSpPr>
+        <p:spPr>
+          <a:xfrm>
+            <a:off x="8778240" y="4041648"/>
+            <a:ext cx="1965960" cy="256032"/>
+          </a:xfrm>
+          <a:prstGeom prst="rect">
+            <a:avLst/>
+          </a:prstGeom>
+          <a:noFill/>
+          <a:ln/>
+        </p:spPr>
+        <p:txBody>
+          <a:bodyPr wrap="square" lIns="0" tIns="0" rIns="0" bIns="0" rtlCol="0" anchor="ctr"/>
+          <a:lstStyle/>
           <a:p>
             <a:pPr algn="ctr" indent="0" marL="0">
               <a:buNone/>
             </a:pPr>
             <a:r>
-              <a:rPr lang="en-US" sz="850" b="1" dirty="0">
-                <a:solidFill>
-                  <a:srgbClr val="FFFDFA"/>
+              <a:rPr lang="en-US" sz="1140" b="1" dirty="0">
+                <a:solidFill>
+                  <a:srgbClr val="5B8A4F"/>
                 </a:solidFill>
                 <a:latin typeface="Calibri" pitchFamily="34" charset="0"/>
                 <a:ea typeface="Calibri" pitchFamily="34" charset="-122"/>
                 <a:cs typeface="Calibri" pitchFamily="34" charset="-120"/>
               </a:rPr>
-              <a:t>neuron</a:t>
-            </a:r>
-            <a:endParaRPr lang="en-US" sz="850" dirty="0"/>
-          </a:p>
-        </p:txBody>
-      </p:sp>
-      <p:sp>
-        <p:nvSpPr>
-          <p:cNvPr id="41" name="GABA inhibition"/>
-          <p:cNvSpPr/>
-          <p:nvPr/>
-        </p:nvSpPr>
-        <p:spPr>
-          <a:xfrm>
-            <a:off x="3520000" y="3620000"/>
-            <a:ext cx="1500000" cy="250000"/>
+              <a:t>food · alcohol · nicotine</a:t>
+            </a:r>
+            <a:endParaRPr lang="en-US" sz="1140" dirty="0"/>
+          </a:p>
+        </p:txBody>
+      </p:sp>
+      <p:sp>
+        <p:nvSpPr>
+          <p:cNvPr id="21" name="Shape 19"/>
+          <p:cNvSpPr/>
+          <p:nvPr/>
+        </p:nvSpPr>
+        <p:spPr>
+          <a:xfrm>
+            <a:off x="4069080" y="3401568"/>
+            <a:ext cx="1920240" cy="0"/>
           </a:xfrm>
           <a:prstGeom prst="line">
             <a:avLst/>
@@ -13166,20 +13426,20 @@
               <a:srgbClr val="7A4B6B"/>
             </a:solidFill>
             <a:prstDash val="solid"/>
-            <a:headEnd type="triangle"/>
+            <a:tailEnd type="triangle"/>
           </a:ln>
         </p:spPr>
       </p:sp>
       <p:sp>
         <p:nvSpPr>
-          <p:cNvPr id="42" name="Dopamine down"/>
-          <p:cNvSpPr/>
-          <p:nvPr/>
-        </p:nvSpPr>
-        <p:spPr>
-          <a:xfrm>
-            <a:off x="5760000" y="3200000"/>
-            <a:ext cx="1200000" cy="240000"/>
+          <p:cNvPr id="22" name="Text 20"/>
+          <p:cNvSpPr/>
+          <p:nvPr/>
+        </p:nvSpPr>
+        <p:spPr>
+          <a:xfrm>
+            <a:off x="3291840" y="4590288"/>
+            <a:ext cx="5669280" cy="256032"/>
           </a:xfrm>
           <a:prstGeom prst="rect">
             <a:avLst/>
@@ -13195,106 +13455,30 @@
               <a:buNone/>
             </a:pPr>
             <a:r>
-              <a:rPr lang="en-US" sz="1000" b="1" dirty="0">
-                <a:solidFill>
-                  <a:srgbClr val="1F5651"/>
+              <a:rPr lang="en-US" sz="1220" i="1" dirty="0">
+                <a:solidFill>
+                  <a:srgbClr val="6B625A"/>
                 </a:solidFill>
                 <a:latin typeface="Calibri" pitchFamily="34" charset="0"/>
                 <a:ea typeface="Calibri" pitchFamily="34" charset="-122"/>
                 <a:cs typeface="Calibri" pitchFamily="34" charset="-120"/>
               </a:rPr>
-              <a:t>dopamine ↓</a:t>
-            </a:r>
-            <a:endParaRPr lang="en-US" sz="1000" dirty="0"/>
-          </a:p>
-        </p:txBody>
-      </p:sp>
-      <p:sp>
-        <p:nvSpPr>
-          <p:cNvPr id="43" name="Dopamine projection"/>
-          <p:cNvSpPr/>
-          <p:nvPr/>
-        </p:nvSpPr>
-        <p:spPr>
-          <a:xfrm>
-            <a:off x="5800000" y="3710000"/>
-            <a:ext cx="3450000" cy="-100000"/>
-          </a:xfrm>
-          <a:prstGeom prst="line">
-            <a:avLst/>
-          </a:prstGeom>
-          <a:noFill/>
-          <a:ln w="50800">
-            <a:solidFill>
-              <a:srgbClr val="2F7D77"/>
-            </a:solidFill>
-            <a:prstDash val="solid"/>
-            <a:headEnd type="triangle"/>
-          </a:ln>
-        </p:spPr>
-      </p:sp>
-      <p:sp>
-        <p:nvSpPr>
-          <p:cNvPr id="44" name="Reduced projection"/>
-          <p:cNvSpPr/>
-          <p:nvPr/>
-        </p:nvSpPr>
-        <p:spPr>
-          <a:xfrm>
-            <a:off x="5800000" y="3940000"/>
-            <a:ext cx="3380000" cy="280000"/>
-          </a:xfrm>
-          <a:prstGeom prst="line">
-            <a:avLst/>
-          </a:prstGeom>
-          <a:noFill/>
-          <a:ln w="22860">
-            <a:solidFill>
-              <a:srgbClr val="2F7D77">
-                <a:alpha val="52000"/>
-              </a:srgbClr>
-            </a:solidFill>
-            <a:prstDash val="dash"/>
-          </a:ln>
-        </p:spPr>
-      </p:sp>
-      <p:sp>
-        <p:nvSpPr>
-          <p:cNvPr id="45" name="NAc"/>
-          <p:cNvSpPr/>
-          <p:nvPr/>
-        </p:nvSpPr>
-        <p:spPr>
-          <a:xfrm>
-            <a:off x="9480000" y="3290000"/>
-            <a:ext cx="1600000" cy="900000"/>
-          </a:xfrm>
-          <a:prstGeom prst="ellipse">
-            <a:avLst/>
-          </a:prstGeom>
-          <a:solidFill>
-            <a:srgbClr val="5B8A4F">
-              <a:alpha val="18000"/>
-            </a:srgbClr>
-          </a:solidFill>
-          <a:ln w="19050">
-            <a:solidFill>
-              <a:srgbClr val="5B8A4F"/>
-            </a:solidFill>
-            <a:prstDash val="solid"/>
-          </a:ln>
-        </p:spPr>
-      </p:sp>
-      <p:sp>
-        <p:nvSpPr>
-          <p:cNvPr id="46" name="NAc label"/>
-          <p:cNvSpPr/>
-          <p:nvPr/>
-        </p:nvSpPr>
-        <p:spPr>
-          <a:xfrm>
-            <a:off x="9480000" y="3440000"/>
-            <a:ext cx="1600000" cy="520000"/>
+              <a:t>VTA GABA brake suppresses dopamine output</a:t>
+            </a:r>
+            <a:endParaRPr lang="en-US" sz="1220" dirty="0"/>
+          </a:p>
+        </p:txBody>
+      </p:sp>
+      <p:sp>
+        <p:nvSpPr>
+          <p:cNvPr id="23" name="Text 21"/>
+          <p:cNvSpPr/>
+          <p:nvPr/>
+        </p:nvSpPr>
+        <p:spPr>
+          <a:xfrm>
+            <a:off x="548640" y="5074920"/>
+            <a:ext cx="10972800" cy="457200"/>
           </a:xfrm>
           <a:prstGeom prst="rect">
             <a:avLst/>
@@ -13310,112 +13494,17 @@
               <a:buNone/>
             </a:pPr>
             <a:r>
-              <a:rPr lang="en-US" sz="950" b="1" dirty="0">
-                <a:solidFill>
-                  <a:srgbClr val="5B8A4F"/>
+              <a:rPr lang="en-US" sz="1400" i="1" dirty="0">
+                <a:solidFill>
+                  <a:srgbClr val="6B625A"/>
                 </a:solidFill>
                 <a:latin typeface="Calibri" pitchFamily="34" charset="0"/>
                 <a:ea typeface="Calibri" pitchFamily="34" charset="-122"/>
                 <a:cs typeface="Calibri" pitchFamily="34" charset="-120"/>
               </a:rPr>
-              <a:t>nucleus</a:t>
-            </a:r>
-            <a:endParaRPr lang="en-US" sz="950" dirty="0"/>
-          </a:p>
-          <a:p>
-            <a:pPr algn="ctr" indent="0" marL="0">
-              <a:buNone/>
-            </a:pPr>
-            <a:r>
-              <a:rPr lang="en-US" sz="950" b="1" dirty="0">
-                <a:solidFill>
-                  <a:srgbClr val="5B8A4F"/>
-                </a:solidFill>
-                <a:latin typeface="Calibri" pitchFamily="34" charset="0"/>
-                <a:ea typeface="Calibri" pitchFamily="34" charset="-122"/>
-                <a:cs typeface="Calibri" pitchFamily="34" charset="-120"/>
-              </a:rPr>
-              <a:t>accumbens</a:t>
-            </a:r>
-            <a:endParaRPr lang="en-US" sz="950" dirty="0"/>
-          </a:p>
-          <a:p>
-            <a:pPr algn="ctr" indent="0" marL="0">
-              <a:buNone/>
-            </a:pPr>
-            <a:r>
-              <a:rPr lang="en-US" sz="950" b="1" dirty="0">
-                <a:solidFill>
-                  <a:srgbClr val="5B8A4F"/>
-                </a:solidFill>
-                <a:latin typeface="Calibri" pitchFamily="34" charset="0"/>
-                <a:ea typeface="Calibri" pitchFamily="34" charset="-122"/>
-                <a:cs typeface="Calibri" pitchFamily="34" charset="-120"/>
-              </a:rPr>
-              <a:t>craving ↓</a:t>
-            </a:r>
-            <a:endParaRPr lang="en-US" sz="950" dirty="0"/>
-          </a:p>
-        </p:txBody>
-      </p:sp>
-      <p:sp>
-        <p:nvSpPr>
-          <p:cNvPr id="47" name="Legend rail"/>
-          <p:cNvSpPr/>
-          <p:nvPr/>
-        </p:nvSpPr>
-        <p:spPr>
-          <a:xfrm>
-            <a:off x="1280000" y="4680000"/>
-            <a:ext cx="9000000" cy="300000"/>
-          </a:xfrm>
-          <a:prstGeom prst="roundRect">
-            <a:avLst/>
-          </a:prstGeom>
-          <a:solidFill>
-            <a:srgbClr val="E7DDD1">
-              <a:alpha val="62000"/>
-            </a:srgbClr>
-          </a:solidFill>
-          <a:ln/>
-        </p:spPr>
-      </p:sp>
-      <p:sp>
-        <p:nvSpPr>
-          <p:cNvPr id="48" name="Legend"/>
-          <p:cNvSpPr/>
-          <p:nvPr/>
-        </p:nvSpPr>
-        <p:spPr>
-          <a:xfrm>
-            <a:off x="1400000" y="4740000"/>
-            <a:ext cx="8750000" cy="160000"/>
-          </a:xfrm>
-          <a:prstGeom prst="rect">
-            <a:avLst/>
-          </a:prstGeom>
-          <a:noFill/>
-          <a:ln/>
-        </p:spPr>
-        <p:txBody>
-          <a:bodyPr wrap="square" lIns="0" tIns="0" rIns="0" bIns="0" rtlCol="0" anchor="ctr"/>
-          <a:lstStyle/>
-          <a:p>
-            <a:pPr algn="ctr" indent="0" marL="0">
-              <a:buNone/>
-            </a:pPr>
-            <a:r>
-              <a:rPr lang="en-US" sz="850" b="1" dirty="0">
-                <a:solidFill>
-                  <a:srgbClr val="6B625A"/>
-                </a:solidFill>
-                <a:latin typeface="Calibri" pitchFamily="34" charset="0"/>
-                <a:ea typeface="Calibri" pitchFamily="34" charset="-122"/>
-                <a:cs typeface="Calibri" pitchFamily="34" charset="-120"/>
-              </a:rPr>
-              <a:t>1 drug binds receptor     2 GABA brakes ON     3 dopamine ↓     4 craving ↓</a:t>
-            </a:r>
-            <a:endParaRPr lang="en-US" sz="850" dirty="0"/>
+              <a:t>Caveat (Zhu 2025): in mice, dopamine activity &amp; appetite recovered during repeated dosing — possible tolerance.</a:t>
+            </a:r>
+            <a:endParaRPr lang="en-US" sz="1400" dirty="0"/>
           </a:p>
         </p:txBody>
       </p:sp>
@@ -19186,7 +19275,7 @@
       </p:sp>
       <p:sp>
         <p:nvSpPr>
-          <p:cNvPr id="30" name="Diagram panel"/>
+          <p:cNvPr id="7" name="Shape 5"/>
           <p:cNvSpPr/>
           <p:nvPr/>
         </p:nvSpPr>
@@ -19196,7 +19285,9 @@
             <a:ext cx="5212080" cy="3566160"/>
           </a:xfrm>
           <a:prstGeom prst="roundRect">
-            <a:avLst/>
+            <a:avLst>
+              <a:gd name="adj" fmla="val 2308"/>
+            </a:avLst>
           </a:prstGeom>
           <a:solidFill>
             <a:srgbClr val="FBF7F2"/>
@@ -19207,18 +19298,25 @@
             </a:solidFill>
             <a:prstDash val="solid"/>
           </a:ln>
-        </p:spPr>
-      </p:sp>
-      <p:sp>
-        <p:nvSpPr>
-          <p:cNvPr id="31" name="Brain lobe 1"/>
-          <p:cNvSpPr/>
-          <p:nvPr/>
-        </p:nvSpPr>
-        <p:spPr>
-          <a:xfrm>
-            <a:off x="6830000" y="2500000"/>
-            <a:ext cx="560000" cy="520000"/>
+          <a:effectLst>
+            <a:outerShdw sx="100000" sy="100000" kx="0" ky="0" algn="bl" rotWithShape="0" blurRad="114300" dist="38100" dir="8100000">
+              <a:srgbClr val="000000">
+                <a:alpha val="16000"/>
+              </a:srgbClr>
+            </a:outerShdw>
+          </a:effectLst>
+        </p:spPr>
+      </p:sp>
+      <p:sp>
+        <p:nvSpPr>
+          <p:cNvPr id="8" name="Shape 6"/>
+          <p:cNvSpPr/>
+          <p:nvPr/>
+        </p:nvSpPr>
+        <p:spPr>
+          <a:xfrm>
+            <a:off x="6812280" y="2514600"/>
+            <a:ext cx="868680" cy="749808"/>
           </a:xfrm>
           <a:prstGeom prst="ellipse">
             <a:avLst/>
@@ -19226,7 +19324,7 @@
           <a:solidFill>
             <a:srgbClr val="F7E3DA"/>
           </a:solidFill>
-          <a:ln w="19050">
+          <a:ln w="17780">
             <a:solidFill>
               <a:srgbClr val="A8431F"/>
             </a:solidFill>
@@ -19236,22 +19334,24 @@
       </p:sp>
       <p:sp>
         <p:nvSpPr>
-          <p:cNvPr id="32" name="Brain lobe 2"/>
-          <p:cNvSpPr/>
-          <p:nvPr/>
-        </p:nvSpPr>
-        <p:spPr>
-          <a:xfrm>
-            <a:off x="7190000" y="2360000"/>
-            <a:ext cx="610000" cy="560000"/>
+          <p:cNvPr id="9" name="Shape 7"/>
+          <p:cNvSpPr/>
+          <p:nvPr/>
+        </p:nvSpPr>
+        <p:spPr>
+          <a:xfrm>
+            <a:off x="7269480" y="2331720"/>
+            <a:ext cx="960120" cy="822960"/>
           </a:xfrm>
           <a:prstGeom prst="ellipse">
             <a:avLst/>
           </a:prstGeom>
           <a:solidFill>
-            <a:srgbClr val="F7E3DA"/>
+            <a:srgbClr val="F7E3DA">
+              <a:alpha val="92000"/>
+            </a:srgbClr>
           </a:solidFill>
-          <a:ln w="19050">
+          <a:ln w="17780">
             <a:solidFill>
               <a:srgbClr val="A8431F"/>
             </a:solidFill>
@@ -19261,22 +19361,24 @@
       </p:sp>
       <p:sp>
         <p:nvSpPr>
-          <p:cNvPr id="33" name="Brain lobe 3"/>
-          <p:cNvSpPr/>
-          <p:nvPr/>
-        </p:nvSpPr>
-        <p:spPr>
-          <a:xfrm>
-            <a:off x="7590000" y="2510000"/>
-            <a:ext cx="530000" cy="510000"/>
+          <p:cNvPr id="10" name="Shape 8"/>
+          <p:cNvSpPr/>
+          <p:nvPr/>
+        </p:nvSpPr>
+        <p:spPr>
+          <a:xfrm>
+            <a:off x="7818120" y="2560320"/>
+            <a:ext cx="868680" cy="786384"/>
           </a:xfrm>
           <a:prstGeom prst="ellipse">
             <a:avLst/>
           </a:prstGeom>
           <a:solidFill>
-            <a:srgbClr val="F7E3DA"/>
+            <a:srgbClr val="F7E3DA">
+              <a:alpha val="92000"/>
+            </a:srgbClr>
           </a:solidFill>
-          <a:ln w="19050">
+          <a:ln w="17780">
             <a:solidFill>
               <a:srgbClr val="A8431F"/>
             </a:solidFill>
@@ -19286,22 +19388,24 @@
       </p:sp>
       <p:sp>
         <p:nvSpPr>
-          <p:cNvPr id="34" name="Brain lobe 4"/>
-          <p:cNvSpPr/>
-          <p:nvPr/>
-        </p:nvSpPr>
-        <p:spPr>
-          <a:xfrm>
-            <a:off x="7000000" y="2860000"/>
-            <a:ext cx="650000" cy="520000"/>
+          <p:cNvPr id="11" name="Shape 9"/>
+          <p:cNvSpPr/>
+          <p:nvPr/>
+        </p:nvSpPr>
+        <p:spPr>
+          <a:xfrm>
+            <a:off x="6995160" y="2999232"/>
+            <a:ext cx="987552" cy="804672"/>
           </a:xfrm>
           <a:prstGeom prst="ellipse">
             <a:avLst/>
           </a:prstGeom>
           <a:solidFill>
-            <a:srgbClr val="F7E3DA"/>
+            <a:srgbClr val="F7E3DA">
+              <a:alpha val="92000"/>
+            </a:srgbClr>
           </a:solidFill>
-          <a:ln w="19050">
+          <a:ln w="17780">
             <a:solidFill>
               <a:srgbClr val="A8431F"/>
             </a:solidFill>
@@ -19311,22 +19415,24 @@
       </p:sp>
       <p:sp>
         <p:nvSpPr>
-          <p:cNvPr id="35" name="Brain lobe 5"/>
-          <p:cNvSpPr/>
-          <p:nvPr/>
-        </p:nvSpPr>
-        <p:spPr>
-          <a:xfrm>
-            <a:off x="7480000" y="2860000"/>
-            <a:ext cx="610000" cy="500000"/>
+          <p:cNvPr id="12" name="Shape 10"/>
+          <p:cNvSpPr/>
+          <p:nvPr/>
+        </p:nvSpPr>
+        <p:spPr>
+          <a:xfrm>
+            <a:off x="7543800" y="2944368"/>
+            <a:ext cx="914400" cy="749808"/>
           </a:xfrm>
           <a:prstGeom prst="ellipse">
             <a:avLst/>
           </a:prstGeom>
           <a:solidFill>
-            <a:srgbClr val="F7E3DA"/>
+            <a:srgbClr val="F7E3DA">
+              <a:alpha val="92000"/>
+            </a:srgbClr>
           </a:solidFill>
-          <a:ln w="19050">
+          <a:ln w="17780">
             <a:solidFill>
               <a:srgbClr val="A8431F"/>
             </a:solidFill>
@@ -19336,39 +19442,14 @@
       </p:sp>
       <p:sp>
         <p:nvSpPr>
-          <p:cNvPr id="36" name="Brainstem NTS"/>
-          <p:cNvSpPr/>
-          <p:nvPr/>
-        </p:nvSpPr>
-        <p:spPr>
-          <a:xfrm>
-            <a:off x="7810000" y="3260000"/>
-            <a:ext cx="365000" cy="690000"/>
-          </a:xfrm>
-          <a:prstGeom prst="roundRect">
-            <a:avLst/>
-          </a:prstGeom>
-          <a:solidFill>
-            <a:srgbClr val="F7E3DA"/>
-          </a:solidFill>
-          <a:ln w="12700">
-            <a:solidFill>
-              <a:srgbClr val="A8431F"/>
-            </a:solidFill>
-            <a:prstDash val="solid"/>
-          </a:ln>
-        </p:spPr>
-      </p:sp>
-      <p:sp>
-        <p:nvSpPr>
-          <p:cNvPr id="37" name="Brain label"/>
-          <p:cNvSpPr/>
-          <p:nvPr/>
-        </p:nvSpPr>
-        <p:spPr>
-          <a:xfrm>
-            <a:off x="7060000" y="2800000"/>
-            <a:ext cx="930000" cy="230000"/>
+          <p:cNvPr id="13" name="Text 11"/>
+          <p:cNvSpPr/>
+          <p:nvPr/>
+        </p:nvSpPr>
+        <p:spPr>
+          <a:xfrm>
+            <a:off x="7114032" y="2852928"/>
+            <a:ext cx="1234440" cy="320040"/>
           </a:xfrm>
           <a:prstGeom prst="rect">
             <a:avLst/>
@@ -19384,7 +19465,7 @@
               <a:buNone/>
             </a:pPr>
             <a:r>
-              <a:rPr lang="en-US" sz="1150" b="1" dirty="0">
+              <a:rPr lang="en-US" sz="1200" b="1" dirty="0">
                 <a:solidFill>
                   <a:srgbClr val="A8431F"/>
                 </a:solidFill>
@@ -19394,20 +19475,20 @@
               </a:rPr>
               <a:t>BRAIN</a:t>
             </a:r>
-            <a:endParaRPr lang="en-US" sz="1150" dirty="0"/>
-          </a:p>
-        </p:txBody>
-      </p:sp>
-      <p:sp>
-        <p:nvSpPr>
-          <p:cNvPr id="38" name="NTS label"/>
-          <p:cNvSpPr/>
-          <p:nvPr/>
-        </p:nvSpPr>
-        <p:spPr>
-          <a:xfrm>
-            <a:off x="8180000" y="3430000"/>
-            <a:ext cx="720000" cy="420000"/>
+            <a:endParaRPr lang="en-US" sz="1200" dirty="0"/>
+          </a:p>
+        </p:txBody>
+      </p:sp>
+      <p:sp>
+        <p:nvSpPr>
+          <p:cNvPr id="14" name="Text 12"/>
+          <p:cNvSpPr/>
+          <p:nvPr/>
+        </p:nvSpPr>
+        <p:spPr>
+          <a:xfrm>
+            <a:off x="6903720" y="3657600"/>
+            <a:ext cx="1645920" cy="228600"/>
           </a:xfrm>
           <a:prstGeom prst="rect">
             <a:avLst/>
@@ -19423,7 +19504,7 @@
               <a:buNone/>
             </a:pPr>
             <a:r>
-              <a:rPr lang="en-US" sz="850" b="1" dirty="0">
+              <a:rPr lang="en-US" sz="950" dirty="0">
                 <a:solidFill>
                   <a:srgbClr val="6B625A"/>
                 </a:solidFill>
@@ -19431,45 +19512,53 @@
                 <a:ea typeface="Calibri" pitchFamily="34" charset="-122"/>
                 <a:cs typeface="Calibri" pitchFamily="34" charset="-120"/>
               </a:rPr>
-              <a:t>brainstem</a:t>
-            </a:r>
-            <a:endParaRPr lang="en-US" sz="850" dirty="0"/>
-          </a:p>
-          <a:p>
-            <a:pPr algn="ctr" indent="0" marL="0">
-              <a:buNone/>
-            </a:pPr>
-            <a:r>
-              <a:rPr lang="en-US" sz="850" b="1" dirty="0">
-                <a:solidFill>
-                  <a:srgbClr val="6B625A"/>
-                </a:solidFill>
-                <a:latin typeface="Calibri" pitchFamily="34" charset="0"/>
-                <a:ea typeface="Calibri" pitchFamily="34" charset="-122"/>
-                <a:cs typeface="Calibri" pitchFamily="34" charset="-120"/>
-              </a:rPr>
-              <a:t>NTS</a:t>
-            </a:r>
-            <a:endParaRPr lang="en-US" sz="850" dirty="0"/>
-          </a:p>
-        </p:txBody>
-      </p:sp>
-      <p:sp>
-        <p:nvSpPr>
-          <p:cNvPr id="39" name="Gut outer"/>
-          <p:cNvSpPr/>
-          <p:nvPr/>
-        </p:nvSpPr>
-        <p:spPr>
-          <a:xfrm>
-            <a:off x="9870000" y="2380000"/>
-            <a:ext cx="1050000" cy="1550000"/>
+              <a:t>brainstem / NTS</a:t>
+            </a:r>
+            <a:endParaRPr lang="en-US" sz="950" dirty="0"/>
+          </a:p>
+        </p:txBody>
+      </p:sp>
+      <p:sp>
+        <p:nvSpPr>
+          <p:cNvPr id="15" name="Shape 13"/>
+          <p:cNvSpPr/>
+          <p:nvPr/>
+        </p:nvSpPr>
+        <p:spPr>
+          <a:xfrm>
+            <a:off x="9418320" y="2331720"/>
+            <a:ext cx="1417320" cy="1554480"/>
           </a:xfrm>
           <a:prstGeom prst="arc">
             <a:avLst/>
           </a:prstGeom>
           <a:noFill/>
-          <a:ln w="152400">
+          <a:ln w="88900">
+            <a:solidFill>
+              <a:srgbClr val="1F5651"/>
+            </a:solidFill>
+            <a:prstDash val="solid"/>
+            <a:headEnd type="none"/>
+            <a:tailEnd type="none"/>
+          </a:ln>
+        </p:spPr>
+      </p:sp>
+      <p:sp>
+        <p:nvSpPr>
+          <p:cNvPr id="16" name="Shape 14"/>
+          <p:cNvSpPr/>
+          <p:nvPr/>
+        </p:nvSpPr>
+        <p:spPr>
+          <a:xfrm>
+            <a:off x="9738360" y="2834640"/>
+            <a:ext cx="731520" cy="749808"/>
+          </a:xfrm>
+          <a:prstGeom prst="arc">
+            <a:avLst/>
+          </a:prstGeom>
+          <a:noFill/>
+          <a:ln w="76200">
             <a:solidFill>
               <a:srgbClr val="1F5651"/>
             </a:solidFill>
@@ -19479,47 +19568,22 @@
       </p:sp>
       <p:sp>
         <p:nvSpPr>
-          <p:cNvPr id="40" name="Gut inner"/>
-          <p:cNvSpPr/>
-          <p:nvPr/>
-        </p:nvSpPr>
-        <p:spPr>
-          <a:xfrm>
-            <a:off x="9560000" y="2970000"/>
-            <a:ext cx="900000" cy="1450000"/>
-          </a:xfrm>
-          <a:prstGeom prst="arc">
-            <a:avLst/>
-          </a:prstGeom>
-          <a:noFill/>
-          <a:ln w="165100">
-            <a:solidFill>
-              <a:srgbClr val="2F7D77"/>
-            </a:solidFill>
-            <a:prstDash val="solid"/>
-          </a:ln>
-        </p:spPr>
-      </p:sp>
-      <p:sp>
-        <p:nvSpPr>
-          <p:cNvPr id="41" name="Gut glow"/>
-          <p:cNvSpPr/>
-          <p:nvPr/>
-        </p:nvSpPr>
-        <p:spPr>
-          <a:xfrm>
-            <a:off x="9730000" y="2850000"/>
-            <a:ext cx="1170000" cy="980000"/>
+          <p:cNvPr id="17" name="Shape 15"/>
+          <p:cNvSpPr/>
+          <p:nvPr/>
+        </p:nvSpPr>
+        <p:spPr>
+          <a:xfrm>
+            <a:off x="9217152" y="3246120"/>
+            <a:ext cx="960120" cy="676656"/>
           </a:xfrm>
           <a:prstGeom prst="ellipse">
             <a:avLst/>
           </a:prstGeom>
           <a:solidFill>
-            <a:srgbClr val="E3EFEE">
-              <a:alpha val="48000"/>
-            </a:srgbClr>
+            <a:srgbClr val="DDECE9"/>
           </a:solidFill>
-          <a:ln w="12700">
+          <a:ln w="19050">
             <a:solidFill>
               <a:srgbClr val="1F5651"/>
             </a:solidFill>
@@ -19529,14 +19593,14 @@
       </p:sp>
       <p:sp>
         <p:nvSpPr>
-          <p:cNvPr id="42" name="Gut label"/>
-          <p:cNvSpPr/>
-          <p:nvPr/>
-        </p:nvSpPr>
-        <p:spPr>
-          <a:xfrm>
-            <a:off x="9740000" y="3150000"/>
-            <a:ext cx="1160000" cy="500000"/>
+          <p:cNvPr id="18" name="Text 16"/>
+          <p:cNvSpPr/>
+          <p:nvPr/>
+        </p:nvSpPr>
+        <p:spPr>
+          <a:xfrm>
+            <a:off x="9262872" y="3438144"/>
+            <a:ext cx="868680" cy="228600"/>
           </a:xfrm>
           <a:prstGeom prst="rect">
             <a:avLst/>
@@ -19552,7 +19616,7 @@
               <a:buNone/>
             </a:pPr>
             <a:r>
-              <a:rPr lang="en-US" sz="1050" b="1" dirty="0">
+              <a:rPr lang="en-US" sz="1200" b="1" dirty="0">
                 <a:solidFill>
                   <a:srgbClr val="1F5651"/>
                 </a:solidFill>
@@ -19562,167 +19626,20 @@
               </a:rPr>
               <a:t>GUT</a:t>
             </a:r>
-            <a:endParaRPr lang="en-US" sz="1050" dirty="0"/>
-          </a:p>
-          <a:p>
-            <a:pPr algn="ctr" indent="0" marL="0">
-              <a:buNone/>
-            </a:pPr>
-            <a:r>
-              <a:rPr lang="en-US" sz="1050" b="1" dirty="0">
-                <a:solidFill>
-                  <a:srgbClr val="1F5651"/>
-                </a:solidFill>
-                <a:latin typeface="Calibri" pitchFamily="34" charset="0"/>
-                <a:ea typeface="Calibri" pitchFamily="34" charset="-122"/>
-                <a:cs typeface="Calibri" pitchFamily="34" charset="-120"/>
-              </a:rPr>
-              <a:t>enteric sensors</a:t>
-            </a:r>
-            <a:endParaRPr lang="en-US" sz="1050" dirty="0"/>
-          </a:p>
-        </p:txBody>
-      </p:sp>
-      <p:sp>
-        <p:nvSpPr>
-          <p:cNvPr id="43" name="afferent fiber 1"/>
-          <p:cNvSpPr/>
-          <p:nvPr/>
-        </p:nvSpPr>
-        <p:spPr>
-          <a:xfrm>
-            <a:off x="9520000" y="2780000"/>
-            <a:ext cx="-980000" cy="-370000"/>
-          </a:xfrm>
-          <a:prstGeom prst="line">
-            <a:avLst/>
-          </a:prstGeom>
-          <a:noFill/>
-          <a:ln w="17780">
-            <a:solidFill>
-              <a:srgbClr val="2F7D77">
-                <a:alpha val="56000"/>
-              </a:srgbClr>
-            </a:solidFill>
-            <a:prstDash val="solid"/>
-            <a:headEnd type="triangle"/>
-          </a:ln>
-        </p:spPr>
-      </p:sp>
-      <p:sp>
-        <p:nvSpPr>
-          <p:cNvPr id="44" name="afferent fiber 2"/>
-          <p:cNvSpPr/>
-          <p:nvPr/>
-        </p:nvSpPr>
-        <p:spPr>
-          <a:xfrm>
-            <a:off x="9520000" y="2990000"/>
-            <a:ext cx="-980000" cy="-225000"/>
-          </a:xfrm>
-          <a:prstGeom prst="line">
-            <a:avLst/>
-          </a:prstGeom>
-          <a:noFill/>
-          <a:ln w="17780">
-            <a:solidFill>
-              <a:srgbClr val="2F7D77">
-                <a:alpha val="56000"/>
-              </a:srgbClr>
-            </a:solidFill>
-            <a:prstDash val="solid"/>
-            <a:headEnd type="triangle"/>
-          </a:ln>
-        </p:spPr>
-      </p:sp>
-      <p:sp>
-        <p:nvSpPr>
-          <p:cNvPr id="45" name="afferent fiber 3"/>
-          <p:cNvSpPr/>
-          <p:nvPr/>
-        </p:nvSpPr>
-        <p:spPr>
-          <a:xfrm>
-            <a:off x="9520000" y="3200000"/>
-            <a:ext cx="-980000" cy="-80000"/>
-          </a:xfrm>
-          <a:prstGeom prst="line">
-            <a:avLst/>
-          </a:prstGeom>
-          <a:noFill/>
-          <a:ln w="17780">
-            <a:solidFill>
-              <a:srgbClr val="2F7D77">
-                <a:alpha val="56000"/>
-              </a:srgbClr>
-            </a:solidFill>
-            <a:prstDash val="solid"/>
-            <a:headEnd type="triangle"/>
-          </a:ln>
-        </p:spPr>
-      </p:sp>
-      <p:sp>
-        <p:nvSpPr>
-          <p:cNvPr id="46" name="afferent fiber 4"/>
-          <p:cNvSpPr/>
-          <p:nvPr/>
-        </p:nvSpPr>
-        <p:spPr>
-          <a:xfrm>
-            <a:off x="9520000" y="3410000"/>
-            <a:ext cx="-980000" cy="65000"/>
-          </a:xfrm>
-          <a:prstGeom prst="line">
-            <a:avLst/>
-          </a:prstGeom>
-          <a:noFill/>
-          <a:ln w="17780">
-            <a:solidFill>
-              <a:srgbClr val="2F7D77">
-                <a:alpha val="56000"/>
-              </a:srgbClr>
-            </a:solidFill>
-            <a:prstDash val="solid"/>
-            <a:headEnd type="triangle"/>
-          </a:ln>
-        </p:spPr>
-      </p:sp>
-      <p:sp>
-        <p:nvSpPr>
-          <p:cNvPr id="47" name="afferent fiber 5"/>
-          <p:cNvSpPr/>
-          <p:nvPr/>
-        </p:nvSpPr>
-        <p:spPr>
-          <a:xfrm>
-            <a:off x="9520000" y="3620000"/>
-            <a:ext cx="-980000" cy="210000"/>
-          </a:xfrm>
-          <a:prstGeom prst="line">
-            <a:avLst/>
-          </a:prstGeom>
-          <a:noFill/>
-          <a:ln w="17780">
-            <a:solidFill>
-              <a:srgbClr val="2F7D77">
-                <a:alpha val="56000"/>
-              </a:srgbClr>
-            </a:solidFill>
-            <a:prstDash val="solid"/>
-            <a:headEnd type="triangle"/>
-          </a:ln>
-        </p:spPr>
-      </p:sp>
-      <p:sp>
-        <p:nvSpPr>
-          <p:cNvPr id="48" name="80 percent afferent bundle"/>
-          <p:cNvSpPr/>
-          <p:nvPr/>
-        </p:nvSpPr>
-        <p:spPr>
-          <a:xfrm>
-            <a:off x="8720000" y="2980000"/>
-            <a:ext cx="-1390000" cy="-210000"/>
+            <a:endParaRPr lang="en-US" sz="1200" dirty="0"/>
+          </a:p>
+        </p:txBody>
+      </p:sp>
+      <p:sp>
+        <p:nvSpPr>
+          <p:cNvPr id="19" name="Shape 17"/>
+          <p:cNvSpPr/>
+          <p:nvPr/>
+        </p:nvSpPr>
+        <p:spPr>
+          <a:xfrm>
+            <a:off x="8458200" y="2788920"/>
+            <a:ext cx="960120" cy="0"/>
           </a:xfrm>
           <a:prstGeom prst="line">
             <a:avLst/>
@@ -19739,39 +19656,66 @@
       </p:sp>
       <p:sp>
         <p:nvSpPr>
-          <p:cNvPr id="49" name="Nodose ganglion"/>
-          <p:cNvSpPr/>
-          <p:nvPr/>
-        </p:nvSpPr>
-        <p:spPr>
-          <a:xfrm>
-            <a:off x="8860000" y="2890000"/>
-            <a:ext cx="365000" cy="365000"/>
-          </a:xfrm>
-          <a:prstGeom prst="ellipse">
-            <a:avLst/>
-          </a:prstGeom>
-          <a:solidFill>
-            <a:srgbClr val="FFFDFA"/>
-          </a:solidFill>
-          <a:ln w="19050">
+          <p:cNvPr id="20" name="Shape 18"/>
+          <p:cNvSpPr/>
+          <p:nvPr/>
+        </p:nvSpPr>
+        <p:spPr>
+          <a:xfrm>
+            <a:off x="8458200" y="3035808"/>
+            <a:ext cx="914400" cy="0"/>
+          </a:xfrm>
+          <a:prstGeom prst="line">
+            <a:avLst/>
+          </a:prstGeom>
+          <a:noFill/>
+          <a:ln w="38100">
             <a:solidFill>
-              <a:srgbClr val="1F5651"/>
+              <a:srgbClr val="2F7D77">
+                <a:alpha val="75000"/>
+              </a:srgbClr>
             </a:solidFill>
             <a:prstDash val="solid"/>
+            <a:headEnd type="triangle"/>
           </a:ln>
         </p:spPr>
       </p:sp>
       <p:sp>
         <p:nvSpPr>
-          <p:cNvPr id="50" name="Nodose label"/>
-          <p:cNvSpPr/>
-          <p:nvPr/>
-        </p:nvSpPr>
-        <p:spPr>
-          <a:xfrm>
-            <a:off x="8770000" y="3290000"/>
-            <a:ext cx="560000" cy="300000"/>
+          <p:cNvPr id="21" name="Shape 19"/>
+          <p:cNvSpPr/>
+          <p:nvPr/>
+        </p:nvSpPr>
+        <p:spPr>
+          <a:xfrm>
+            <a:off x="8458200" y="3273552"/>
+            <a:ext cx="868680" cy="0"/>
+          </a:xfrm>
+          <a:prstGeom prst="line">
+            <a:avLst/>
+          </a:prstGeom>
+          <a:noFill/>
+          <a:ln w="31750">
+            <a:solidFill>
+              <a:srgbClr val="2F7D77">
+                <a:alpha val="55000"/>
+              </a:srgbClr>
+            </a:solidFill>
+            <a:prstDash val="solid"/>
+            <a:headEnd type="triangle"/>
+          </a:ln>
+        </p:spPr>
+      </p:sp>
+      <p:sp>
+        <p:nvSpPr>
+          <p:cNvPr id="22" name="Text 20"/>
+          <p:cNvSpPr/>
+          <p:nvPr/>
+        </p:nvSpPr>
+        <p:spPr>
+          <a:xfrm>
+            <a:off x="6903720" y="2057400"/>
+            <a:ext cx="4389120" cy="320040"/>
           </a:xfrm>
           <a:prstGeom prst="rect">
             <a:avLst/>
@@ -19787,7 +19731,7 @@
               <a:buNone/>
             </a:pPr>
             <a:r>
-              <a:rPr lang="en-US" sz="760" b="1" dirty="0">
+              <a:rPr lang="en-US" sz="1320" b="1" dirty="0">
                 <a:solidFill>
                   <a:srgbClr val="1F5651"/>
                 </a:solidFill>
@@ -19795,39 +19739,22 @@
                 <a:ea typeface="Calibri" pitchFamily="34" charset="-122"/>
                 <a:cs typeface="Calibri" pitchFamily="34" charset="-120"/>
               </a:rPr>
-              <a:t>nodose</a:t>
-            </a:r>
-            <a:endParaRPr lang="en-US" sz="760" dirty="0"/>
-          </a:p>
-          <a:p>
-            <a:pPr algn="ctr" indent="0" marL="0">
-              <a:buNone/>
-            </a:pPr>
-            <a:r>
-              <a:rPr lang="en-US" sz="760" b="1" dirty="0">
-                <a:solidFill>
-                  <a:srgbClr val="1F5651"/>
-                </a:solidFill>
-                <a:latin typeface="Calibri" pitchFamily="34" charset="0"/>
-                <a:ea typeface="Calibri" pitchFamily="34" charset="-122"/>
-                <a:cs typeface="Calibri" pitchFamily="34" charset="-120"/>
-              </a:rPr>
-              <a:t>ganglion</a:t>
-            </a:r>
-            <a:endParaRPr lang="en-US" sz="760" dirty="0"/>
-          </a:p>
-        </p:txBody>
-      </p:sp>
-      <p:sp>
-        <p:nvSpPr>
-          <p:cNvPr id="51" name="20 percent efferent"/>
-          <p:cNvSpPr/>
-          <p:nvPr/>
-        </p:nvSpPr>
-        <p:spPr>
-          <a:xfrm>
-            <a:off x="7760000" y="3920000"/>
-            <a:ext cx="2250000" cy="450000"/>
+              <a:t>80%  gut → brain  (sensing)</a:t>
+            </a:r>
+            <a:endParaRPr lang="en-US" sz="1320" dirty="0"/>
+          </a:p>
+        </p:txBody>
+      </p:sp>
+      <p:sp>
+        <p:nvSpPr>
+          <p:cNvPr id="23" name="Shape 21"/>
+          <p:cNvSpPr/>
+          <p:nvPr/>
+        </p:nvSpPr>
+        <p:spPr>
+          <a:xfrm>
+            <a:off x="8430768" y="3977640"/>
+            <a:ext cx="960120" cy="0"/>
           </a:xfrm>
           <a:prstGeom prst="line">
             <a:avLst/>
@@ -19838,20 +19765,20 @@
               <a:srgbClr val="D2603A"/>
             </a:solidFill>
             <a:prstDash val="solid"/>
-            <a:headEnd type="triangle"/>
+            <a:tailEnd type="triangle"/>
           </a:ln>
         </p:spPr>
       </p:sp>
       <p:sp>
         <p:nvSpPr>
-          <p:cNvPr id="52" name="80 label"/>
-          <p:cNvSpPr/>
-          <p:nvPr/>
-        </p:nvSpPr>
-        <p:spPr>
-          <a:xfrm>
-            <a:off x="6830000" y="2150000"/>
-            <a:ext cx="4550000" cy="300000"/>
+          <p:cNvPr id="24" name="Text 22"/>
+          <p:cNvSpPr/>
+          <p:nvPr/>
+        </p:nvSpPr>
+        <p:spPr>
+          <a:xfrm>
+            <a:off x="6903720" y="4407408"/>
+            <a:ext cx="4389120" cy="320040"/>
           </a:xfrm>
           <a:prstGeom prst="rect">
             <a:avLst/>
@@ -19867,56 +19794,17 @@
               <a:buNone/>
             </a:pPr>
             <a:r>
-              <a:rPr lang="en-US" sz="1250" b="1" dirty="0">
-                <a:solidFill>
-                  <a:srgbClr val="1F5651"/>
+              <a:rPr lang="en-US" sz="1230" dirty="0">
+                <a:solidFill>
+                  <a:srgbClr val="A8431F"/>
                 </a:solidFill>
                 <a:latin typeface="Calibri" pitchFamily="34" charset="0"/>
                 <a:ea typeface="Calibri" pitchFamily="34" charset="-122"/>
                 <a:cs typeface="Calibri" pitchFamily="34" charset="-120"/>
               </a:rPr>
-              <a:t>80% gut → brain  (sensing)</a:t>
-            </a:r>
-            <a:endParaRPr lang="en-US" sz="1250" dirty="0"/>
-          </a:p>
-        </p:txBody>
-      </p:sp>
-      <p:sp>
-        <p:nvSpPr>
-          <p:cNvPr id="53" name="20 label"/>
-          <p:cNvSpPr/>
-          <p:nvPr/>
-        </p:nvSpPr>
-        <p:spPr>
-          <a:xfrm>
-            <a:off x="7200000" y="4660000"/>
-            <a:ext cx="3900000" cy="260000"/>
-          </a:xfrm>
-          <a:prstGeom prst="rect">
-            <a:avLst/>
-          </a:prstGeom>
-          <a:noFill/>
-          <a:ln/>
-        </p:spPr>
-        <p:txBody>
-          <a:bodyPr wrap="square" lIns="0" tIns="0" rIns="0" bIns="0" rtlCol="0" anchor="ctr"/>
-          <a:lstStyle/>
-          <a:p>
-            <a:pPr algn="ctr" indent="0" marL="0">
-              <a:buNone/>
-            </a:pPr>
-            <a:r>
-              <a:rPr lang="en-US" sz="1100" b="1" dirty="0">
-                <a:solidFill>
-                  <a:srgbClr val="A8431F"/>
-                </a:solidFill>
-                <a:latin typeface="Calibri" pitchFamily="34" charset="0"/>
-                <a:ea typeface="Calibri" pitchFamily="34" charset="-122"/>
-                <a:cs typeface="Calibri" pitchFamily="34" charset="-120"/>
-              </a:rPr>
-              <a:t>20% brain → gut  (commands)</a:t>
-            </a:r>
-            <a:endParaRPr lang="en-US" sz="1100" dirty="0"/>
+              <a:t>20%  brain → gut  (commands)</a:t>
+            </a:r>
+            <a:endParaRPr lang="en-US" sz="1230" dirty="0"/>
           </a:p>
         </p:txBody>
       </p:sp>
@@ -20792,7 +20680,7 @@
       </p:sp>
       <p:sp>
         <p:nvSpPr>
-          <p:cNvPr id="30" name="Diagram panel"/>
+          <p:cNvPr id="5" name="Shape 3"/>
           <p:cNvSpPr/>
           <p:nvPr/>
         </p:nvSpPr>
@@ -20802,10 +20690,12 @@
             <a:ext cx="5212080" cy="4206240"/>
           </a:xfrm>
           <a:prstGeom prst="roundRect">
-            <a:avLst/>
+            <a:avLst>
+              <a:gd name="adj" fmla="val 1957"/>
+            </a:avLst>
           </a:prstGeom>
           <a:solidFill>
-            <a:srgbClr val="FBF7F2"/>
+            <a:srgbClr val="F3F0EC"/>
           </a:solidFill>
           <a:ln w="12700">
             <a:solidFill>
@@ -20813,38 +20703,25 @@
             </a:solidFill>
             <a:prstDash val="solid"/>
           </a:ln>
-        </p:spPr>
-      </p:sp>
-      <p:sp>
-        <p:nvSpPr>
-          <p:cNvPr id="31" name="Lumen band"/>
-          <p:cNvSpPr/>
-          <p:nvPr/>
-        </p:nvSpPr>
-        <p:spPr>
-          <a:xfrm>
-            <a:off x="6580000" y="1920000"/>
-            <a:ext cx="4840000" cy="600000"/>
-          </a:xfrm>
-          <a:prstGeom prst="rect">
-            <a:avLst/>
-          </a:prstGeom>
-          <a:solidFill>
-            <a:srgbClr val="FCF4E3"/>
-          </a:solidFill>
-          <a:ln/>
-        </p:spPr>
-      </p:sp>
-      <p:sp>
-        <p:nvSpPr>
-          <p:cNvPr id="32" name="Lumen label"/>
-          <p:cNvSpPr/>
-          <p:nvPr/>
-        </p:nvSpPr>
-        <p:spPr>
-          <a:xfrm>
-            <a:off x="6700000" y="2070000"/>
-            <a:ext cx="1600000" cy="210000"/>
+          <a:effectLst>
+            <a:outerShdw sx="100000" sy="100000" kx="0" ky="0" algn="bl" rotWithShape="0" blurRad="114300" dist="38100" dir="8100000">
+              <a:srgbClr val="000000">
+                <a:alpha val="16000"/>
+              </a:srgbClr>
+            </a:outerShdw>
+          </a:effectLst>
+        </p:spPr>
+      </p:sp>
+      <p:sp>
+        <p:nvSpPr>
+          <p:cNvPr id="6" name="Text 4"/>
+          <p:cNvSpPr/>
+          <p:nvPr/>
+        </p:nvSpPr>
+        <p:spPr>
+          <a:xfrm>
+            <a:off x="6492240" y="1554480"/>
+            <a:ext cx="914400" cy="914400"/>
           </a:xfrm>
           <a:prstGeom prst="rect">
             <a:avLst/>
@@ -20856,703 +20733,117 @@
           <a:bodyPr wrap="square" lIns="0" tIns="0" rIns="0" bIns="0" rtlCol="0" anchor="ctr"/>
           <a:lstStyle/>
           <a:p>
-            <a:pPr algn="l" indent="0" marL="0">
-              <a:buNone/>
-            </a:pPr>
-            <a:r>
-              <a:rPr lang="en-US" sz="950" b="1" dirty="0">
-                <a:solidFill>
-                  <a:srgbClr val="A8431F"/>
+            <a:pPr indent="0" marL="0">
+              <a:buNone/>
+            </a:pPr>
+            <a:r>
+              <a:rPr lang="en-US" sz="6000" dirty="0">
+                <a:solidFill>
+                  <a:srgbClr val="D2603A"/>
+                </a:solidFill>
+                <a:latin typeface="Georgia" pitchFamily="34" charset="0"/>
+                <a:ea typeface="Georgia" pitchFamily="34" charset="-122"/>
+                <a:cs typeface="Georgia" pitchFamily="34" charset="-120"/>
+              </a:rPr>
+              <a:t>“</a:t>
+            </a:r>
+            <a:endParaRPr lang="en-US" sz="6000" dirty="0"/>
+          </a:p>
+        </p:txBody>
+      </p:sp>
+      <p:sp>
+        <p:nvSpPr>
+          <p:cNvPr id="7" name="Text 5"/>
+          <p:cNvSpPr/>
+          <p:nvPr/>
+        </p:nvSpPr>
+        <p:spPr>
+          <a:xfrm>
+            <a:off x="6858000" y="2331720"/>
+            <a:ext cx="4389120" cy="2377440"/>
+          </a:xfrm>
+          <a:prstGeom prst="rect">
+            <a:avLst/>
+          </a:prstGeom>
+          <a:noFill/>
+          <a:ln/>
+        </p:spPr>
+        <p:txBody>
+          <a:bodyPr wrap="square" lIns="0" tIns="0" rIns="0" bIns="0" rtlCol="0" anchor="ctr"/>
+          <a:lstStyle/>
+          <a:p>
+            <a:pPr indent="0" marL="0">
+              <a:lnSpc>
+                <a:spcPct val="115000"/>
+              </a:lnSpc>
+              <a:buNone/>
+            </a:pPr>
+            <a:r>
+              <a:rPr lang="en-US" sz="1650" i="1" dirty="0">
+                <a:solidFill>
+                  <a:srgbClr val="3A322C"/>
+                </a:solidFill>
+                <a:latin typeface="Georgia" pitchFamily="34" charset="0"/>
+                <a:ea typeface="Georgia" pitchFamily="34" charset="-122"/>
+                <a:cs typeface="Georgia" pitchFamily="34" charset="-120"/>
+              </a:rPr>
+              <a:t>Some enteroendocrine cells have long, basal extensions, called neuropods, which synapse with vagal afferent fibers to directly convey sugar-sensing information to the brain within milliseconds.</a:t>
+            </a:r>
+            <a:endParaRPr lang="en-US" sz="1650" dirty="0"/>
+          </a:p>
+        </p:txBody>
+      </p:sp>
+      <p:sp>
+        <p:nvSpPr>
+          <p:cNvPr id="8" name="Text 6"/>
+          <p:cNvSpPr/>
+          <p:nvPr/>
+        </p:nvSpPr>
+        <p:spPr>
+          <a:xfrm>
+            <a:off x="6858000" y="4937760"/>
+            <a:ext cx="4389120" cy="822960"/>
+          </a:xfrm>
+          <a:prstGeom prst="rect">
+            <a:avLst/>
+          </a:prstGeom>
+          <a:noFill/>
+          <a:ln/>
+        </p:spPr>
+        <p:txBody>
+          <a:bodyPr wrap="square" lIns="0" tIns="0" rIns="0" bIns="0" rtlCol="0" anchor="ctr"/>
+          <a:lstStyle/>
+          <a:p>
+            <a:pPr indent="0" marL="0">
+              <a:buNone/>
+            </a:pPr>
+            <a:r>
+              <a:rPr lang="en-US" sz="1300" b="1" dirty="0">
+                <a:solidFill>
+                  <a:srgbClr val="201B17"/>
                 </a:solidFill>
                 <a:latin typeface="Calibri" pitchFamily="34" charset="0"/>
                 <a:ea typeface="Calibri" pitchFamily="34" charset="-122"/>
                 <a:cs typeface="Calibri" pitchFamily="34" charset="-120"/>
               </a:rPr>
-              <a:t>GUT INTERIOR</a:t>
-            </a:r>
-            <a:endParaRPr lang="en-US" sz="950" dirty="0"/>
-          </a:p>
-        </p:txBody>
-      </p:sp>
-      <p:sp>
-        <p:nvSpPr>
-          <p:cNvPr id="33" name="Glucose molecule"/>
-          <p:cNvSpPr/>
-          <p:nvPr/>
-        </p:nvSpPr>
-        <p:spPr>
-          <a:xfrm>
-            <a:off x="7750000" y="2070000"/>
-            <a:ext cx="310000" cy="310000"/>
-          </a:xfrm>
-          <a:prstGeom prst="ellipse">
-            <a:avLst/>
-          </a:prstGeom>
-          <a:solidFill>
-            <a:srgbClr val="D9A441"/>
-          </a:solidFill>
-          <a:ln w="12700">
-            <a:solidFill>
-              <a:srgbClr val="A8431F"/>
-            </a:solidFill>
-            <a:prstDash val="solid"/>
-          </a:ln>
-        </p:spPr>
-      </p:sp>
-      <p:sp>
-        <p:nvSpPr>
-          <p:cNvPr id="34" name="Glucose G"/>
-          <p:cNvSpPr/>
-          <p:nvPr/>
-        </p:nvSpPr>
-        <p:spPr>
-          <a:xfrm>
-            <a:off x="7750000" y="2110000"/>
-            <a:ext cx="310000" cy="210000"/>
-          </a:xfrm>
-          <a:prstGeom prst="rect">
-            <a:avLst/>
-          </a:prstGeom>
-          <a:noFill/>
-          <a:ln/>
-        </p:spPr>
-        <p:txBody>
-          <a:bodyPr wrap="square" lIns="0" tIns="0" rIns="0" bIns="0" rtlCol="0" anchor="ctr"/>
-          <a:lstStyle/>
-          <a:p>
-            <a:pPr algn="ctr" indent="0" marL="0">
-              <a:buNone/>
-            </a:pPr>
-            <a:r>
-              <a:rPr lang="en-US" sz="1050" b="1" dirty="0">
-                <a:solidFill>
-                  <a:srgbClr val="FFFDFA"/>
+              <a:t>— Josephine M. Egan, M.D.
+</a:t>
+            </a:r>
+            <a:pPr indent="0" marL="0">
+              <a:buNone/>
+            </a:pPr>
+            <a:r>
+              <a:rPr lang="en-US" sz="1300" dirty="0">
+                <a:solidFill>
+                  <a:srgbClr val="6B625A"/>
                 </a:solidFill>
                 <a:latin typeface="Calibri" pitchFamily="34" charset="0"/>
                 <a:ea typeface="Calibri" pitchFamily="34" charset="-122"/>
                 <a:cs typeface="Calibri" pitchFamily="34" charset="-120"/>
               </a:rPr>
-              <a:t>G</a:t>
-            </a:r>
-            <a:endParaRPr lang="en-US" sz="1050" dirty="0"/>
-          </a:p>
-        </p:txBody>
-      </p:sp>
-      <p:sp>
-        <p:nvSpPr>
-          <p:cNvPr id="35" name="Sweetener molecule"/>
-          <p:cNvSpPr/>
-          <p:nvPr/>
-        </p:nvSpPr>
-        <p:spPr>
-          <a:xfrm>
-            <a:off x="9840000" y="2070000"/>
-            <a:ext cx="310000" cy="310000"/>
-          </a:xfrm>
-          <a:prstGeom prst="ellipse">
-            <a:avLst/>
-          </a:prstGeom>
-          <a:solidFill>
-            <a:srgbClr val="6B625A">
-              <a:alpha val="70000"/>
-            </a:srgbClr>
-          </a:solidFill>
-          <a:ln w="9525">
-            <a:solidFill>
-              <a:srgbClr val="201B17"/>
-            </a:solidFill>
-            <a:prstDash val="solid"/>
-          </a:ln>
-        </p:spPr>
-      </p:sp>
-      <p:sp>
-        <p:nvSpPr>
-          <p:cNvPr id="36" name="Sweetener art"/>
-          <p:cNvSpPr/>
-          <p:nvPr/>
-        </p:nvSpPr>
-        <p:spPr>
-          <a:xfrm>
-            <a:off x="9840000" y="2110000"/>
-            <a:ext cx="310000" cy="210000"/>
-          </a:xfrm>
-          <a:prstGeom prst="rect">
-            <a:avLst/>
-          </a:prstGeom>
-          <a:noFill/>
-          <a:ln/>
-        </p:spPr>
-        <p:txBody>
-          <a:bodyPr wrap="square" lIns="0" tIns="0" rIns="0" bIns="0" rtlCol="0" anchor="ctr"/>
-          <a:lstStyle/>
-          <a:p>
-            <a:pPr algn="ctr" indent="0" marL="0">
-              <a:buNone/>
-            </a:pPr>
-            <a:r>
-              <a:rPr lang="en-US" sz="850" b="1" dirty="0">
-                <a:solidFill>
-                  <a:srgbClr val="FFFDFA"/>
-                </a:solidFill>
-                <a:latin typeface="Calibri" pitchFamily="34" charset="0"/>
-                <a:ea typeface="Calibri" pitchFamily="34" charset="-122"/>
-                <a:cs typeface="Calibri" pitchFamily="34" charset="-120"/>
-              </a:rPr>
-              <a:t>art</a:t>
-            </a:r>
-            <a:endParaRPr lang="en-US" sz="850" dirty="0"/>
-          </a:p>
-        </p:txBody>
-      </p:sp>
-      <p:sp>
-        <p:nvSpPr>
-          <p:cNvPr id="37" name="Strong SGLT1 signal"/>
-          <p:cNvSpPr/>
-          <p:nvPr/>
-        </p:nvSpPr>
-        <p:spPr>
-          <a:xfrm>
-            <a:off x="8040000" y="2390000"/>
-            <a:ext cx="720000" cy="520000"/>
-          </a:xfrm>
-          <a:prstGeom prst="line">
-            <a:avLst/>
-          </a:prstGeom>
-          <a:noFill/>
-          <a:ln w="50800">
-            <a:solidFill>
-              <a:srgbClr val="D9A441"/>
-            </a:solidFill>
-            <a:prstDash val="solid"/>
-            <a:headEnd type="triangle"/>
-          </a:ln>
-        </p:spPr>
-      </p:sp>
-      <p:sp>
-        <p:nvSpPr>
-          <p:cNvPr id="38" name="Strong label"/>
-          <p:cNvSpPr/>
-          <p:nvPr/>
-        </p:nvSpPr>
-        <p:spPr>
-          <a:xfrm>
-            <a:off x="8100000" y="2600000"/>
-            <a:ext cx="1050000" cy="220000"/>
-          </a:xfrm>
-          <a:prstGeom prst="rect">
-            <a:avLst/>
-          </a:prstGeom>
-          <a:noFill/>
-          <a:ln/>
-        </p:spPr>
-        <p:txBody>
-          <a:bodyPr wrap="square" lIns="0" tIns="0" rIns="0" bIns="0" rtlCol="0" anchor="ctr"/>
-          <a:lstStyle/>
-          <a:p>
-            <a:pPr algn="ctr" indent="0" marL="0">
-              <a:buNone/>
-            </a:pPr>
-            <a:r>
-              <a:rPr lang="en-US" sz="850" b="1" dirty="0">
-                <a:solidFill>
-                  <a:srgbClr val="A8431F"/>
-                </a:solidFill>
-                <a:latin typeface="Calibri" pitchFamily="34" charset="0"/>
-                <a:ea typeface="Calibri" pitchFamily="34" charset="-122"/>
-                <a:cs typeface="Calibri" pitchFamily="34" charset="-120"/>
-              </a:rPr>
-              <a:t>strong SGLT1</a:t>
-            </a:r>
-            <a:endParaRPr lang="en-US" sz="850" dirty="0"/>
-          </a:p>
-        </p:txBody>
-      </p:sp>
-      <p:sp>
-        <p:nvSpPr>
-          <p:cNvPr id="39" name="Weak sweetener signal"/>
-          <p:cNvSpPr/>
-          <p:nvPr/>
-        </p:nvSpPr>
-        <p:spPr>
-          <a:xfrm>
-            <a:off x="9810000" y="2390000"/>
-            <a:ext cx="-590000" cy="520000"/>
-          </a:xfrm>
-          <a:prstGeom prst="line">
-            <a:avLst/>
-          </a:prstGeom>
-          <a:noFill/>
-          <a:ln w="25400">
-            <a:solidFill>
-              <a:srgbClr val="6B625A"/>
-            </a:solidFill>
-            <a:prstDash val="dash"/>
-            <a:headEnd type="triangle"/>
-          </a:ln>
-        </p:spPr>
-      </p:sp>
-      <p:sp>
-        <p:nvSpPr>
-          <p:cNvPr id="40" name="Weak label"/>
-          <p:cNvSpPr/>
-          <p:nvPr/>
-        </p:nvSpPr>
-        <p:spPr>
-          <a:xfrm>
-            <a:off x="9300000" y="2600000"/>
-            <a:ext cx="1200000" cy="220000"/>
-          </a:xfrm>
-          <a:prstGeom prst="rect">
-            <a:avLst/>
-          </a:prstGeom>
-          <a:noFill/>
-          <a:ln/>
-        </p:spPr>
-        <p:txBody>
-          <a:bodyPr wrap="square" lIns="0" tIns="0" rIns="0" bIns="0" rtlCol="0" anchor="ctr"/>
-          <a:lstStyle/>
-          <a:p>
-            <a:pPr algn="ctr" indent="0" marL="0">
-              <a:buNone/>
-            </a:pPr>
-            <a:r>
-              <a:rPr lang="en-US" sz="850" b="1" dirty="0">
-                <a:solidFill>
-                  <a:srgbClr val="6B625A"/>
-                </a:solidFill>
-                <a:latin typeface="Calibri" pitchFamily="34" charset="0"/>
-                <a:ea typeface="Calibri" pitchFamily="34" charset="-122"/>
-                <a:cs typeface="Calibri" pitchFamily="34" charset="-120"/>
-              </a:rPr>
-              <a:t>weak sweet signal</a:t>
-            </a:r>
-            <a:endParaRPr lang="en-US" sz="850" dirty="0"/>
-          </a:p>
-        </p:txBody>
-      </p:sp>
-      <p:sp>
-        <p:nvSpPr>
-          <p:cNvPr id="41" name="Neuropod cell body"/>
-          <p:cNvSpPr/>
-          <p:nvPr/>
-        </p:nvSpPr>
-        <p:spPr>
-          <a:xfrm rot="10800000">
-            <a:off x="8580000" y="2790000"/>
-            <a:ext cx="780000" cy="1380000"/>
-          </a:xfrm>
-          <a:prstGeom prst="teardrop">
-            <a:avLst/>
-          </a:prstGeom>
-          <a:solidFill>
-            <a:srgbClr val="E3EFEE"/>
-          </a:solidFill>
-          <a:ln w="19050">
-            <a:solidFill>
-              <a:srgbClr val="1F5651"/>
-            </a:solidFill>
-            <a:prstDash val="solid"/>
-          </a:ln>
-        </p:spPr>
-      </p:sp>
-      <p:sp>
-        <p:nvSpPr>
-          <p:cNvPr id="42" name="Neuropod nucleus"/>
-          <p:cNvSpPr/>
-          <p:nvPr/>
-        </p:nvSpPr>
-        <p:spPr>
-          <a:xfrm>
-            <a:off x="8840000" y="3290000"/>
-            <a:ext cx="320000" cy="320000"/>
-          </a:xfrm>
-          <a:prstGeom prst="ellipse">
-            <a:avLst/>
-          </a:prstGeom>
-          <a:solidFill>
-            <a:srgbClr val="FFFDFA"/>
-          </a:solidFill>
-          <a:ln w="12700">
-            <a:solidFill>
-              <a:srgbClr val="1F5651"/>
-            </a:solidFill>
-            <a:prstDash val="solid"/>
-          </a:ln>
-        </p:spPr>
-      </p:sp>
-      <p:sp>
-        <p:nvSpPr>
-          <p:cNvPr id="43" name="Neuropod label"/>
-          <p:cNvSpPr/>
-          <p:nvPr/>
-        </p:nvSpPr>
-        <p:spPr>
-          <a:xfrm>
-            <a:off x="8620000" y="3460000"/>
-            <a:ext cx="760000" cy="440000"/>
-          </a:xfrm>
-          <a:prstGeom prst="rect">
-            <a:avLst/>
-          </a:prstGeom>
-          <a:noFill/>
-          <a:ln/>
-        </p:spPr>
-        <p:txBody>
-          <a:bodyPr wrap="square" lIns="0" tIns="0" rIns="0" bIns="0" rtlCol="0" anchor="ctr"/>
-          <a:lstStyle/>
-          <a:p>
-            <a:pPr algn="ctr" indent="0" marL="0">
-              <a:buNone/>
-            </a:pPr>
-            <a:r>
-              <a:rPr lang="en-US" sz="900" b="1" dirty="0">
-                <a:solidFill>
-                  <a:srgbClr val="1F5651"/>
-                </a:solidFill>
-                <a:latin typeface="Calibri" pitchFamily="34" charset="0"/>
-                <a:ea typeface="Calibri" pitchFamily="34" charset="-122"/>
-                <a:cs typeface="Calibri" pitchFamily="34" charset="-120"/>
-              </a:rPr>
-              <a:t>neuropod</a:t>
-            </a:r>
-            <a:endParaRPr lang="en-US" sz="900" dirty="0"/>
-          </a:p>
-          <a:p>
-            <a:pPr algn="ctr" indent="0" marL="0">
-              <a:buNone/>
-            </a:pPr>
-            <a:r>
-              <a:rPr lang="en-US" sz="900" b="1" dirty="0">
-                <a:solidFill>
-                  <a:srgbClr val="1F5651"/>
-                </a:solidFill>
-                <a:latin typeface="Calibri" pitchFamily="34" charset="0"/>
-                <a:ea typeface="Calibri" pitchFamily="34" charset="-122"/>
-                <a:cs typeface="Calibri" pitchFamily="34" charset="-120"/>
-              </a:rPr>
-              <a:t>cell</a:t>
-            </a:r>
-            <a:endParaRPr lang="en-US" sz="900" dirty="0"/>
-          </a:p>
-        </p:txBody>
-      </p:sp>
-      <p:sp>
-        <p:nvSpPr>
-          <p:cNvPr id="44" name="Neuropod tail"/>
-          <p:cNvSpPr/>
-          <p:nvPr/>
-        </p:nvSpPr>
-        <p:spPr>
-          <a:xfrm>
-            <a:off x="9020000" y="4130000"/>
-            <a:ext cx="430000" cy="460000"/>
-          </a:xfrm>
-          <a:prstGeom prst="line">
-            <a:avLst/>
-          </a:prstGeom>
-          <a:noFill/>
-          <a:ln w="50800">
-            <a:solidFill>
-              <a:srgbClr val="1F5651"/>
-            </a:solidFill>
-            <a:prstDash val="solid"/>
-          </a:ln>
-        </p:spPr>
-      </p:sp>
-      <p:sp>
-        <p:nvSpPr>
-          <p:cNvPr id="45" name="Synaptic cleft"/>
-          <p:cNvSpPr/>
-          <p:nvPr/>
-        </p:nvSpPr>
-        <p:spPr>
-          <a:xfrm>
-            <a:off x="9420000" y="4610000"/>
-            <a:ext cx="300000" cy="0"/>
-          </a:xfrm>
-          <a:prstGeom prst="line">
-            <a:avLst/>
-          </a:prstGeom>
-          <a:noFill/>
-          <a:ln w="76200">
-            <a:solidFill>
-              <a:srgbClr val="E7DDD1"/>
-            </a:solidFill>
-            <a:prstDash val="solid"/>
-          </a:ln>
-        </p:spPr>
-      </p:sp>
-      <p:sp>
-        <p:nvSpPr>
-          <p:cNvPr id="46" name="neurotransmitter 1"/>
-          <p:cNvSpPr/>
-          <p:nvPr/>
-        </p:nvSpPr>
-        <p:spPr>
-          <a:xfrm>
-            <a:off x="9470000" y="4500000"/>
-            <a:ext cx="60000" cy="60000"/>
-          </a:xfrm>
-          <a:prstGeom prst="ellipse">
-            <a:avLst/>
-          </a:prstGeom>
-          <a:solidFill>
-            <a:srgbClr val="D9A441"/>
-          </a:solidFill>
-          <a:ln/>
-        </p:spPr>
-      </p:sp>
-      <p:sp>
-        <p:nvSpPr>
-          <p:cNvPr id="47" name="neurotransmitter 2"/>
-          <p:cNvSpPr/>
-          <p:nvPr/>
-        </p:nvSpPr>
-        <p:spPr>
-          <a:xfrm>
-            <a:off x="9560000" y="4500000"/>
-            <a:ext cx="60000" cy="60000"/>
-          </a:xfrm>
-          <a:prstGeom prst="ellipse">
-            <a:avLst/>
-          </a:prstGeom>
-          <a:solidFill>
-            <a:srgbClr val="D9A441"/>
-          </a:solidFill>
-          <a:ln/>
-        </p:spPr>
-      </p:sp>
-      <p:sp>
-        <p:nvSpPr>
-          <p:cNvPr id="48" name="neurotransmitter 3"/>
-          <p:cNvSpPr/>
-          <p:nvPr/>
-        </p:nvSpPr>
-        <p:spPr>
-          <a:xfrm>
-            <a:off x="9650000" y="4500000"/>
-            <a:ext cx="60000" cy="60000"/>
-          </a:xfrm>
-          <a:prstGeom prst="ellipse">
-            <a:avLst/>
-          </a:prstGeom>
-          <a:solidFill>
-            <a:srgbClr val="D9A441"/>
-          </a:solidFill>
-          <a:ln/>
-        </p:spPr>
-      </p:sp>
-      <p:sp>
-        <p:nvSpPr>
-          <p:cNvPr id="49" name="neurotransmitter 4"/>
-          <p:cNvSpPr/>
-          <p:nvPr/>
-        </p:nvSpPr>
-        <p:spPr>
-          <a:xfrm>
-            <a:off x="9470000" y="4620000"/>
-            <a:ext cx="60000" cy="60000"/>
-          </a:xfrm>
-          <a:prstGeom prst="ellipse">
-            <a:avLst/>
-          </a:prstGeom>
-          <a:solidFill>
-            <a:srgbClr val="D9A441"/>
-          </a:solidFill>
-          <a:ln/>
-        </p:spPr>
-      </p:sp>
-      <p:sp>
-        <p:nvSpPr>
-          <p:cNvPr id="50" name="neurotransmitter 5"/>
-          <p:cNvSpPr/>
-          <p:nvPr/>
-        </p:nvSpPr>
-        <p:spPr>
-          <a:xfrm>
-            <a:off x="9560000" y="4620000"/>
-            <a:ext cx="60000" cy="60000"/>
-          </a:xfrm>
-          <a:prstGeom prst="ellipse">
-            <a:avLst/>
-          </a:prstGeom>
-          <a:solidFill>
-            <a:srgbClr val="D9A441"/>
-          </a:solidFill>
-          <a:ln/>
-        </p:spPr>
-      </p:sp>
-      <p:sp>
-        <p:nvSpPr>
-          <p:cNvPr id="51" name="Vagus nerve"/>
-          <p:cNvSpPr/>
-          <p:nvPr/>
-        </p:nvSpPr>
-        <p:spPr>
-          <a:xfrm>
-            <a:off x="9700000" y="4440000"/>
-            <a:ext cx="1600000" cy="390000"/>
-          </a:xfrm>
-          <a:prstGeom prst="roundRect">
-            <a:avLst/>
-          </a:prstGeom>
-          <a:solidFill>
-            <a:srgbClr val="2F7D77"/>
-          </a:solidFill>
-          <a:ln w="12700">
-            <a:solidFill>
-              <a:srgbClr val="1F5651"/>
-            </a:solidFill>
-            <a:prstDash val="solid"/>
-          </a:ln>
-        </p:spPr>
-      </p:sp>
-      <p:sp>
-        <p:nvSpPr>
-          <p:cNvPr id="52" name="Vagus label"/>
-          <p:cNvSpPr/>
-          <p:nvPr/>
-        </p:nvSpPr>
-        <p:spPr>
-          <a:xfrm>
-            <a:off x="9740000" y="4510000"/>
-            <a:ext cx="1510000" cy="230000"/>
-          </a:xfrm>
-          <a:prstGeom prst="rect">
-            <a:avLst/>
-          </a:prstGeom>
-          <a:noFill/>
-          <a:ln/>
-        </p:spPr>
-        <p:txBody>
-          <a:bodyPr wrap="square" lIns="0" tIns="0" rIns="0" bIns="0" rtlCol="0" anchor="ctr"/>
-          <a:lstStyle/>
-          <a:p>
-            <a:pPr algn="ctr" indent="0" marL="0">
-              <a:buNone/>
-            </a:pPr>
-            <a:r>
-              <a:rPr lang="en-US" sz="1050" b="1" dirty="0">
-                <a:solidFill>
-                  <a:srgbClr val="FFFDFA"/>
-                </a:solidFill>
-                <a:latin typeface="Calibri" pitchFamily="34" charset="0"/>
-                <a:ea typeface="Calibri" pitchFamily="34" charset="-122"/>
-                <a:cs typeface="Calibri" pitchFamily="34" charset="-120"/>
-              </a:rPr>
-              <a:t>VAGUS → brain</a:t>
-            </a:r>
-            <a:endParaRPr lang="en-US" sz="1050" dirty="0"/>
-          </a:p>
-        </p:txBody>
-      </p:sp>
-      <p:sp>
-        <p:nvSpPr>
-          <p:cNvPr id="53" name="Clock"/>
-          <p:cNvSpPr/>
-          <p:nvPr/>
-        </p:nvSpPr>
-        <p:spPr>
-          <a:xfrm>
-            <a:off x="10700000" y="2820000"/>
-            <a:ext cx="430000" cy="430000"/>
-          </a:xfrm>
-          <a:prstGeom prst="ellipse">
-            <a:avLst/>
-          </a:prstGeom>
-          <a:solidFill>
-            <a:srgbClr val="FFFDFA"/>
-          </a:solidFill>
-          <a:ln w="19050">
-            <a:solidFill>
-              <a:srgbClr val="A8431F"/>
-            </a:solidFill>
-            <a:prstDash val="solid"/>
-          </a:ln>
-        </p:spPr>
-      </p:sp>
-      <p:sp>
-        <p:nvSpPr>
-          <p:cNvPr id="54" name="Clock hand 1"/>
-          <p:cNvSpPr/>
-          <p:nvPr/>
-        </p:nvSpPr>
-        <p:spPr>
-          <a:xfrm>
-            <a:off x="10915000" y="3035000"/>
-            <a:ext cx="0" cy="-135000"/>
-          </a:xfrm>
-          <a:prstGeom prst="line">
-            <a:avLst/>
-          </a:prstGeom>
-          <a:noFill/>
-          <a:ln w="12700">
-            <a:solidFill>
-              <a:srgbClr val="A8431F"/>
-            </a:solidFill>
-            <a:prstDash val="solid"/>
-          </a:ln>
-        </p:spPr>
-      </p:sp>
-      <p:sp>
-        <p:nvSpPr>
-          <p:cNvPr id="55" name="Clock hand 2"/>
-          <p:cNvSpPr/>
-          <p:nvPr/>
-        </p:nvSpPr>
-        <p:spPr>
-          <a:xfrm>
-            <a:off x="10915000" y="3035000"/>
-            <a:ext cx="130000" cy="80000"/>
-          </a:xfrm>
-          <a:prstGeom prst="line">
-            <a:avLst/>
-          </a:prstGeom>
-          <a:noFill/>
-          <a:ln w="12700">
-            <a:solidFill>
-              <a:srgbClr val="A8431F"/>
-            </a:solidFill>
-            <a:prstDash val="solid"/>
-          </a:ln>
-        </p:spPr>
-      </p:sp>
-      <p:sp>
-        <p:nvSpPr>
-          <p:cNvPr id="56" name="Clock label"/>
-          <p:cNvSpPr/>
-          <p:nvPr/>
-        </p:nvSpPr>
-        <p:spPr>
-          <a:xfrm>
-            <a:off x="10480000" y="3300000"/>
-            <a:ext cx="870000" cy="220000"/>
-          </a:xfrm>
-          <a:prstGeom prst="rect">
-            <a:avLst/>
-          </a:prstGeom>
-          <a:noFill/>
-          <a:ln/>
-        </p:spPr>
-        <p:txBody>
-          <a:bodyPr wrap="square" lIns="0" tIns="0" rIns="0" bIns="0" rtlCol="0" anchor="ctr"/>
-          <a:lstStyle/>
-          <a:p>
-            <a:pPr algn="ctr" indent="0" marL="0">
-              <a:buNone/>
-            </a:pPr>
-            <a:r>
-              <a:rPr lang="en-US" sz="850" b="1" dirty="0">
-                <a:solidFill>
-                  <a:srgbClr val="A8431F"/>
-                </a:solidFill>
-                <a:latin typeface="Calibri" pitchFamily="34" charset="0"/>
-                <a:ea typeface="Calibri" pitchFamily="34" charset="-122"/>
-                <a:cs typeface="Calibri" pitchFamily="34" charset="-120"/>
-              </a:rPr>
-              <a:t>milliseconds</a:t>
-            </a:r>
-            <a:endParaRPr lang="en-US" sz="850" dirty="0"/>
+              <a:t>New England Journal of Medicine, 2024</a:t>
+            </a:r>
+            <a:endParaRPr lang="en-US" sz="1300" dirty="0"/>
           </a:p>
         </p:txBody>
       </p:sp>
